--- a/yocto_training_all_session_decks/session_decks/D1S7_Build_HandsOn.pptx
+++ b/yocto_training_all_session_decks/session_decks/D1S7_Build_HandsOn.pptx
@@ -5,27 +5,27 @@
     <p:sldMasterId id="2147483648" r:id="rId1"/>
   </p:sldMasterIdLst>
   <p:notesMasterIdLst>
-    <p:notesMasterId r:id="rId8"/>
+    <p:notesMasterId r:id="rId12"/>
   </p:notesMasterIdLst>
   <p:handoutMasterIdLst>
-    <p:handoutMasterId r:id="rId9"/>
+    <p:handoutMasterId r:id="rId13"/>
   </p:handoutMasterIdLst>
   <p:sldIdLst>
-    <p:sldId id="1007" r:id="rId18"/>
-    <p:sldId id="1008" r:id="rId19"/>
-    <p:sldId id="1009" r:id="rId20"/>
-    <p:sldId id="1010" r:id="rId21"/>
-    <p:sldId id="1011" r:id="rId22"/>
-    <p:sldId id="1012" r:id="rId23"/>
-    <p:sldId id="1013" r:id="rId24"/>
-    <p:sldId id="1014" r:id="rId25"/>
-    <p:sldId id="1015" r:id="rId26"/>
-    <p:sldId id="1016" r:id="rId27"/>
+    <p:sldId id="1007" r:id="rId2"/>
+    <p:sldId id="1008" r:id="rId3"/>
+    <p:sldId id="1009" r:id="rId4"/>
+    <p:sldId id="1010" r:id="rId5"/>
+    <p:sldId id="1011" r:id="rId6"/>
+    <p:sldId id="1012" r:id="rId7"/>
+    <p:sldId id="1013" r:id="rId8"/>
+    <p:sldId id="1014" r:id="rId9"/>
+    <p:sldId id="1015" r:id="rId10"/>
+    <p:sldId id="1016" r:id="rId11"/>
   </p:sldIdLst>
   <p:sldSz cx="12192000" cy="6858000"/>
   <p:notesSz cx="6858000" cy="9144000"/>
   <p:custDataLst>
-    <p:tags r:id="rId10"/>
+    <p:tags r:id="rId14"/>
   </p:custDataLst>
   <p:defaultTextStyle>
     <a:defPPr>
@@ -2931,7 +2931,7 @@
           <a:p>
             <a:fld id="{0CEC647C-F50C-4F78-AA33-D7AA6CDA18EE}" type="datetimeFigureOut">
               <a:rPr lang="en-US" smtClean="0"/>
-              <a:t>7/13/2025</a:t>
+              <a:t>6/8/2026</a:t>
             </a:fld>
             <a:endParaRPr lang="en-US"/>
           </a:p>
@@ -3096,7 +3096,7 @@
           <a:p>
             <a:fld id="{3A83341F-E62C-483B-84B4-966F8BE46097}" type="datetimeFigureOut">
               <a:rPr lang="en-US" smtClean="0"/>
-              <a:t>7/13/2025</a:t>
+              <a:t>6/8/2026</a:t>
             </a:fld>
             <a:endParaRPr lang="en-US"/>
           </a:p>
@@ -5180,8 +5180,8 @@
 </p:sldMaster>
 </file>
 
-<file path=ppt/slides/slide10.xml><?xml version="1.0" encoding="utf-8"?>
-<p:sld xmlns:a="http://schemas.openxmlformats.org/drawingml/2006/main" xmlns:p="http://schemas.openxmlformats.org/presentationml/2006/main" xmlns:r="http://schemas.openxmlformats.org/officeDocument/2006/relationships">
+<file path=ppt/slides/slide1.xml><?xml version="1.0" encoding="utf-8"?>
+<p:sld xmlns:a="http://schemas.openxmlformats.org/drawingml/2006/main" xmlns:r="http://schemas.openxmlformats.org/officeDocument/2006/relationships" xmlns:p="http://schemas.openxmlformats.org/presentationml/2006/main">
   <p:cSld>
     <p:spTree>
       <p:nvGrpSpPr>
@@ -5189,7 +5189,131 @@
         <p:cNvGrpSpPr/>
         <p:nvPr/>
       </p:nvGrpSpPr>
-      <p:grpSpPr/>
+      <p:grpSpPr>
+        <a:xfrm>
+          <a:off x="0" y="0"/>
+          <a:ext cx="0" cy="0"/>
+          <a:chOff x="0" y="0"/>
+          <a:chExt cx="0" cy="0"/>
+        </a:xfrm>
+      </p:grpSpPr>
+      <p:sp>
+        <p:nvSpPr>
+          <p:cNvPr id="2" name="Title 1"/>
+          <p:cNvSpPr>
+            <a:spLocks noGrp="1"/>
+          </p:cNvSpPr>
+          <p:nvPr>
+            <p:ph type="ctrTitle"/>
+          </p:nvPr>
+        </p:nvSpPr>
+        <p:spPr/>
+        <p:txBody>
+          <a:bodyPr/>
+          <a:lstStyle/>
+          <a:p>
+            <a:r>
+              <a:rPr sz="4400" b="1" dirty="0">
+                <a:solidFill>
+                  <a:srgbClr val="FFFFFF"/>
+                </a:solidFill>
+                <a:latin typeface="Calibri"/>
+              </a:rPr>
+              <a:t>Hands-On</a:t>
+            </a:r>
+            <a:r>
+              <a:rPr lang="en-IN" sz="4400" b="1" dirty="0">
+                <a:solidFill>
+                  <a:srgbClr val="FFFFFF"/>
+                </a:solidFill>
+                <a:latin typeface="Calibri"/>
+              </a:rPr>
+              <a:t>: </a:t>
+            </a:r>
+            <a:r>
+              <a:rPr sz="4400" b="1" dirty="0">
+                <a:solidFill>
+                  <a:srgbClr val="FFFFFF"/>
+                </a:solidFill>
+                <a:latin typeface="Calibri"/>
+              </a:rPr>
+              <a:t>First </a:t>
+            </a:r>
+            <a:r>
+              <a:rPr sz="4400" b="1" dirty="0" err="1">
+                <a:solidFill>
+                  <a:srgbClr val="FFFFFF"/>
+                </a:solidFill>
+                <a:latin typeface="Calibri"/>
+              </a:rPr>
+              <a:t>Yocto</a:t>
+            </a:r>
+            <a:r>
+              <a:rPr sz="4400" b="1" dirty="0">
+                <a:solidFill>
+                  <a:srgbClr val="FFFFFF"/>
+                </a:solidFill>
+                <a:latin typeface="Calibri"/>
+              </a:rPr>
+              <a:t> Build</a:t>
+            </a:r>
+          </a:p>
+        </p:txBody>
+      </p:sp>
+      <p:sp>
+        <p:nvSpPr>
+          <p:cNvPr id="3" name="Subtitle 2"/>
+          <p:cNvSpPr>
+            <a:spLocks noGrp="1"/>
+          </p:cNvSpPr>
+          <p:nvPr>
+            <p:ph type="subTitle" idx="1"/>
+          </p:nvPr>
+        </p:nvSpPr>
+        <p:spPr/>
+        <p:txBody>
+          <a:bodyPr>
+            <a:normAutofit/>
+          </a:bodyPr>
+          <a:lstStyle/>
+          <a:p>
+            <a:r>
+              <a:rPr sz="1800" dirty="0">
+                <a:solidFill>
+                  <a:srgbClr val="FFFFFF"/>
+                </a:solidFill>
+                <a:latin typeface="Calibri"/>
+              </a:rPr>
+              <a:t>Build environment + first custom image</a:t>
+            </a:r>
+          </a:p>
+        </p:txBody>
+      </p:sp>
+    </p:spTree>
+  </p:cSld>
+  <p:clrMapOvr>
+    <a:masterClrMapping/>
+  </p:clrMapOvr>
+</p:sld>
+</file>
+
+<file path=ppt/slides/slide10.xml><?xml version="1.0" encoding="utf-8"?>
+<p:sld xmlns:a="http://schemas.openxmlformats.org/drawingml/2006/main" xmlns:r="http://schemas.openxmlformats.org/officeDocument/2006/relationships" xmlns:p="http://schemas.openxmlformats.org/presentationml/2006/main">
+  <p:cSld>
+    <p:spTree>
+      <p:nvGrpSpPr>
+        <p:cNvPr id="1" name=""/>
+        <p:cNvGrpSpPr/>
+        <p:nvPr/>
+      </p:nvGrpSpPr>
+      <p:grpSpPr>
+        <a:xfrm>
+          <a:off x="0" y="0"/>
+          <a:ext cx="0" cy="0"/>
+          <a:chOff x="0" y="0"/>
+          <a:chExt cx="0" cy="0"/>
+        </a:xfrm>
+      </p:grpSpPr>
       <p:sp>
         <p:nvSpPr>
           <p:cNvPr id="2" name="Title 1"/>
@@ -5208,11 +5332,11 @@
             <a:r>
               <a:rPr sz="3200" b="1">
                 <a:solidFill>
-                  <a:srgbClr val="CC0066"/>
+                  <a:srgbClr val="663399"/>
                 </a:solidFill>
                 <a:latin typeface="Calibri"/>
               </a:rPr>
-              <a:t>Step 2 — Walk Through the Build Directory</a:t>
+              <a:t>Session Summary</a:t>
             </a:r>
           </a:p>
         </p:txBody>
@@ -5234,7 +5358,7 @@
           <a:noFill/>
         </p:spPr>
         <p:txBody>
-          <a:bodyPr wrap="square" anchor="t" lIns="45720" rIns="45720">
+          <a:bodyPr wrap="square" lIns="45720" rIns="45720" anchor="t">
             <a:spAutoFit/>
           </a:bodyPr>
           <a:lstStyle/>
@@ -5247,7 +5371,964 @@
                 </a:solidFill>
                 <a:latin typeface="Calibri"/>
               </a:rPr>
-              <a:t>Knowing where things live saves hours later.</a:t>
+              <a:t>5 things to remember from this session.</a:t>
+            </a:r>
+          </a:p>
+        </p:txBody>
+      </p:sp>
+      <p:sp>
+        <p:nvSpPr>
+          <p:cNvPr id="4" name="Rounded Rectangle 3"/>
+          <p:cNvSpPr/>
+          <p:nvPr/>
+        </p:nvSpPr>
+        <p:spPr>
+          <a:xfrm>
+            <a:off x="822960" y="1874519"/>
+            <a:ext cx="457200" cy="548640"/>
+          </a:xfrm>
+          <a:prstGeom prst="roundRect">
+            <a:avLst/>
+          </a:prstGeom>
+          <a:solidFill>
+            <a:srgbClr val="CC0066"/>
+          </a:solidFill>
+          <a:ln>
+            <a:noFill/>
+          </a:ln>
+          <a:effectLst/>
+        </p:spPr>
+        <p:style>
+          <a:lnRef idx="1">
+            <a:schemeClr val="accent1"/>
+          </a:lnRef>
+          <a:fillRef idx="3">
+            <a:schemeClr val="accent1"/>
+          </a:fillRef>
+          <a:effectRef idx="2">
+            <a:schemeClr val="accent1"/>
+          </a:effectRef>
+          <a:fontRef idx="minor">
+            <a:schemeClr val="lt1"/>
+          </a:fontRef>
+        </p:style>
+        <p:txBody>
+          <a:bodyPr lIns="0" rIns="0" rtlCol="0" anchor="ctr"/>
+          <a:lstStyle/>
+          <a:p>
+            <a:pPr algn="ctr"/>
+            <a:r>
+              <a:rPr sz="2200" b="1">
+                <a:solidFill>
+                  <a:srgbClr val="FFFFFF"/>
+                </a:solidFill>
+                <a:latin typeface="Calibri"/>
+              </a:rPr>
+              <a:t>1</a:t>
+            </a:r>
+          </a:p>
+        </p:txBody>
+      </p:sp>
+      <p:sp>
+        <p:nvSpPr>
+          <p:cNvPr id="5" name="TextBox 4"/>
+          <p:cNvSpPr txBox="1"/>
+          <p:nvPr/>
+        </p:nvSpPr>
+        <p:spPr>
+          <a:xfrm>
+            <a:off x="1417320" y="1874519"/>
+            <a:ext cx="10058400" cy="320040"/>
+          </a:xfrm>
+          <a:prstGeom prst="rect">
+            <a:avLst/>
+          </a:prstGeom>
+          <a:noFill/>
+        </p:spPr>
+        <p:txBody>
+          <a:bodyPr wrap="square" lIns="45720" rIns="45720" anchor="t">
+            <a:spAutoFit/>
+          </a:bodyPr>
+          <a:lstStyle/>
+          <a:p>
+            <a:pPr algn="l"/>
+            <a:r>
+              <a:rPr sz="1600" b="1" i="0">
+                <a:solidFill>
+                  <a:srgbClr val="663399"/>
+                </a:solidFill>
+                <a:latin typeface="Calibri"/>
+              </a:rPr>
+              <a:t>You built and booted a Yocto image with your own package</a:t>
+            </a:r>
+          </a:p>
+        </p:txBody>
+      </p:sp>
+      <p:sp>
+        <p:nvSpPr>
+          <p:cNvPr id="6" name="TextBox 5"/>
+          <p:cNvSpPr txBox="1"/>
+          <p:nvPr/>
+        </p:nvSpPr>
+        <p:spPr>
+          <a:xfrm>
+            <a:off x="1417320" y="2185415"/>
+            <a:ext cx="10058400" cy="320040"/>
+          </a:xfrm>
+          <a:prstGeom prst="rect">
+            <a:avLst/>
+          </a:prstGeom>
+          <a:noFill/>
+        </p:spPr>
+        <p:txBody>
+          <a:bodyPr wrap="square" lIns="45720" rIns="45720" anchor="t">
+            <a:spAutoFit/>
+          </a:bodyPr>
+          <a:lstStyle/>
+          <a:p>
+            <a:pPr algn="l"/>
+            <a:r>
+              <a:rPr sz="1300" b="0" i="0">
+                <a:solidFill>
+                  <a:srgbClr val="333333"/>
+                </a:solidFill>
+                <a:latin typeface="Calibri"/>
+              </a:rPr>
+              <a:t>All the rest of the course just extends this skill</a:t>
+            </a:r>
+          </a:p>
+        </p:txBody>
+      </p:sp>
+      <p:sp>
+        <p:nvSpPr>
+          <p:cNvPr id="7" name="Rounded Rectangle 6"/>
+          <p:cNvSpPr/>
+          <p:nvPr/>
+        </p:nvSpPr>
+        <p:spPr>
+          <a:xfrm>
+            <a:off x="822960" y="2587752"/>
+            <a:ext cx="457200" cy="548640"/>
+          </a:xfrm>
+          <a:prstGeom prst="roundRect">
+            <a:avLst/>
+          </a:prstGeom>
+          <a:solidFill>
+            <a:srgbClr val="CC0066"/>
+          </a:solidFill>
+          <a:ln>
+            <a:noFill/>
+          </a:ln>
+          <a:effectLst/>
+        </p:spPr>
+        <p:style>
+          <a:lnRef idx="1">
+            <a:schemeClr val="accent1"/>
+          </a:lnRef>
+          <a:fillRef idx="3">
+            <a:schemeClr val="accent1"/>
+          </a:fillRef>
+          <a:effectRef idx="2">
+            <a:schemeClr val="accent1"/>
+          </a:effectRef>
+          <a:fontRef idx="minor">
+            <a:schemeClr val="lt1"/>
+          </a:fontRef>
+        </p:style>
+        <p:txBody>
+          <a:bodyPr lIns="0" rIns="0" rtlCol="0" anchor="ctr"/>
+          <a:lstStyle/>
+          <a:p>
+            <a:pPr algn="ctr"/>
+            <a:r>
+              <a:rPr sz="2200" b="1">
+                <a:solidFill>
+                  <a:srgbClr val="FFFFFF"/>
+                </a:solidFill>
+                <a:latin typeface="Calibri"/>
+              </a:rPr>
+              <a:t>2</a:t>
+            </a:r>
+          </a:p>
+        </p:txBody>
+      </p:sp>
+      <p:sp>
+        <p:nvSpPr>
+          <p:cNvPr id="8" name="TextBox 7"/>
+          <p:cNvSpPr txBox="1"/>
+          <p:nvPr/>
+        </p:nvSpPr>
+        <p:spPr>
+          <a:xfrm>
+            <a:off x="1417320" y="2587752"/>
+            <a:ext cx="10058400" cy="320040"/>
+          </a:xfrm>
+          <a:prstGeom prst="rect">
+            <a:avLst/>
+          </a:prstGeom>
+          <a:noFill/>
+        </p:spPr>
+        <p:txBody>
+          <a:bodyPr wrap="square" lIns="45720" rIns="45720" anchor="t">
+            <a:spAutoFit/>
+          </a:bodyPr>
+          <a:lstStyle/>
+          <a:p>
+            <a:pPr algn="l"/>
+            <a:r>
+              <a:rPr sz="1600" b="1" i="0">
+                <a:solidFill>
+                  <a:srgbClr val="663399"/>
+                </a:solidFill>
+                <a:latin typeface="Calibri"/>
+              </a:rPr>
+              <a:t>meta-trainerdemo is your sandbox</a:t>
+            </a:r>
+          </a:p>
+        </p:txBody>
+      </p:sp>
+      <p:sp>
+        <p:nvSpPr>
+          <p:cNvPr id="9" name="TextBox 8"/>
+          <p:cNvSpPr txBox="1"/>
+          <p:nvPr/>
+        </p:nvSpPr>
+        <p:spPr>
+          <a:xfrm>
+            <a:off x="1417320" y="2898648"/>
+            <a:ext cx="10058400" cy="320040"/>
+          </a:xfrm>
+          <a:prstGeom prst="rect">
+            <a:avLst/>
+          </a:prstGeom>
+          <a:noFill/>
+        </p:spPr>
+        <p:txBody>
+          <a:bodyPr wrap="square" lIns="45720" rIns="45720" anchor="t">
+            <a:spAutoFit/>
+          </a:bodyPr>
+          <a:lstStyle/>
+          <a:p>
+            <a:pPr algn="l"/>
+            <a:r>
+              <a:rPr sz="1300" b="0" i="0">
+                <a:solidFill>
+                  <a:srgbClr val="333333"/>
+                </a:solidFill>
+                <a:latin typeface="Calibri"/>
+              </a:rPr>
+              <a:t>Every customization you'll do this week lives in this one layer</a:t>
+            </a:r>
+          </a:p>
+        </p:txBody>
+      </p:sp>
+      <p:sp>
+        <p:nvSpPr>
+          <p:cNvPr id="10" name="Rounded Rectangle 9"/>
+          <p:cNvSpPr/>
+          <p:nvPr/>
+        </p:nvSpPr>
+        <p:spPr>
+          <a:xfrm>
+            <a:off x="822960" y="3300984"/>
+            <a:ext cx="457200" cy="548640"/>
+          </a:xfrm>
+          <a:prstGeom prst="roundRect">
+            <a:avLst/>
+          </a:prstGeom>
+          <a:solidFill>
+            <a:srgbClr val="CC0066"/>
+          </a:solidFill>
+          <a:ln>
+            <a:noFill/>
+          </a:ln>
+          <a:effectLst/>
+        </p:spPr>
+        <p:style>
+          <a:lnRef idx="1">
+            <a:schemeClr val="accent1"/>
+          </a:lnRef>
+          <a:fillRef idx="3">
+            <a:schemeClr val="accent1"/>
+          </a:fillRef>
+          <a:effectRef idx="2">
+            <a:schemeClr val="accent1"/>
+          </a:effectRef>
+          <a:fontRef idx="minor">
+            <a:schemeClr val="lt1"/>
+          </a:fontRef>
+        </p:style>
+        <p:txBody>
+          <a:bodyPr lIns="0" rIns="0" rtlCol="0" anchor="ctr"/>
+          <a:lstStyle/>
+          <a:p>
+            <a:pPr algn="ctr"/>
+            <a:r>
+              <a:rPr sz="2200" b="1">
+                <a:solidFill>
+                  <a:srgbClr val="FFFFFF"/>
+                </a:solidFill>
+                <a:latin typeface="Calibri"/>
+              </a:rPr>
+              <a:t>3</a:t>
+            </a:r>
+          </a:p>
+        </p:txBody>
+      </p:sp>
+      <p:sp>
+        <p:nvSpPr>
+          <p:cNvPr id="11" name="TextBox 10"/>
+          <p:cNvSpPr txBox="1"/>
+          <p:nvPr/>
+        </p:nvSpPr>
+        <p:spPr>
+          <a:xfrm>
+            <a:off x="1417320" y="3300984"/>
+            <a:ext cx="10058400" cy="320040"/>
+          </a:xfrm>
+          <a:prstGeom prst="rect">
+            <a:avLst/>
+          </a:prstGeom>
+          <a:noFill/>
+        </p:spPr>
+        <p:txBody>
+          <a:bodyPr wrap="square" lIns="45720" rIns="45720" anchor="t">
+            <a:spAutoFit/>
+          </a:bodyPr>
+          <a:lstStyle/>
+          <a:p>
+            <a:pPr algn="l"/>
+            <a:r>
+              <a:rPr sz="1600" b="1" i="0">
+                <a:solidFill>
+                  <a:srgbClr val="663399"/>
+                </a:solidFill>
+                <a:latin typeface="Calibri"/>
+              </a:rPr>
+              <a:t>The pattern: layer → recipe → IMAGE_INSTALL → bitbake</a:t>
+            </a:r>
+          </a:p>
+        </p:txBody>
+      </p:sp>
+      <p:sp>
+        <p:nvSpPr>
+          <p:cNvPr id="12" name="TextBox 11"/>
+          <p:cNvSpPr txBox="1"/>
+          <p:nvPr/>
+        </p:nvSpPr>
+        <p:spPr>
+          <a:xfrm>
+            <a:off x="1417320" y="3611879"/>
+            <a:ext cx="10058400" cy="320040"/>
+          </a:xfrm>
+          <a:prstGeom prst="rect">
+            <a:avLst/>
+          </a:prstGeom>
+          <a:noFill/>
+        </p:spPr>
+        <p:txBody>
+          <a:bodyPr wrap="square" lIns="45720" rIns="45720" anchor="t">
+            <a:spAutoFit/>
+          </a:bodyPr>
+          <a:lstStyle/>
+          <a:p>
+            <a:pPr algn="l"/>
+            <a:r>
+              <a:rPr sz="1300" b="0" i="0">
+                <a:solidFill>
+                  <a:srgbClr val="333333"/>
+                </a:solidFill>
+                <a:latin typeface="Calibri"/>
+              </a:rPr>
+              <a:t>Memorize that flow — it's 80% of practical Yocto work</a:t>
+            </a:r>
+          </a:p>
+        </p:txBody>
+      </p:sp>
+      <p:sp>
+        <p:nvSpPr>
+          <p:cNvPr id="13" name="Rounded Rectangle 12"/>
+          <p:cNvSpPr/>
+          <p:nvPr/>
+        </p:nvSpPr>
+        <p:spPr>
+          <a:xfrm>
+            <a:off x="822960" y="4014215"/>
+            <a:ext cx="457200" cy="548640"/>
+          </a:xfrm>
+          <a:prstGeom prst="roundRect">
+            <a:avLst/>
+          </a:prstGeom>
+          <a:solidFill>
+            <a:srgbClr val="CC0066"/>
+          </a:solidFill>
+          <a:ln>
+            <a:noFill/>
+          </a:ln>
+          <a:effectLst/>
+        </p:spPr>
+        <p:style>
+          <a:lnRef idx="1">
+            <a:schemeClr val="accent1"/>
+          </a:lnRef>
+          <a:fillRef idx="3">
+            <a:schemeClr val="accent1"/>
+          </a:fillRef>
+          <a:effectRef idx="2">
+            <a:schemeClr val="accent1"/>
+          </a:effectRef>
+          <a:fontRef idx="minor">
+            <a:schemeClr val="lt1"/>
+          </a:fontRef>
+        </p:style>
+        <p:txBody>
+          <a:bodyPr lIns="0" rIns="0" rtlCol="0" anchor="ctr"/>
+          <a:lstStyle/>
+          <a:p>
+            <a:pPr algn="ctr"/>
+            <a:r>
+              <a:rPr sz="2200" b="1">
+                <a:solidFill>
+                  <a:srgbClr val="FFFFFF"/>
+                </a:solidFill>
+                <a:latin typeface="Calibri"/>
+              </a:rPr>
+              <a:t>4</a:t>
+            </a:r>
+          </a:p>
+        </p:txBody>
+      </p:sp>
+      <p:sp>
+        <p:nvSpPr>
+          <p:cNvPr id="14" name="TextBox 13"/>
+          <p:cNvSpPr txBox="1"/>
+          <p:nvPr/>
+        </p:nvSpPr>
+        <p:spPr>
+          <a:xfrm>
+            <a:off x="1417320" y="4014215"/>
+            <a:ext cx="10058400" cy="320040"/>
+          </a:xfrm>
+          <a:prstGeom prst="rect">
+            <a:avLst/>
+          </a:prstGeom>
+          <a:noFill/>
+        </p:spPr>
+        <p:txBody>
+          <a:bodyPr wrap="square" lIns="45720" rIns="45720" anchor="t">
+            <a:spAutoFit/>
+          </a:bodyPr>
+          <a:lstStyle/>
+          <a:p>
+            <a:pPr algn="l"/>
+            <a:r>
+              <a:rPr sz="1600" b="1" i="0">
+                <a:solidFill>
+                  <a:srgbClr val="663399"/>
+                </a:solidFill>
+                <a:latin typeface="Calibri"/>
+              </a:rPr>
+              <a:t>sstate makes incremental rebuilds fast</a:t>
+            </a:r>
+          </a:p>
+        </p:txBody>
+      </p:sp>
+      <p:sp>
+        <p:nvSpPr>
+          <p:cNvPr id="15" name="TextBox 14"/>
+          <p:cNvSpPr txBox="1"/>
+          <p:nvPr/>
+        </p:nvSpPr>
+        <p:spPr>
+          <a:xfrm>
+            <a:off x="1417320" y="4325112"/>
+            <a:ext cx="10058400" cy="320040"/>
+          </a:xfrm>
+          <a:prstGeom prst="rect">
+            <a:avLst/>
+          </a:prstGeom>
+          <a:noFill/>
+        </p:spPr>
+        <p:txBody>
+          <a:bodyPr wrap="square" lIns="45720" rIns="45720" anchor="t">
+            <a:spAutoFit/>
+          </a:bodyPr>
+          <a:lstStyle/>
+          <a:p>
+            <a:pPr algn="l"/>
+            <a:r>
+              <a:rPr sz="1300" b="0" i="0">
+                <a:solidFill>
+                  <a:srgbClr val="333333"/>
+                </a:solidFill>
+                <a:latin typeface="Calibri"/>
+              </a:rPr>
+              <a:t>Adding a package to an image takes minutes, not hours</a:t>
+            </a:r>
+          </a:p>
+        </p:txBody>
+      </p:sp>
+      <p:sp>
+        <p:nvSpPr>
+          <p:cNvPr id="16" name="Rounded Rectangle 15"/>
+          <p:cNvSpPr/>
+          <p:nvPr/>
+        </p:nvSpPr>
+        <p:spPr>
+          <a:xfrm>
+            <a:off x="822960" y="4727448"/>
+            <a:ext cx="457200" cy="548640"/>
+          </a:xfrm>
+          <a:prstGeom prst="roundRect">
+            <a:avLst/>
+          </a:prstGeom>
+          <a:solidFill>
+            <a:srgbClr val="CC0066"/>
+          </a:solidFill>
+          <a:ln>
+            <a:noFill/>
+          </a:ln>
+          <a:effectLst/>
+        </p:spPr>
+        <p:style>
+          <a:lnRef idx="1">
+            <a:schemeClr val="accent1"/>
+          </a:lnRef>
+          <a:fillRef idx="3">
+            <a:schemeClr val="accent1"/>
+          </a:fillRef>
+          <a:effectRef idx="2">
+            <a:schemeClr val="accent1"/>
+          </a:effectRef>
+          <a:fontRef idx="minor">
+            <a:schemeClr val="lt1"/>
+          </a:fontRef>
+        </p:style>
+        <p:txBody>
+          <a:bodyPr lIns="0" rIns="0" rtlCol="0" anchor="ctr"/>
+          <a:lstStyle/>
+          <a:p>
+            <a:pPr algn="ctr"/>
+            <a:r>
+              <a:rPr sz="2200" b="1">
+                <a:solidFill>
+                  <a:srgbClr val="FFFFFF"/>
+                </a:solidFill>
+                <a:latin typeface="Calibri"/>
+              </a:rPr>
+              <a:t>5</a:t>
+            </a:r>
+          </a:p>
+        </p:txBody>
+      </p:sp>
+      <p:sp>
+        <p:nvSpPr>
+          <p:cNvPr id="17" name="TextBox 16"/>
+          <p:cNvSpPr txBox="1"/>
+          <p:nvPr/>
+        </p:nvSpPr>
+        <p:spPr>
+          <a:xfrm>
+            <a:off x="1417320" y="4727448"/>
+            <a:ext cx="10058400" cy="320040"/>
+          </a:xfrm>
+          <a:prstGeom prst="rect">
+            <a:avLst/>
+          </a:prstGeom>
+          <a:noFill/>
+        </p:spPr>
+        <p:txBody>
+          <a:bodyPr wrap="square" lIns="45720" rIns="45720" anchor="t">
+            <a:spAutoFit/>
+          </a:bodyPr>
+          <a:lstStyle/>
+          <a:p>
+            <a:pPr algn="l"/>
+            <a:r>
+              <a:rPr sz="1600" b="1" i="0">
+                <a:solidFill>
+                  <a:srgbClr val="663399"/>
+                </a:solidFill>
+                <a:latin typeface="Calibri"/>
+              </a:rPr>
+              <a:t>Errors have patterns</a:t>
+            </a:r>
+          </a:p>
+        </p:txBody>
+      </p:sp>
+      <p:sp>
+        <p:nvSpPr>
+          <p:cNvPr id="18" name="TextBox 17"/>
+          <p:cNvSpPr txBox="1"/>
+          <p:nvPr/>
+        </p:nvSpPr>
+        <p:spPr>
+          <a:xfrm>
+            <a:off x="1417320" y="5038344"/>
+            <a:ext cx="10058400" cy="320040"/>
+          </a:xfrm>
+          <a:prstGeom prst="rect">
+            <a:avLst/>
+          </a:prstGeom>
+          <a:noFill/>
+        </p:spPr>
+        <p:txBody>
+          <a:bodyPr wrap="square" lIns="45720" rIns="45720" anchor="t">
+            <a:spAutoFit/>
+          </a:bodyPr>
+          <a:lstStyle/>
+          <a:p>
+            <a:pPr algn="l"/>
+            <a:r>
+              <a:rPr sz="1300" b="0" i="0">
+                <a:solidFill>
+                  <a:srgbClr val="333333"/>
+                </a:solidFill>
+                <a:latin typeface="Calibri"/>
+              </a:rPr>
+              <a:t>Parse, fetch, FILES, sstate — most failures match one of these</a:t>
+            </a:r>
+          </a:p>
+        </p:txBody>
+      </p:sp>
+      <p:sp>
+        <p:nvSpPr>
+          <p:cNvPr id="19" name="Rounded Rectangle 18"/>
+          <p:cNvSpPr/>
+          <p:nvPr/>
+        </p:nvSpPr>
+        <p:spPr>
+          <a:xfrm>
+            <a:off x="822960" y="5669280"/>
+            <a:ext cx="10561320" cy="640080"/>
+          </a:xfrm>
+          <a:prstGeom prst="roundRect">
+            <a:avLst/>
+          </a:prstGeom>
+          <a:solidFill>
+            <a:srgbClr val="FBE6F0"/>
+          </a:solidFill>
+          <a:ln>
+            <a:noFill/>
+          </a:ln>
+          <a:effectLst/>
+        </p:spPr>
+        <p:style>
+          <a:lnRef idx="1">
+            <a:schemeClr val="accent1"/>
+          </a:lnRef>
+          <a:fillRef idx="3">
+            <a:schemeClr val="accent1"/>
+          </a:fillRef>
+          <a:effectRef idx="2">
+            <a:schemeClr val="accent1"/>
+          </a:effectRef>
+          <a:fontRef idx="minor">
+            <a:schemeClr val="lt1"/>
+          </a:fontRef>
+        </p:style>
+        <p:txBody>
+          <a:bodyPr lIns="228600" rtlCol="0" anchor="ctr"/>
+          <a:lstStyle/>
+          <a:p>
+            <a:pPr algn="ctr"/>
+            <a:r>
+              <a:rPr sz="1400" b="1">
+                <a:solidFill>
+                  <a:srgbClr val="663399"/>
+                </a:solidFill>
+                <a:latin typeface="Calibri"/>
+              </a:rPr>
+              <a:t>Next session  →  </a:t>
+            </a:r>
+            <a:r>
+              <a:rPr sz="1400">
+                <a:solidFill>
+                  <a:srgbClr val="333333"/>
+                </a:solidFill>
+                <a:latin typeface="Calibri"/>
+              </a:rPr>
+              <a:t>Day 1 recap and Day 2 preview</a:t>
+            </a:r>
+          </a:p>
+        </p:txBody>
+      </p:sp>
+    </p:spTree>
+  </p:cSld>
+  <p:clrMapOvr>
+    <a:masterClrMapping/>
+  </p:clrMapOvr>
+</p:sld>
+</file>
+
+<file path=ppt/slides/slide2.xml><?xml version="1.0" encoding="utf-8"?>
+<p:sld xmlns:a="http://schemas.openxmlformats.org/drawingml/2006/main" xmlns:r="http://schemas.openxmlformats.org/officeDocument/2006/relationships" xmlns:p="http://schemas.openxmlformats.org/presentationml/2006/main">
+  <p:cSld>
+    <p:spTree>
+      <p:nvGrpSpPr>
+        <p:cNvPr id="1" name=""/>
+        <p:cNvGrpSpPr/>
+        <p:nvPr/>
+      </p:nvGrpSpPr>
+      <p:grpSpPr>
+        <a:xfrm>
+          <a:off x="0" y="0"/>
+          <a:ext cx="0" cy="0"/>
+          <a:chOff x="0" y="0"/>
+          <a:chExt cx="0" cy="0"/>
+        </a:xfrm>
+      </p:grpSpPr>
+      <p:sp>
+        <p:nvSpPr>
+          <p:cNvPr id="2" name="Title 1"/>
+          <p:cNvSpPr>
+            <a:spLocks noGrp="1"/>
+          </p:cNvSpPr>
+          <p:nvPr>
+            <p:ph type="title"/>
+          </p:nvPr>
+        </p:nvSpPr>
+        <p:spPr/>
+        <p:txBody>
+          <a:bodyPr/>
+          <a:lstStyle/>
+          <a:p>
+            <a:r>
+              <a:rPr sz="3200" b="1" dirty="0">
+                <a:latin typeface="Calibri"/>
+              </a:rPr>
+              <a:t>Session Agenda</a:t>
+            </a:r>
+          </a:p>
+        </p:txBody>
+      </p:sp>
+      <p:sp>
+        <p:nvSpPr>
+          <p:cNvPr id="3" name="TextBox 2"/>
+          <p:cNvSpPr txBox="1"/>
+          <p:nvPr/>
+        </p:nvSpPr>
+        <p:spPr>
+          <a:xfrm>
+            <a:off x="822960" y="1463040"/>
+            <a:ext cx="10515600" cy="5029200"/>
+          </a:xfrm>
+          <a:prstGeom prst="rect">
+            <a:avLst/>
+          </a:prstGeom>
+          <a:noFill/>
+        </p:spPr>
+        <p:txBody>
+          <a:bodyPr wrap="square" lIns="45720" rIns="45720">
+            <a:spAutoFit/>
+          </a:bodyPr>
+          <a:lstStyle/>
+          <a:p>
+            <a:pPr>
+              <a:spcAft>
+                <a:spcPts val="600"/>
+              </a:spcAft>
+            </a:pPr>
+            <a:r>
+              <a:rPr sz="2000" b="0" i="0">
+                <a:solidFill>
+                  <a:srgbClr val="333333"/>
+                </a:solidFill>
+                <a:latin typeface="Calibri"/>
+              </a:rPr>
+              <a:t>1.  Verify your pre-class setup</a:t>
+            </a:r>
+          </a:p>
+          <a:p>
+            <a:pPr>
+              <a:spcAft>
+                <a:spcPts val="600"/>
+              </a:spcAft>
+            </a:pPr>
+            <a:r>
+              <a:rPr sz="2000" b="0" i="0">
+                <a:solidFill>
+                  <a:srgbClr val="333333"/>
+                </a:solidFill>
+                <a:latin typeface="Calibri"/>
+              </a:rPr>
+              <a:t>2.  Walk through the build directory</a:t>
+            </a:r>
+          </a:p>
+          <a:p>
+            <a:pPr>
+              <a:spcAft>
+                <a:spcPts val="600"/>
+              </a:spcAft>
+            </a:pPr>
+            <a:r>
+              <a:rPr sz="2000" b="0" i="0">
+                <a:solidFill>
+                  <a:srgbClr val="333333"/>
+                </a:solidFill>
+                <a:latin typeface="Calibri"/>
+              </a:rPr>
+              <a:t>3.  Create your meta-trainerdemo layer</a:t>
+            </a:r>
+          </a:p>
+          <a:p>
+            <a:pPr>
+              <a:spcAft>
+                <a:spcPts val="600"/>
+              </a:spcAft>
+            </a:pPr>
+            <a:r>
+              <a:rPr sz="2000" b="0" i="0">
+                <a:solidFill>
+                  <a:srgbClr val="333333"/>
+                </a:solidFill>
+                <a:latin typeface="Calibri"/>
+              </a:rPr>
+              <a:t>4.  Add a simple hello-world recipe</a:t>
+            </a:r>
+          </a:p>
+          <a:p>
+            <a:pPr>
+              <a:spcAft>
+                <a:spcPts val="600"/>
+              </a:spcAft>
+            </a:pPr>
+            <a:r>
+              <a:rPr sz="2000" b="0" i="0">
+                <a:solidFill>
+                  <a:srgbClr val="333333"/>
+                </a:solidFill>
+                <a:latin typeface="Calibri"/>
+              </a:rPr>
+              <a:t>5.  Build core-image-base + hello-world</a:t>
+            </a:r>
+          </a:p>
+          <a:p>
+            <a:pPr>
+              <a:spcAft>
+                <a:spcPts val="600"/>
+              </a:spcAft>
+            </a:pPr>
+            <a:r>
+              <a:rPr sz="2000" b="0" i="0">
+                <a:solidFill>
+                  <a:srgbClr val="333333"/>
+                </a:solidFill>
+                <a:latin typeface="Calibri"/>
+              </a:rPr>
+              <a:t>6.  Boot in QEMU, verify your addition</a:t>
+            </a:r>
+          </a:p>
+          <a:p>
+            <a:pPr>
+              <a:spcAft>
+                <a:spcPts val="600"/>
+              </a:spcAft>
+            </a:pPr>
+            <a:r>
+              <a:rPr sz="2000" b="0" i="0">
+                <a:solidFill>
+                  <a:srgbClr val="333333"/>
+                </a:solidFill>
+                <a:latin typeface="Calibri"/>
+              </a:rPr>
+              <a:t>7.  Common errors and quick fixes</a:t>
+            </a:r>
+          </a:p>
+        </p:txBody>
+      </p:sp>
+    </p:spTree>
+  </p:cSld>
+  <p:clrMapOvr>
+    <a:masterClrMapping/>
+  </p:clrMapOvr>
+</p:sld>
+</file>
+
+<file path=ppt/slides/slide3.xml><?xml version="1.0" encoding="utf-8"?>
+<p:sld xmlns:a="http://schemas.openxmlformats.org/drawingml/2006/main" xmlns:r="http://schemas.openxmlformats.org/officeDocument/2006/relationships" xmlns:p="http://schemas.openxmlformats.org/presentationml/2006/main">
+  <p:cSld>
+    <p:spTree>
+      <p:nvGrpSpPr>
+        <p:cNvPr id="1" name=""/>
+        <p:cNvGrpSpPr/>
+        <p:nvPr/>
+      </p:nvGrpSpPr>
+      <p:grpSpPr>
+        <a:xfrm>
+          <a:off x="0" y="0"/>
+          <a:ext cx="0" cy="0"/>
+          <a:chOff x="0" y="0"/>
+          <a:chExt cx="0" cy="0"/>
+        </a:xfrm>
+      </p:grpSpPr>
+      <p:sp>
+        <p:nvSpPr>
+          <p:cNvPr id="2" name="Title 1"/>
+          <p:cNvSpPr>
+            <a:spLocks noGrp="1"/>
+          </p:cNvSpPr>
+          <p:nvPr>
+            <p:ph type="title"/>
+          </p:nvPr>
+        </p:nvSpPr>
+        <p:spPr/>
+        <p:txBody>
+          <a:bodyPr/>
+          <a:lstStyle/>
+          <a:p>
+            <a:r>
+              <a:rPr sz="3200" b="1" dirty="0">
+                <a:latin typeface="Calibri"/>
+              </a:rPr>
+              <a:t>Step 1</a:t>
+            </a:r>
+            <a:r>
+              <a:rPr lang="en-IN" sz="3200" b="1" dirty="0">
+                <a:latin typeface="Calibri"/>
+              </a:rPr>
+              <a:t>:</a:t>
+            </a:r>
+            <a:r>
+              <a:rPr sz="3200" b="1" dirty="0">
+                <a:latin typeface="Calibri"/>
+              </a:rPr>
+              <a:t> Verify Setup</a:t>
+            </a:r>
+          </a:p>
+        </p:txBody>
+      </p:sp>
+      <p:sp>
+        <p:nvSpPr>
+          <p:cNvPr id="3" name="TextBox 2"/>
+          <p:cNvSpPr txBox="1"/>
+          <p:nvPr/>
+        </p:nvSpPr>
+        <p:spPr>
+          <a:xfrm>
+            <a:off x="822960" y="1417320"/>
+            <a:ext cx="10515600" cy="338554"/>
+          </a:xfrm>
+          <a:prstGeom prst="rect">
+            <a:avLst/>
+          </a:prstGeom>
+          <a:noFill/>
+        </p:spPr>
+        <p:txBody>
+          <a:bodyPr wrap="square" lIns="45720" rIns="45720" anchor="t">
+            <a:spAutoFit/>
+          </a:bodyPr>
+          <a:lstStyle/>
+          <a:p>
+            <a:pPr algn="l"/>
+            <a:r>
+              <a:rPr sz="1600" b="0" i="1" dirty="0">
+                <a:solidFill>
+                  <a:srgbClr val="666666"/>
+                </a:solidFill>
+                <a:latin typeface="Calibri"/>
+              </a:rPr>
+              <a:t>Confirm everyone's environment is functional before we change anything.</a:t>
             </a:r>
           </a:p>
         </p:txBody>
@@ -5295,6 +6376,7 @@
           <a:lstStyle/>
           <a:p>
             <a:pPr algn="ctr"/>
+            <a:endParaRPr/>
           </a:p>
         </p:txBody>
       </p:sp>
@@ -5339,6 +6421,7 @@
           <a:lstStyle/>
           <a:p>
             <a:pPr algn="ctr"/>
+            <a:endParaRPr/>
           </a:p>
         </p:txBody>
       </p:sp>
@@ -5351,7 +6434,7 @@
         <p:spPr>
           <a:xfrm>
             <a:off x="1005840" y="1874519"/>
-            <a:ext cx="10241280" cy="4389120"/>
+            <a:ext cx="10241280" cy="4031873"/>
           </a:xfrm>
           <a:prstGeom prst="rect">
             <a:avLst/>
@@ -5370,285 +6453,373 @@
               </a:spcAft>
             </a:pPr>
             <a:r>
-              <a:rPr sz="1100">
-                <a:solidFill>
-                  <a:srgbClr val="2D2D2D"/>
-                </a:solidFill>
-                <a:latin typeface="Consolas"/>
-              </a:rPr>
-              <a:t>~/yocto/build/</a:t>
-            </a:r>
-          </a:p>
-          <a:p>
-            <a:pPr>
-              <a:spcAft>
-                <a:spcPts val="0"/>
-              </a:spcAft>
-            </a:pPr>
-            <a:r>
-              <a:rPr sz="1100">
-                <a:solidFill>
-                  <a:srgbClr val="2D2D2D"/>
-                </a:solidFill>
-                <a:latin typeface="Consolas"/>
-              </a:rPr>
-              <a:t>├── conf/</a:t>
-            </a:r>
-          </a:p>
-          <a:p>
-            <a:pPr>
-              <a:spcAft>
-                <a:spcPts val="0"/>
-              </a:spcAft>
-            </a:pPr>
-            <a:r>
-              <a:rPr sz="1100">
-                <a:solidFill>
-                  <a:srgbClr val="2D2D2D"/>
-                </a:solidFill>
-                <a:latin typeface="Consolas"/>
-              </a:rPr>
-              <a:t>│   ├── local.conf            # Your settings</a:t>
-            </a:r>
-          </a:p>
-          <a:p>
-            <a:pPr>
-              <a:spcAft>
-                <a:spcPts val="0"/>
-              </a:spcAft>
-            </a:pPr>
-            <a:r>
-              <a:rPr sz="1100">
-                <a:solidFill>
-                  <a:srgbClr val="2D2D2D"/>
-                </a:solidFill>
-                <a:latin typeface="Consolas"/>
-              </a:rPr>
-              <a:t>│   ├── bblayers.conf         # Which layers are active</a:t>
-            </a:r>
-          </a:p>
-          <a:p>
-            <a:pPr>
-              <a:spcAft>
-                <a:spcPts val="0"/>
-              </a:spcAft>
-            </a:pPr>
-            <a:r>
-              <a:rPr sz="1100">
-                <a:solidFill>
-                  <a:srgbClr val="2D2D2D"/>
-                </a:solidFill>
-                <a:latin typeface="Consolas"/>
-              </a:rPr>
-              <a:t>│   └── templateconf.cfg</a:t>
-            </a:r>
-          </a:p>
-          <a:p>
-            <a:pPr>
-              <a:spcAft>
-                <a:spcPts val="0"/>
-              </a:spcAft>
-            </a:pPr>
-            <a:r>
-              <a:rPr sz="1100">
-                <a:solidFill>
-                  <a:srgbClr val="2D2D2D"/>
-                </a:solidFill>
-                <a:latin typeface="Consolas"/>
-              </a:rPr>
-              <a:t>│</a:t>
-            </a:r>
-          </a:p>
-          <a:p>
-            <a:pPr>
-              <a:spcAft>
-                <a:spcPts val="0"/>
-              </a:spcAft>
-            </a:pPr>
-            <a:r>
-              <a:rPr sz="1100">
-                <a:solidFill>
-                  <a:srgbClr val="2D2D2D"/>
-                </a:solidFill>
-                <a:latin typeface="Consolas"/>
-              </a:rPr>
-              <a:t>├── tmp/</a:t>
-            </a:r>
-          </a:p>
-          <a:p>
-            <a:pPr>
-              <a:spcAft>
-                <a:spcPts val="0"/>
-              </a:spcAft>
-            </a:pPr>
-            <a:r>
-              <a:rPr sz="1100">
-                <a:solidFill>
-                  <a:srgbClr val="2D2D2D"/>
-                </a:solidFill>
-                <a:latin typeface="Consolas"/>
-              </a:rPr>
-              <a:t>│   ├── work/                 # All build artifacts per recipe</a:t>
-            </a:r>
-          </a:p>
-          <a:p>
-            <a:pPr>
-              <a:spcAft>
-                <a:spcPts val="0"/>
-              </a:spcAft>
-            </a:pPr>
-            <a:r>
-              <a:rPr sz="1100">
-                <a:solidFill>
-                  <a:srgbClr val="2D2D2D"/>
-                </a:solidFill>
-                <a:latin typeface="Consolas"/>
-              </a:rPr>
-              <a:t>│   ├── sysroots-components/  # Cross-compiled sysroot pieces</a:t>
-            </a:r>
-          </a:p>
-          <a:p>
-            <a:pPr>
-              <a:spcAft>
-                <a:spcPts val="0"/>
-              </a:spcAft>
-            </a:pPr>
-            <a:r>
-              <a:rPr sz="1100">
-                <a:solidFill>
-                  <a:srgbClr val="2D2D2D"/>
-                </a:solidFill>
-                <a:latin typeface="Consolas"/>
-              </a:rPr>
-              <a:t>│   ├── deploy/</a:t>
-            </a:r>
-          </a:p>
-          <a:p>
-            <a:pPr>
-              <a:spcAft>
-                <a:spcPts val="0"/>
-              </a:spcAft>
-            </a:pPr>
-            <a:r>
-              <a:rPr sz="1100">
-                <a:solidFill>
-                  <a:srgbClr val="2D2D2D"/>
-                </a:solidFill>
-                <a:latin typeface="Consolas"/>
-              </a:rPr>
-              <a:t>│   │   ├── images/&lt;MACHINE&gt;/ # Final bootable artifacts</a:t>
-            </a:r>
-          </a:p>
-          <a:p>
-            <a:pPr>
-              <a:spcAft>
-                <a:spcPts val="0"/>
-              </a:spcAft>
-            </a:pPr>
-            <a:r>
-              <a:rPr sz="1100">
-                <a:solidFill>
-                  <a:srgbClr val="2D2D2D"/>
-                </a:solidFill>
-                <a:latin typeface="Consolas"/>
-              </a:rPr>
-              <a:t>│   │   ├── ipk/ or deb/ or rpm/  # Packages</a:t>
-            </a:r>
-          </a:p>
-          <a:p>
-            <a:pPr>
-              <a:spcAft>
-                <a:spcPts val="0"/>
-              </a:spcAft>
-            </a:pPr>
-            <a:r>
-              <a:rPr sz="1100">
-                <a:solidFill>
-                  <a:srgbClr val="2D2D2D"/>
-                </a:solidFill>
-                <a:latin typeface="Consolas"/>
-              </a:rPr>
-              <a:t>│   │   └── licenses/         # License manifests</a:t>
-            </a:r>
-          </a:p>
-          <a:p>
-            <a:pPr>
-              <a:spcAft>
-                <a:spcPts val="0"/>
-              </a:spcAft>
-            </a:pPr>
-            <a:r>
-              <a:rPr sz="1100">
-                <a:solidFill>
-                  <a:srgbClr val="2D2D2D"/>
-                </a:solidFill>
-                <a:latin typeface="Consolas"/>
-              </a:rPr>
-              <a:t>│   ├── cache/                # Parsing cache</a:t>
-            </a:r>
-          </a:p>
-          <a:p>
-            <a:pPr>
-              <a:spcAft>
-                <a:spcPts val="0"/>
-              </a:spcAft>
-            </a:pPr>
-            <a:r>
-              <a:rPr sz="1100">
-                <a:solidFill>
-                  <a:srgbClr val="2D2D2D"/>
-                </a:solidFill>
-                <a:latin typeface="Consolas"/>
-              </a:rPr>
-              <a:t>│   └── stamps/               # Per-task completion markers</a:t>
-            </a:r>
-          </a:p>
-          <a:p>
-            <a:pPr>
-              <a:spcAft>
-                <a:spcPts val="0"/>
-              </a:spcAft>
-            </a:pPr>
-            <a:r>
-              <a:rPr sz="1100">
-                <a:solidFill>
-                  <a:srgbClr val="2D2D2D"/>
-                </a:solidFill>
-                <a:latin typeface="Consolas"/>
-              </a:rPr>
-              <a:t>│</a:t>
-            </a:r>
-          </a:p>
-          <a:p>
-            <a:pPr>
-              <a:spcAft>
-                <a:spcPts val="0"/>
-              </a:spcAft>
-            </a:pPr>
-            <a:r>
-              <a:rPr sz="1100">
-                <a:solidFill>
-                  <a:srgbClr val="2D2D2D"/>
-                </a:solidFill>
-                <a:latin typeface="Consolas"/>
-              </a:rPr>
-              <a:t>├── sstate-cache/             # Cached task outputs</a:t>
-            </a:r>
-          </a:p>
-          <a:p>
-            <a:pPr>
-              <a:spcAft>
-                <a:spcPts val="0"/>
-              </a:spcAft>
-            </a:pPr>
-            <a:r>
-              <a:rPr sz="1100">
-                <a:solidFill>
-                  <a:srgbClr val="2D2D2D"/>
-                </a:solidFill>
-                <a:latin typeface="Consolas"/>
-              </a:rPr>
-              <a:t>└── downloads/                # Source tarballs (DL_DIR)</a:t>
+              <a:rPr sz="1600" i="1" dirty="0">
+                <a:solidFill>
+                  <a:srgbClr val="808080"/>
+                </a:solidFill>
+                <a:latin typeface="Consolas"/>
+              </a:rPr>
+              <a:t># Open a terminal in your Ubuntu VM</a:t>
+            </a:r>
+          </a:p>
+          <a:p>
+            <a:pPr>
+              <a:spcAft>
+                <a:spcPts val="0"/>
+              </a:spcAft>
+            </a:pPr>
+            <a:r>
+              <a:rPr sz="1600" dirty="0">
+                <a:solidFill>
+                  <a:srgbClr val="2D2D2D"/>
+                </a:solidFill>
+                <a:latin typeface="Consolas"/>
+              </a:rPr>
+              <a:t> </a:t>
+            </a:r>
+          </a:p>
+          <a:p>
+            <a:pPr>
+              <a:spcAft>
+                <a:spcPts val="0"/>
+              </a:spcAft>
+            </a:pPr>
+            <a:r>
+              <a:rPr sz="1600" i="1" dirty="0">
+                <a:solidFill>
+                  <a:srgbClr val="808080"/>
+                </a:solidFill>
+                <a:latin typeface="Consolas"/>
+              </a:rPr>
+              <a:t># Source the build environment</a:t>
+            </a:r>
+          </a:p>
+          <a:p>
+            <a:pPr>
+              <a:spcAft>
+                <a:spcPts val="0"/>
+              </a:spcAft>
+            </a:pPr>
+            <a:r>
+              <a:rPr sz="1600" dirty="0">
+                <a:solidFill>
+                  <a:srgbClr val="2D2D2D"/>
+                </a:solidFill>
+                <a:latin typeface="Consolas"/>
+              </a:rPr>
+              <a:t>cd ~/</a:t>
+            </a:r>
+            <a:r>
+              <a:rPr sz="1600" dirty="0" err="1">
+                <a:solidFill>
+                  <a:srgbClr val="2D2D2D"/>
+                </a:solidFill>
+                <a:latin typeface="Consolas"/>
+              </a:rPr>
+              <a:t>yocto</a:t>
+            </a:r>
+            <a:endParaRPr sz="1600" dirty="0">
+              <a:solidFill>
+                <a:srgbClr val="2D2D2D"/>
+              </a:solidFill>
+              <a:latin typeface="Consolas"/>
+            </a:endParaRPr>
+          </a:p>
+          <a:p>
+            <a:pPr>
+              <a:spcAft>
+                <a:spcPts val="0"/>
+              </a:spcAft>
+            </a:pPr>
+            <a:r>
+              <a:rPr sz="1600" dirty="0">
+                <a:solidFill>
+                  <a:srgbClr val="2D2D2D"/>
+                </a:solidFill>
+                <a:latin typeface="Consolas"/>
+              </a:rPr>
+              <a:t>source poky/</a:t>
+            </a:r>
+            <a:r>
+              <a:rPr sz="1600" dirty="0" err="1">
+                <a:solidFill>
+                  <a:srgbClr val="2D2D2D"/>
+                </a:solidFill>
+                <a:latin typeface="Consolas"/>
+              </a:rPr>
+              <a:t>oe</a:t>
+            </a:r>
+            <a:r>
+              <a:rPr sz="1600" dirty="0">
+                <a:solidFill>
+                  <a:srgbClr val="2D2D2D"/>
+                </a:solidFill>
+                <a:latin typeface="Consolas"/>
+              </a:rPr>
+              <a:t>-</a:t>
+            </a:r>
+            <a:r>
+              <a:rPr sz="1600" dirty="0" err="1">
+                <a:solidFill>
+                  <a:srgbClr val="2D2D2D"/>
+                </a:solidFill>
+                <a:latin typeface="Consolas"/>
+              </a:rPr>
+              <a:t>init</a:t>
+            </a:r>
+            <a:r>
+              <a:rPr sz="1600" dirty="0">
+                <a:solidFill>
+                  <a:srgbClr val="2D2D2D"/>
+                </a:solidFill>
+                <a:latin typeface="Consolas"/>
+              </a:rPr>
+              <a:t>-build-env build</a:t>
+            </a:r>
+          </a:p>
+          <a:p>
+            <a:pPr>
+              <a:spcAft>
+                <a:spcPts val="0"/>
+              </a:spcAft>
+            </a:pPr>
+            <a:r>
+              <a:rPr sz="1600" dirty="0">
+                <a:solidFill>
+                  <a:srgbClr val="2D2D2D"/>
+                </a:solidFill>
+                <a:latin typeface="Consolas"/>
+              </a:rPr>
+              <a:t> </a:t>
+            </a:r>
+          </a:p>
+          <a:p>
+            <a:pPr>
+              <a:spcAft>
+                <a:spcPts val="0"/>
+              </a:spcAft>
+            </a:pPr>
+            <a:r>
+              <a:rPr sz="1600" i="1" dirty="0">
+                <a:solidFill>
+                  <a:srgbClr val="808080"/>
+                </a:solidFill>
+                <a:latin typeface="Consolas"/>
+              </a:rPr>
+              <a:t># Confirm you can see layers</a:t>
+            </a:r>
+          </a:p>
+          <a:p>
+            <a:pPr>
+              <a:spcAft>
+                <a:spcPts val="0"/>
+              </a:spcAft>
+            </a:pPr>
+            <a:r>
+              <a:rPr sz="1600" dirty="0" err="1">
+                <a:solidFill>
+                  <a:srgbClr val="2D2D2D"/>
+                </a:solidFill>
+                <a:latin typeface="Consolas"/>
+              </a:rPr>
+              <a:t>bitbake</a:t>
+            </a:r>
+            <a:r>
+              <a:rPr sz="1600" dirty="0">
+                <a:solidFill>
+                  <a:srgbClr val="2D2D2D"/>
+                </a:solidFill>
+                <a:latin typeface="Consolas"/>
+              </a:rPr>
+              <a:t>-layers show-layers</a:t>
+            </a:r>
+          </a:p>
+          <a:p>
+            <a:pPr>
+              <a:spcAft>
+                <a:spcPts val="0"/>
+              </a:spcAft>
+            </a:pPr>
+            <a:r>
+              <a:rPr sz="1600" dirty="0">
+                <a:solidFill>
+                  <a:srgbClr val="2D2D2D"/>
+                </a:solidFill>
+                <a:latin typeface="Consolas"/>
+              </a:rPr>
+              <a:t> </a:t>
+            </a:r>
+          </a:p>
+          <a:p>
+            <a:pPr>
+              <a:spcAft>
+                <a:spcPts val="0"/>
+              </a:spcAft>
+            </a:pPr>
+            <a:r>
+              <a:rPr sz="1600" i="1" dirty="0">
+                <a:solidFill>
+                  <a:srgbClr val="808080"/>
+                </a:solidFill>
+                <a:latin typeface="Consolas"/>
+              </a:rPr>
+              <a:t># Confirm the pre-built image is present</a:t>
+            </a:r>
+          </a:p>
+          <a:p>
+            <a:pPr>
+              <a:spcAft>
+                <a:spcPts val="0"/>
+              </a:spcAft>
+            </a:pPr>
+            <a:r>
+              <a:rPr sz="1600" dirty="0">
+                <a:solidFill>
+                  <a:srgbClr val="2D2D2D"/>
+                </a:solidFill>
+                <a:latin typeface="Consolas"/>
+              </a:rPr>
+              <a:t>ls </a:t>
+            </a:r>
+            <a:r>
+              <a:rPr sz="1600" dirty="0" err="1">
+                <a:solidFill>
+                  <a:srgbClr val="2D2D2D"/>
+                </a:solidFill>
+                <a:latin typeface="Consolas"/>
+              </a:rPr>
+              <a:t>tmp</a:t>
+            </a:r>
+            <a:r>
+              <a:rPr sz="1600" dirty="0">
+                <a:solidFill>
+                  <a:srgbClr val="2D2D2D"/>
+                </a:solidFill>
+                <a:latin typeface="Consolas"/>
+              </a:rPr>
+              <a:t>/deploy/images/qemux86-64/ | head</a:t>
+            </a:r>
+          </a:p>
+          <a:p>
+            <a:pPr>
+              <a:spcAft>
+                <a:spcPts val="0"/>
+              </a:spcAft>
+            </a:pPr>
+            <a:r>
+              <a:rPr sz="1600" dirty="0">
+                <a:solidFill>
+                  <a:srgbClr val="2D2D2D"/>
+                </a:solidFill>
+                <a:latin typeface="Consolas"/>
+              </a:rPr>
+              <a:t> </a:t>
+            </a:r>
+          </a:p>
+          <a:p>
+            <a:pPr>
+              <a:spcAft>
+                <a:spcPts val="0"/>
+              </a:spcAft>
+            </a:pPr>
+            <a:r>
+              <a:rPr sz="1600" i="1" dirty="0">
+                <a:solidFill>
+                  <a:srgbClr val="808080"/>
+                </a:solidFill>
+                <a:latin typeface="Consolas"/>
+              </a:rPr>
+              <a:t># Boot it in QEMU to confirm everything works</a:t>
+            </a:r>
+          </a:p>
+          <a:p>
+            <a:pPr>
+              <a:spcAft>
+                <a:spcPts val="0"/>
+              </a:spcAft>
+            </a:pPr>
+            <a:r>
+              <a:rPr sz="1600" dirty="0" err="1">
+                <a:solidFill>
+                  <a:srgbClr val="2D2D2D"/>
+                </a:solidFill>
+                <a:latin typeface="Consolas"/>
+              </a:rPr>
+              <a:t>runqemu</a:t>
+            </a:r>
+            <a:r>
+              <a:rPr sz="1600" dirty="0">
+                <a:solidFill>
+                  <a:srgbClr val="2D2D2D"/>
+                </a:solidFill>
+                <a:latin typeface="Consolas"/>
+              </a:rPr>
+              <a:t> qemux86-64 </a:t>
+            </a:r>
+            <a:r>
+              <a:rPr sz="1600" dirty="0" err="1">
+                <a:solidFill>
+                  <a:srgbClr val="2D2D2D"/>
+                </a:solidFill>
+                <a:latin typeface="Consolas"/>
+              </a:rPr>
+              <a:t>nographic</a:t>
+            </a:r>
+            <a:endParaRPr sz="1600" dirty="0">
+              <a:solidFill>
+                <a:srgbClr val="2D2D2D"/>
+              </a:solidFill>
+              <a:latin typeface="Consolas"/>
+            </a:endParaRPr>
+          </a:p>
+          <a:p>
+            <a:pPr>
+              <a:spcAft>
+                <a:spcPts val="0"/>
+              </a:spcAft>
+            </a:pPr>
+            <a:r>
+              <a:rPr sz="1600" dirty="0">
+                <a:solidFill>
+                  <a:srgbClr val="2D2D2D"/>
+                </a:solidFill>
+                <a:latin typeface="Consolas"/>
+              </a:rPr>
+              <a:t> </a:t>
+            </a:r>
+          </a:p>
+          <a:p>
+            <a:pPr>
+              <a:spcAft>
+                <a:spcPts val="0"/>
+              </a:spcAft>
+            </a:pPr>
+            <a:r>
+              <a:rPr sz="1600" i="1" dirty="0">
+                <a:solidFill>
+                  <a:srgbClr val="808080"/>
+                </a:solidFill>
+                <a:latin typeface="Consolas"/>
+              </a:rPr>
+              <a:t># (Press </a:t>
+            </a:r>
+            <a:r>
+              <a:rPr sz="1600" i="1" dirty="0" err="1">
+                <a:solidFill>
+                  <a:srgbClr val="808080"/>
+                </a:solidFill>
+                <a:latin typeface="Consolas"/>
+              </a:rPr>
+              <a:t>Ctrl+A</a:t>
+            </a:r>
+            <a:r>
+              <a:rPr sz="1600" i="1" dirty="0">
+                <a:solidFill>
+                  <a:srgbClr val="808080"/>
+                </a:solidFill>
+                <a:latin typeface="Consolas"/>
+              </a:rPr>
+              <a:t> then X to exit QEMU)</a:t>
             </a:r>
           </a:p>
         </p:txBody>
@@ -5661,8 +6832,8 @@
 </p:sld>
 </file>
 
-<file path=ppt/slides/slide11.xml><?xml version="1.0" encoding="utf-8"?>
-<p:sld xmlns:a="http://schemas.openxmlformats.org/drawingml/2006/main" xmlns:p="http://schemas.openxmlformats.org/presentationml/2006/main" xmlns:r="http://schemas.openxmlformats.org/officeDocument/2006/relationships">
+<file path=ppt/slides/slide4.xml><?xml version="1.0" encoding="utf-8"?>
+<p:sld xmlns:a="http://schemas.openxmlformats.org/drawingml/2006/main" xmlns:r="http://schemas.openxmlformats.org/officeDocument/2006/relationships" xmlns:p="http://schemas.openxmlformats.org/presentationml/2006/main">
   <p:cSld>
     <p:spTree>
       <p:nvGrpSpPr>
@@ -5670,7 +6841,14 @@
         <p:cNvGrpSpPr/>
         <p:nvPr/>
       </p:nvGrpSpPr>
-      <p:grpSpPr/>
+      <p:grpSpPr>
+        <a:xfrm>
+          <a:off x="0" y="0"/>
+          <a:ext cx="0" cy="0"/>
+          <a:chOff x="0" y="0"/>
+          <a:chExt cx="0" cy="0"/>
+        </a:xfrm>
+      </p:grpSpPr>
       <p:sp>
         <p:nvSpPr>
           <p:cNvPr id="2" name="Title 1"/>
@@ -5687,13 +6865,698 @@
           <a:lstStyle/>
           <a:p>
             <a:r>
-              <a:rPr sz="3200" b="1">
-                <a:solidFill>
-                  <a:srgbClr val="CC0066"/>
-                </a:solidFill>
+              <a:rPr sz="3200" b="1" dirty="0">
                 <a:latin typeface="Calibri"/>
               </a:rPr>
-              <a:t>Step 3 — Create Your Layer</a:t>
+              <a:t>Step 2</a:t>
+            </a:r>
+            <a:r>
+              <a:rPr lang="en-IN" sz="3200" b="1" dirty="0">
+                <a:latin typeface="Calibri"/>
+              </a:rPr>
+              <a:t>: </a:t>
+            </a:r>
+            <a:r>
+              <a:rPr sz="3200" b="1" dirty="0">
+                <a:latin typeface="Calibri"/>
+              </a:rPr>
+              <a:t>Walk Through the Build Directory</a:t>
+            </a:r>
+          </a:p>
+        </p:txBody>
+      </p:sp>
+      <p:sp>
+        <p:nvSpPr>
+          <p:cNvPr id="3" name="TextBox 2"/>
+          <p:cNvSpPr txBox="1"/>
+          <p:nvPr/>
+        </p:nvSpPr>
+        <p:spPr>
+          <a:xfrm>
+            <a:off x="822960" y="1417320"/>
+            <a:ext cx="10515600" cy="338554"/>
+          </a:xfrm>
+          <a:prstGeom prst="rect">
+            <a:avLst/>
+          </a:prstGeom>
+          <a:noFill/>
+        </p:spPr>
+        <p:txBody>
+          <a:bodyPr wrap="square" lIns="45720" rIns="45720" anchor="t">
+            <a:spAutoFit/>
+          </a:bodyPr>
+          <a:lstStyle/>
+          <a:p>
+            <a:pPr algn="l"/>
+            <a:r>
+              <a:rPr sz="1600" b="0" i="1" dirty="0">
+                <a:solidFill>
+                  <a:srgbClr val="666666"/>
+                </a:solidFill>
+                <a:latin typeface="Calibri"/>
+              </a:rPr>
+              <a:t>Knowing where things live saves hours later.</a:t>
+            </a:r>
+          </a:p>
+        </p:txBody>
+      </p:sp>
+      <p:sp>
+        <p:nvSpPr>
+          <p:cNvPr id="4" name="Rounded Rectangle 3"/>
+          <p:cNvSpPr/>
+          <p:nvPr/>
+        </p:nvSpPr>
+        <p:spPr>
+          <a:xfrm>
+            <a:off x="822960" y="1783080"/>
+            <a:ext cx="10515600" cy="4572000"/>
+          </a:xfrm>
+          <a:prstGeom prst="roundRect">
+            <a:avLst/>
+          </a:prstGeom>
+          <a:solidFill>
+            <a:srgbClr val="F5F5F5"/>
+          </a:solidFill>
+          <a:ln w="6350">
+            <a:solidFill>
+              <a:srgbClr val="D0D0D0"/>
+            </a:solidFill>
+          </a:ln>
+          <a:effectLst/>
+        </p:spPr>
+        <p:style>
+          <a:lnRef idx="1">
+            <a:schemeClr val="accent1"/>
+          </a:lnRef>
+          <a:fillRef idx="3">
+            <a:schemeClr val="accent1"/>
+          </a:fillRef>
+          <a:effectRef idx="2">
+            <a:schemeClr val="accent1"/>
+          </a:effectRef>
+          <a:fontRef idx="minor">
+            <a:schemeClr val="lt1"/>
+          </a:fontRef>
+        </p:style>
+        <p:txBody>
+          <a:bodyPr rtlCol="0" anchor="ctr"/>
+          <a:lstStyle/>
+          <a:p>
+            <a:pPr algn="ctr"/>
+            <a:endParaRPr/>
+          </a:p>
+        </p:txBody>
+      </p:sp>
+      <p:sp>
+        <p:nvSpPr>
+          <p:cNvPr id="5" name="Rectangle 4"/>
+          <p:cNvSpPr/>
+          <p:nvPr/>
+        </p:nvSpPr>
+        <p:spPr>
+          <a:xfrm>
+            <a:off x="822960" y="1783080"/>
+            <a:ext cx="73152" cy="4572000"/>
+          </a:xfrm>
+          <a:prstGeom prst="rect">
+            <a:avLst/>
+          </a:prstGeom>
+          <a:solidFill>
+            <a:srgbClr val="CC0066"/>
+          </a:solidFill>
+          <a:ln>
+            <a:noFill/>
+          </a:ln>
+          <a:effectLst/>
+        </p:spPr>
+        <p:style>
+          <a:lnRef idx="1">
+            <a:schemeClr val="accent1"/>
+          </a:lnRef>
+          <a:fillRef idx="3">
+            <a:schemeClr val="accent1"/>
+          </a:fillRef>
+          <a:effectRef idx="2">
+            <a:schemeClr val="accent1"/>
+          </a:effectRef>
+          <a:fontRef idx="minor">
+            <a:schemeClr val="lt1"/>
+          </a:fontRef>
+        </p:style>
+        <p:txBody>
+          <a:bodyPr rtlCol="0" anchor="ctr"/>
+          <a:lstStyle/>
+          <a:p>
+            <a:pPr algn="ctr"/>
+            <a:endParaRPr/>
+          </a:p>
+        </p:txBody>
+      </p:sp>
+      <p:sp>
+        <p:nvSpPr>
+          <p:cNvPr id="6" name="TextBox 5"/>
+          <p:cNvSpPr txBox="1"/>
+          <p:nvPr/>
+        </p:nvSpPr>
+        <p:spPr>
+          <a:xfrm>
+            <a:off x="1005840" y="1874519"/>
+            <a:ext cx="10241280" cy="4524315"/>
+          </a:xfrm>
+          <a:prstGeom prst="rect">
+            <a:avLst/>
+          </a:prstGeom>
+          <a:noFill/>
+        </p:spPr>
+        <p:txBody>
+          <a:bodyPr wrap="square" lIns="45720" rIns="45720">
+            <a:spAutoFit/>
+          </a:bodyPr>
+          <a:lstStyle/>
+          <a:p>
+            <a:pPr>
+              <a:spcAft>
+                <a:spcPts val="0"/>
+              </a:spcAft>
+            </a:pPr>
+            <a:r>
+              <a:rPr sz="1600" dirty="0">
+                <a:solidFill>
+                  <a:srgbClr val="2D2D2D"/>
+                </a:solidFill>
+                <a:latin typeface="Consolas"/>
+              </a:rPr>
+              <a:t>~/</a:t>
+            </a:r>
+            <a:r>
+              <a:rPr sz="1600" dirty="0" err="1">
+                <a:solidFill>
+                  <a:srgbClr val="2D2D2D"/>
+                </a:solidFill>
+                <a:latin typeface="Consolas"/>
+              </a:rPr>
+              <a:t>yocto</a:t>
+            </a:r>
+            <a:r>
+              <a:rPr sz="1600" dirty="0">
+                <a:solidFill>
+                  <a:srgbClr val="2D2D2D"/>
+                </a:solidFill>
+                <a:latin typeface="Consolas"/>
+              </a:rPr>
+              <a:t>/build/</a:t>
+            </a:r>
+          </a:p>
+          <a:p>
+            <a:pPr>
+              <a:spcAft>
+                <a:spcPts val="0"/>
+              </a:spcAft>
+            </a:pPr>
+            <a:r>
+              <a:rPr sz="1600" dirty="0">
+                <a:solidFill>
+                  <a:srgbClr val="2D2D2D"/>
+                </a:solidFill>
+                <a:latin typeface="Consolas"/>
+              </a:rPr>
+              <a:t>├── conf/</a:t>
+            </a:r>
+          </a:p>
+          <a:p>
+            <a:pPr>
+              <a:spcAft>
+                <a:spcPts val="0"/>
+              </a:spcAft>
+            </a:pPr>
+            <a:r>
+              <a:rPr sz="1600" dirty="0">
+                <a:solidFill>
+                  <a:srgbClr val="2D2D2D"/>
+                </a:solidFill>
+                <a:latin typeface="Consolas"/>
+              </a:rPr>
+              <a:t>│   ├── </a:t>
+            </a:r>
+            <a:r>
+              <a:rPr sz="1600" dirty="0" err="1">
+                <a:solidFill>
+                  <a:srgbClr val="2D2D2D"/>
+                </a:solidFill>
+                <a:latin typeface="Consolas"/>
+              </a:rPr>
+              <a:t>local.conf</a:t>
+            </a:r>
+            <a:r>
+              <a:rPr sz="1600" dirty="0">
+                <a:solidFill>
+                  <a:srgbClr val="2D2D2D"/>
+                </a:solidFill>
+                <a:latin typeface="Consolas"/>
+              </a:rPr>
+              <a:t>            # Your settings</a:t>
+            </a:r>
+          </a:p>
+          <a:p>
+            <a:pPr>
+              <a:spcAft>
+                <a:spcPts val="0"/>
+              </a:spcAft>
+            </a:pPr>
+            <a:r>
+              <a:rPr sz="1600" dirty="0">
+                <a:solidFill>
+                  <a:srgbClr val="2D2D2D"/>
+                </a:solidFill>
+                <a:latin typeface="Consolas"/>
+              </a:rPr>
+              <a:t>│   ├── </a:t>
+            </a:r>
+            <a:r>
+              <a:rPr sz="1600" dirty="0" err="1">
+                <a:solidFill>
+                  <a:srgbClr val="2D2D2D"/>
+                </a:solidFill>
+                <a:latin typeface="Consolas"/>
+              </a:rPr>
+              <a:t>bblayers.conf</a:t>
+            </a:r>
+            <a:r>
+              <a:rPr sz="1600" dirty="0">
+                <a:solidFill>
+                  <a:srgbClr val="2D2D2D"/>
+                </a:solidFill>
+                <a:latin typeface="Consolas"/>
+              </a:rPr>
+              <a:t>         # Which layers are active</a:t>
+            </a:r>
+          </a:p>
+          <a:p>
+            <a:pPr>
+              <a:spcAft>
+                <a:spcPts val="0"/>
+              </a:spcAft>
+            </a:pPr>
+            <a:r>
+              <a:rPr sz="1600" dirty="0">
+                <a:solidFill>
+                  <a:srgbClr val="2D2D2D"/>
+                </a:solidFill>
+                <a:latin typeface="Consolas"/>
+              </a:rPr>
+              <a:t>│   └── </a:t>
+            </a:r>
+            <a:r>
+              <a:rPr sz="1600" dirty="0" err="1">
+                <a:solidFill>
+                  <a:srgbClr val="2D2D2D"/>
+                </a:solidFill>
+                <a:latin typeface="Consolas"/>
+              </a:rPr>
+              <a:t>templateconf.cfg</a:t>
+            </a:r>
+            <a:endParaRPr sz="1600" dirty="0">
+              <a:solidFill>
+                <a:srgbClr val="2D2D2D"/>
+              </a:solidFill>
+              <a:latin typeface="Consolas"/>
+            </a:endParaRPr>
+          </a:p>
+          <a:p>
+            <a:pPr>
+              <a:spcAft>
+                <a:spcPts val="0"/>
+              </a:spcAft>
+            </a:pPr>
+            <a:r>
+              <a:rPr sz="1600" dirty="0">
+                <a:solidFill>
+                  <a:srgbClr val="2D2D2D"/>
+                </a:solidFill>
+                <a:latin typeface="Consolas"/>
+              </a:rPr>
+              <a:t>│</a:t>
+            </a:r>
+          </a:p>
+          <a:p>
+            <a:pPr>
+              <a:spcAft>
+                <a:spcPts val="0"/>
+              </a:spcAft>
+            </a:pPr>
+            <a:r>
+              <a:rPr sz="1600" dirty="0">
+                <a:solidFill>
+                  <a:srgbClr val="2D2D2D"/>
+                </a:solidFill>
+                <a:latin typeface="Consolas"/>
+              </a:rPr>
+              <a:t>├── </a:t>
+            </a:r>
+            <a:r>
+              <a:rPr sz="1600" dirty="0" err="1">
+                <a:solidFill>
+                  <a:srgbClr val="2D2D2D"/>
+                </a:solidFill>
+                <a:latin typeface="Consolas"/>
+              </a:rPr>
+              <a:t>tmp</a:t>
+            </a:r>
+            <a:r>
+              <a:rPr sz="1600" dirty="0">
+                <a:solidFill>
+                  <a:srgbClr val="2D2D2D"/>
+                </a:solidFill>
+                <a:latin typeface="Consolas"/>
+              </a:rPr>
+              <a:t>/</a:t>
+            </a:r>
+          </a:p>
+          <a:p>
+            <a:pPr>
+              <a:spcAft>
+                <a:spcPts val="0"/>
+              </a:spcAft>
+            </a:pPr>
+            <a:r>
+              <a:rPr sz="1600" dirty="0">
+                <a:solidFill>
+                  <a:srgbClr val="2D2D2D"/>
+                </a:solidFill>
+                <a:latin typeface="Consolas"/>
+              </a:rPr>
+              <a:t>│   ├── work/                 # All build artifacts per recipe</a:t>
+            </a:r>
+          </a:p>
+          <a:p>
+            <a:pPr>
+              <a:spcAft>
+                <a:spcPts val="0"/>
+              </a:spcAft>
+            </a:pPr>
+            <a:r>
+              <a:rPr sz="1600" dirty="0">
+                <a:solidFill>
+                  <a:srgbClr val="2D2D2D"/>
+                </a:solidFill>
+                <a:latin typeface="Consolas"/>
+              </a:rPr>
+              <a:t>│   ├── </a:t>
+            </a:r>
+            <a:r>
+              <a:rPr sz="1600" dirty="0" err="1">
+                <a:solidFill>
+                  <a:srgbClr val="2D2D2D"/>
+                </a:solidFill>
+                <a:latin typeface="Consolas"/>
+              </a:rPr>
+              <a:t>sysroots</a:t>
+            </a:r>
+            <a:r>
+              <a:rPr sz="1600" dirty="0">
+                <a:solidFill>
+                  <a:srgbClr val="2D2D2D"/>
+                </a:solidFill>
+                <a:latin typeface="Consolas"/>
+              </a:rPr>
+              <a:t>-components/  # Cross-compiled </a:t>
+            </a:r>
+            <a:r>
+              <a:rPr sz="1600" dirty="0" err="1">
+                <a:solidFill>
+                  <a:srgbClr val="2D2D2D"/>
+                </a:solidFill>
+                <a:latin typeface="Consolas"/>
+              </a:rPr>
+              <a:t>sysroot</a:t>
+            </a:r>
+            <a:r>
+              <a:rPr sz="1600" dirty="0">
+                <a:solidFill>
+                  <a:srgbClr val="2D2D2D"/>
+                </a:solidFill>
+                <a:latin typeface="Consolas"/>
+              </a:rPr>
+              <a:t> pieces</a:t>
+            </a:r>
+          </a:p>
+          <a:p>
+            <a:pPr>
+              <a:spcAft>
+                <a:spcPts val="0"/>
+              </a:spcAft>
+            </a:pPr>
+            <a:r>
+              <a:rPr sz="1600" dirty="0">
+                <a:solidFill>
+                  <a:srgbClr val="2D2D2D"/>
+                </a:solidFill>
+                <a:latin typeface="Consolas"/>
+              </a:rPr>
+              <a:t>│   ├── deploy/</a:t>
+            </a:r>
+          </a:p>
+          <a:p>
+            <a:pPr>
+              <a:spcAft>
+                <a:spcPts val="0"/>
+              </a:spcAft>
+            </a:pPr>
+            <a:r>
+              <a:rPr sz="1600" dirty="0">
+                <a:solidFill>
+                  <a:srgbClr val="2D2D2D"/>
+                </a:solidFill>
+                <a:latin typeface="Consolas"/>
+              </a:rPr>
+              <a:t>│   │   ├── images/&lt;MACHINE&gt;/ # Final bootable artifacts</a:t>
+            </a:r>
+          </a:p>
+          <a:p>
+            <a:pPr>
+              <a:spcAft>
+                <a:spcPts val="0"/>
+              </a:spcAft>
+            </a:pPr>
+            <a:r>
+              <a:rPr sz="1600" dirty="0">
+                <a:solidFill>
+                  <a:srgbClr val="2D2D2D"/>
+                </a:solidFill>
+                <a:latin typeface="Consolas"/>
+              </a:rPr>
+              <a:t>│   │   ├── </a:t>
+            </a:r>
+            <a:r>
+              <a:rPr sz="1600" dirty="0" err="1">
+                <a:solidFill>
+                  <a:srgbClr val="2D2D2D"/>
+                </a:solidFill>
+                <a:latin typeface="Consolas"/>
+              </a:rPr>
+              <a:t>ipk</a:t>
+            </a:r>
+            <a:r>
+              <a:rPr sz="1600" dirty="0">
+                <a:solidFill>
+                  <a:srgbClr val="2D2D2D"/>
+                </a:solidFill>
+                <a:latin typeface="Consolas"/>
+              </a:rPr>
+              <a:t>/ or deb/ or rpm/  # Packages</a:t>
+            </a:r>
+          </a:p>
+          <a:p>
+            <a:pPr>
+              <a:spcAft>
+                <a:spcPts val="0"/>
+              </a:spcAft>
+            </a:pPr>
+            <a:r>
+              <a:rPr sz="1600" dirty="0">
+                <a:solidFill>
+                  <a:srgbClr val="2D2D2D"/>
+                </a:solidFill>
+                <a:latin typeface="Consolas"/>
+              </a:rPr>
+              <a:t>│   │   └── licenses/         # License manifests</a:t>
+            </a:r>
+          </a:p>
+          <a:p>
+            <a:pPr>
+              <a:spcAft>
+                <a:spcPts val="0"/>
+              </a:spcAft>
+            </a:pPr>
+            <a:r>
+              <a:rPr sz="1600" dirty="0">
+                <a:solidFill>
+                  <a:srgbClr val="2D2D2D"/>
+                </a:solidFill>
+                <a:latin typeface="Consolas"/>
+              </a:rPr>
+              <a:t>│   ├── cache/                # Parsing cache</a:t>
+            </a:r>
+          </a:p>
+          <a:p>
+            <a:pPr>
+              <a:spcAft>
+                <a:spcPts val="0"/>
+              </a:spcAft>
+            </a:pPr>
+            <a:r>
+              <a:rPr sz="1600" dirty="0">
+                <a:solidFill>
+                  <a:srgbClr val="2D2D2D"/>
+                </a:solidFill>
+                <a:latin typeface="Consolas"/>
+              </a:rPr>
+              <a:t>│   └── stamps/               # Per-task completion markers</a:t>
+            </a:r>
+          </a:p>
+          <a:p>
+            <a:pPr>
+              <a:spcAft>
+                <a:spcPts val="0"/>
+              </a:spcAft>
+            </a:pPr>
+            <a:r>
+              <a:rPr sz="1600" dirty="0">
+                <a:solidFill>
+                  <a:srgbClr val="2D2D2D"/>
+                </a:solidFill>
+                <a:latin typeface="Consolas"/>
+              </a:rPr>
+              <a:t>│</a:t>
+            </a:r>
+          </a:p>
+          <a:p>
+            <a:pPr>
+              <a:spcAft>
+                <a:spcPts val="0"/>
+              </a:spcAft>
+            </a:pPr>
+            <a:r>
+              <a:rPr sz="1600" dirty="0">
+                <a:solidFill>
+                  <a:srgbClr val="2D2D2D"/>
+                </a:solidFill>
+                <a:latin typeface="Consolas"/>
+              </a:rPr>
+              <a:t>├── </a:t>
+            </a:r>
+            <a:r>
+              <a:rPr sz="1600" dirty="0" err="1">
+                <a:solidFill>
+                  <a:srgbClr val="2D2D2D"/>
+                </a:solidFill>
+                <a:latin typeface="Consolas"/>
+              </a:rPr>
+              <a:t>sstate</a:t>
+            </a:r>
+            <a:r>
+              <a:rPr sz="1600" dirty="0">
+                <a:solidFill>
+                  <a:srgbClr val="2D2D2D"/>
+                </a:solidFill>
+                <a:latin typeface="Consolas"/>
+              </a:rPr>
+              <a:t>-cache/             # Cached task outputs</a:t>
+            </a:r>
+          </a:p>
+          <a:p>
+            <a:pPr>
+              <a:spcAft>
+                <a:spcPts val="0"/>
+              </a:spcAft>
+            </a:pPr>
+            <a:r>
+              <a:rPr sz="1600" dirty="0">
+                <a:solidFill>
+                  <a:srgbClr val="2D2D2D"/>
+                </a:solidFill>
+                <a:latin typeface="Consolas"/>
+              </a:rPr>
+              <a:t>└── downloads/                # Source </a:t>
+            </a:r>
+            <a:r>
+              <a:rPr sz="1600" dirty="0" err="1">
+                <a:solidFill>
+                  <a:srgbClr val="2D2D2D"/>
+                </a:solidFill>
+                <a:latin typeface="Consolas"/>
+              </a:rPr>
+              <a:t>tarballs</a:t>
+            </a:r>
+            <a:r>
+              <a:rPr sz="1600" dirty="0">
+                <a:solidFill>
+                  <a:srgbClr val="2D2D2D"/>
+                </a:solidFill>
+                <a:latin typeface="Consolas"/>
+              </a:rPr>
+              <a:t> (DL_DIR)</a:t>
+            </a:r>
+          </a:p>
+        </p:txBody>
+      </p:sp>
+    </p:spTree>
+  </p:cSld>
+  <p:clrMapOvr>
+    <a:masterClrMapping/>
+  </p:clrMapOvr>
+</p:sld>
+</file>
+
+<file path=ppt/slides/slide5.xml><?xml version="1.0" encoding="utf-8"?>
+<p:sld xmlns:a="http://schemas.openxmlformats.org/drawingml/2006/main" xmlns:r="http://schemas.openxmlformats.org/officeDocument/2006/relationships" xmlns:p="http://schemas.openxmlformats.org/presentationml/2006/main">
+  <p:cSld>
+    <p:spTree>
+      <p:nvGrpSpPr>
+        <p:cNvPr id="1" name=""/>
+        <p:cNvGrpSpPr/>
+        <p:nvPr/>
+      </p:nvGrpSpPr>
+      <p:grpSpPr>
+        <a:xfrm>
+          <a:off x="0" y="0"/>
+          <a:ext cx="0" cy="0"/>
+          <a:chOff x="0" y="0"/>
+          <a:chExt cx="0" cy="0"/>
+        </a:xfrm>
+      </p:grpSpPr>
+      <p:sp>
+        <p:nvSpPr>
+          <p:cNvPr id="2" name="Title 1"/>
+          <p:cNvSpPr>
+            <a:spLocks noGrp="1"/>
+          </p:cNvSpPr>
+          <p:nvPr>
+            <p:ph type="title"/>
+          </p:nvPr>
+        </p:nvSpPr>
+        <p:spPr/>
+        <p:txBody>
+          <a:bodyPr/>
+          <a:lstStyle/>
+          <a:p>
+            <a:r>
+              <a:rPr sz="3200" b="1" dirty="0">
+                <a:latin typeface="Calibri"/>
+              </a:rPr>
+              <a:t>Step 3</a:t>
+            </a:r>
+            <a:r>
+              <a:rPr lang="en-IN" sz="3200" b="1" dirty="0">
+                <a:latin typeface="Calibri"/>
+              </a:rPr>
+              <a:t>: </a:t>
+            </a:r>
+            <a:r>
+              <a:rPr sz="3200" b="1" dirty="0">
+                <a:latin typeface="Calibri"/>
+              </a:rPr>
+              <a:t>Create Your Layer</a:t>
             </a:r>
           </a:p>
         </p:txBody>
@@ -5715,7 +7578,7 @@
           <a:noFill/>
         </p:spPr>
         <p:txBody>
-          <a:bodyPr wrap="square" anchor="t" lIns="45720" rIns="45720">
+          <a:bodyPr wrap="square" lIns="45720" rIns="45720" anchor="t">
             <a:spAutoFit/>
           </a:bodyPr>
           <a:lstStyle/>
@@ -5776,6 +7639,7 @@
           <a:lstStyle/>
           <a:p>
             <a:pPr algn="ctr"/>
+            <a:endParaRPr/>
           </a:p>
         </p:txBody>
       </p:sp>
@@ -5820,6 +7684,7 @@
           <a:lstStyle/>
           <a:p>
             <a:pPr algn="ctr"/>
+            <a:endParaRPr/>
           </a:p>
         </p:txBody>
       </p:sp>
@@ -5831,8 +7696,8 @@
         </p:nvSpPr>
         <p:spPr>
           <a:xfrm>
-            <a:off x="1005840" y="1874519"/>
-            <a:ext cx="10241280" cy="2743200"/>
+            <a:off x="1005840" y="1722626"/>
+            <a:ext cx="10241280" cy="3046988"/>
           </a:xfrm>
           <a:prstGeom prst="rect">
             <a:avLst/>
@@ -5851,7 +7716,7 @@
               </a:spcAft>
             </a:pPr>
             <a:r>
-              <a:rPr sz="1200" i="1">
+              <a:rPr sz="1600" i="1" dirty="0">
                 <a:solidFill>
                   <a:srgbClr val="808080"/>
                 </a:solidFill>
@@ -5867,7 +7732,7 @@
               </a:spcAft>
             </a:pPr>
             <a:r>
-              <a:rPr sz="1200">
+              <a:rPr sz="1600" dirty="0">
                 <a:solidFill>
                   <a:srgbClr val="2D2D2D"/>
                 </a:solidFill>
@@ -5883,23 +7748,47 @@
               </a:spcAft>
             </a:pPr>
             <a:r>
-              <a:rPr sz="1200">
-                <a:solidFill>
-                  <a:srgbClr val="2D2D2D"/>
-                </a:solidFill>
-                <a:latin typeface="Consolas"/>
-              </a:rPr>
-              <a:t>bitbake-layers create-layer ../meta-trainerdemo</a:t>
-            </a:r>
-          </a:p>
-          <a:p>
-            <a:pPr>
-              <a:spcAft>
-                <a:spcPts val="0"/>
-              </a:spcAft>
-            </a:pPr>
-            <a:r>
-              <a:rPr sz="1200">
+              <a:rPr sz="1600" dirty="0" err="1">
+                <a:solidFill>
+                  <a:srgbClr val="2D2D2D"/>
+                </a:solidFill>
+                <a:latin typeface="Consolas"/>
+              </a:rPr>
+              <a:t>bitbake</a:t>
+            </a:r>
+            <a:r>
+              <a:rPr sz="1600" dirty="0">
+                <a:solidFill>
+                  <a:srgbClr val="2D2D2D"/>
+                </a:solidFill>
+                <a:latin typeface="Consolas"/>
+              </a:rPr>
+              <a:t>-layers create-layer ../meta-</a:t>
+            </a:r>
+            <a:r>
+              <a:rPr sz="1600" dirty="0" err="1">
+                <a:solidFill>
+                  <a:srgbClr val="2D2D2D"/>
+                </a:solidFill>
+                <a:latin typeface="Consolas"/>
+              </a:rPr>
+              <a:t>trainerdemo</a:t>
+            </a:r>
+            <a:endParaRPr sz="1600" dirty="0">
+              <a:solidFill>
+                <a:srgbClr val="2D2D2D"/>
+              </a:solidFill>
+              <a:latin typeface="Consolas"/>
+            </a:endParaRPr>
+          </a:p>
+          <a:p>
+            <a:pPr>
+              <a:spcAft>
+                <a:spcPts val="0"/>
+              </a:spcAft>
+            </a:pPr>
+            <a:r>
+              <a:rPr sz="1600" dirty="0">
                 <a:solidFill>
                   <a:srgbClr val="2D2D2D"/>
                 </a:solidFill>
@@ -5915,7 +7804,7 @@
               </a:spcAft>
             </a:pPr>
             <a:r>
-              <a:rPr sz="1200" i="1">
+              <a:rPr sz="1600" i="1" dirty="0">
                 <a:solidFill>
                   <a:srgbClr val="808080"/>
                 </a:solidFill>
@@ -5931,23 +7820,47 @@
               </a:spcAft>
             </a:pPr>
             <a:r>
-              <a:rPr sz="1200">
-                <a:solidFill>
-                  <a:srgbClr val="2D2D2D"/>
-                </a:solidFill>
-                <a:latin typeface="Consolas"/>
-              </a:rPr>
-              <a:t>bitbake-layers add-layer ../meta-trainerdemo</a:t>
-            </a:r>
-          </a:p>
-          <a:p>
-            <a:pPr>
-              <a:spcAft>
-                <a:spcPts val="0"/>
-              </a:spcAft>
-            </a:pPr>
-            <a:r>
-              <a:rPr sz="1200">
+              <a:rPr sz="1600" dirty="0" err="1">
+                <a:solidFill>
+                  <a:srgbClr val="2D2D2D"/>
+                </a:solidFill>
+                <a:latin typeface="Consolas"/>
+              </a:rPr>
+              <a:t>bitbake</a:t>
+            </a:r>
+            <a:r>
+              <a:rPr sz="1600" dirty="0">
+                <a:solidFill>
+                  <a:srgbClr val="2D2D2D"/>
+                </a:solidFill>
+                <a:latin typeface="Consolas"/>
+              </a:rPr>
+              <a:t>-layers add-layer ../meta-</a:t>
+            </a:r>
+            <a:r>
+              <a:rPr sz="1600" dirty="0" err="1">
+                <a:solidFill>
+                  <a:srgbClr val="2D2D2D"/>
+                </a:solidFill>
+                <a:latin typeface="Consolas"/>
+              </a:rPr>
+              <a:t>trainerdemo</a:t>
+            </a:r>
+            <a:endParaRPr sz="1600" dirty="0">
+              <a:solidFill>
+                <a:srgbClr val="2D2D2D"/>
+              </a:solidFill>
+              <a:latin typeface="Consolas"/>
+            </a:endParaRPr>
+          </a:p>
+          <a:p>
+            <a:pPr>
+              <a:spcAft>
+                <a:spcPts val="0"/>
+              </a:spcAft>
+            </a:pPr>
+            <a:r>
+              <a:rPr sz="1600" dirty="0">
                 <a:solidFill>
                   <a:srgbClr val="2D2D2D"/>
                 </a:solidFill>
@@ -5963,7 +7876,7 @@
               </a:spcAft>
             </a:pPr>
             <a:r>
-              <a:rPr sz="1200" i="1">
+              <a:rPr sz="1600" i="1" dirty="0">
                 <a:solidFill>
                   <a:srgbClr val="808080"/>
                 </a:solidFill>
@@ -5979,23 +7892,32 @@
               </a:spcAft>
             </a:pPr>
             <a:r>
-              <a:rPr sz="1200">
-                <a:solidFill>
-                  <a:srgbClr val="2D2D2D"/>
-                </a:solidFill>
-                <a:latin typeface="Consolas"/>
-              </a:rPr>
-              <a:t>bitbake-layers show-layers | tail</a:t>
-            </a:r>
-          </a:p>
-          <a:p>
-            <a:pPr>
-              <a:spcAft>
-                <a:spcPts val="0"/>
-              </a:spcAft>
-            </a:pPr>
-            <a:r>
-              <a:rPr sz="1200">
+              <a:rPr sz="1600" dirty="0" err="1">
+                <a:solidFill>
+                  <a:srgbClr val="2D2D2D"/>
+                </a:solidFill>
+                <a:latin typeface="Consolas"/>
+              </a:rPr>
+              <a:t>bitbake</a:t>
+            </a:r>
+            <a:r>
+              <a:rPr sz="1600" dirty="0">
+                <a:solidFill>
+                  <a:srgbClr val="2D2D2D"/>
+                </a:solidFill>
+                <a:latin typeface="Consolas"/>
+              </a:rPr>
+              <a:t>-layers show-layers | tail</a:t>
+            </a:r>
+          </a:p>
+          <a:p>
+            <a:pPr>
+              <a:spcAft>
+                <a:spcPts val="0"/>
+              </a:spcAft>
+            </a:pPr>
+            <a:r>
+              <a:rPr sz="1600" dirty="0">
                 <a:solidFill>
                   <a:srgbClr val="2D2D2D"/>
                 </a:solidFill>
@@ -6011,7 +7933,7 @@
               </a:spcAft>
             </a:pPr>
             <a:r>
-              <a:rPr sz="1200" i="1">
+              <a:rPr sz="1600" i="1" dirty="0">
                 <a:solidFill>
                   <a:srgbClr val="808080"/>
                 </a:solidFill>
@@ -6027,14 +7949,29 @@
               </a:spcAft>
             </a:pPr>
             <a:r>
-              <a:rPr sz="1200">
-                <a:solidFill>
-                  <a:srgbClr val="2D2D2D"/>
-                </a:solidFill>
-                <a:latin typeface="Consolas"/>
-              </a:rPr>
-              <a:t>tree ../meta-trainerdemo</a:t>
-            </a:r>
+              <a:rPr sz="1600" dirty="0">
+                <a:solidFill>
+                  <a:srgbClr val="2D2D2D"/>
+                </a:solidFill>
+                <a:latin typeface="Consolas"/>
+              </a:rPr>
+              <a:t>tree ../meta-</a:t>
+            </a:r>
+            <a:r>
+              <a:rPr sz="1600" dirty="0" err="1">
+                <a:solidFill>
+                  <a:srgbClr val="2D2D2D"/>
+                </a:solidFill>
+                <a:latin typeface="Consolas"/>
+              </a:rPr>
+              <a:t>trainerdemo</a:t>
+            </a:r>
+            <a:endParaRPr sz="1600" dirty="0">
+              <a:solidFill>
+                <a:srgbClr val="2D2D2D"/>
+              </a:solidFill>
+              <a:latin typeface="Consolas"/>
+            </a:endParaRPr>
           </a:p>
         </p:txBody>
       </p:sp>
@@ -6047,7 +7984,7 @@
         <p:spPr>
           <a:xfrm>
             <a:off x="822960" y="4937760"/>
-            <a:ext cx="10515600" cy="1554480"/>
+            <a:ext cx="10515600" cy="1672253"/>
           </a:xfrm>
           <a:prstGeom prst="rect">
             <a:avLst/>
@@ -6066,7 +8003,7 @@
               </a:spcAft>
             </a:pPr>
             <a:r>
-              <a:rPr sz="1400" b="1" i="0">
+              <a:rPr sz="1600" b="1" i="0">
                 <a:solidFill>
                   <a:srgbClr val="663399"/>
                 </a:solidFill>
@@ -6082,7 +8019,7 @@
               </a:spcAft>
             </a:pPr>
             <a:r>
-              <a:rPr sz="1200" b="0" i="0">
+              <a:rPr sz="1400" b="0" i="0">
                 <a:solidFill>
                   <a:srgbClr val="333333"/>
                 </a:solidFill>
@@ -6098,7 +8035,7 @@
               </a:spcAft>
             </a:pPr>
             <a:r>
-              <a:rPr sz="1200" b="0" i="0">
+              <a:rPr sz="1400" b="0" i="0">
                 <a:solidFill>
                   <a:srgbClr val="333333"/>
                 </a:solidFill>
@@ -6114,7 +8051,7 @@
               </a:spcAft>
             </a:pPr>
             <a:r>
-              <a:rPr sz="1200" b="0" i="0">
+              <a:rPr sz="1400" b="0" i="0">
                 <a:solidFill>
                   <a:srgbClr val="333333"/>
                 </a:solidFill>
@@ -6130,7 +8067,7 @@
               </a:spcAft>
             </a:pPr>
             <a:r>
-              <a:rPr sz="1200" b="0" i="0">
+              <a:rPr sz="1400" b="0" i="0">
                 <a:solidFill>
                   <a:srgbClr val="333333"/>
                 </a:solidFill>
@@ -6146,7 +8083,7 @@
               </a:spcAft>
             </a:pPr>
             <a:r>
-              <a:rPr sz="1200" b="0" i="0">
+              <a:rPr sz="1400" b="0" i="0">
                 <a:solidFill>
                   <a:srgbClr val="333333"/>
                 </a:solidFill>
@@ -6165,8 +8102,8 @@
 </p:sld>
 </file>
 
-<file path=ppt/slides/slide12.xml><?xml version="1.0" encoding="utf-8"?>
-<p:sld xmlns:a="http://schemas.openxmlformats.org/drawingml/2006/main" xmlns:p="http://schemas.openxmlformats.org/presentationml/2006/main" xmlns:r="http://schemas.openxmlformats.org/officeDocument/2006/relationships">
+<file path=ppt/slides/slide6.xml><?xml version="1.0" encoding="utf-8"?>
+<p:sld xmlns:a="http://schemas.openxmlformats.org/drawingml/2006/main" xmlns:r="http://schemas.openxmlformats.org/officeDocument/2006/relationships" xmlns:p="http://schemas.openxmlformats.org/presentationml/2006/main">
   <p:cSld>
     <p:spTree>
       <p:nvGrpSpPr>
@@ -6174,7 +8111,14 @@
         <p:cNvGrpSpPr/>
         <p:nvPr/>
       </p:nvGrpSpPr>
-      <p:grpSpPr/>
+      <p:grpSpPr>
+        <a:xfrm>
+          <a:off x="0" y="0"/>
+          <a:ext cx="0" cy="0"/>
+          <a:chOff x="0" y="0"/>
+          <a:chExt cx="0" cy="0"/>
+        </a:xfrm>
+      </p:grpSpPr>
       <p:sp>
         <p:nvSpPr>
           <p:cNvPr id="2" name="Title 1"/>
@@ -6191,13 +8135,22 @@
           <a:lstStyle/>
           <a:p>
             <a:r>
-              <a:rPr sz="3200" b="1">
-                <a:solidFill>
-                  <a:srgbClr val="CC0066"/>
-                </a:solidFill>
+              <a:rPr sz="3200" b="1" dirty="0">
                 <a:latin typeface="Calibri"/>
               </a:rPr>
-              <a:t>Step 4 — Add Hello World</a:t>
+              <a:t>Step 4</a:t>
+            </a:r>
+            <a:r>
+              <a:rPr lang="en-IN" sz="3200" b="1" dirty="0">
+                <a:latin typeface="Calibri"/>
+              </a:rPr>
+              <a:t>: </a:t>
+            </a:r>
+            <a:r>
+              <a:rPr sz="3200" b="1" dirty="0">
+                <a:latin typeface="Calibri"/>
+              </a:rPr>
+              <a:t>Add Hello World</a:t>
             </a:r>
           </a:p>
         </p:txBody>
@@ -6219,7 +8172,7 @@
           <a:noFill/>
         </p:spPr>
         <p:txBody>
-          <a:bodyPr wrap="square" anchor="t" lIns="45720" rIns="45720">
+          <a:bodyPr wrap="square" lIns="45720" rIns="45720" anchor="t">
             <a:spAutoFit/>
           </a:bodyPr>
           <a:lstStyle/>
@@ -6280,6 +8233,7 @@
           <a:lstStyle/>
           <a:p>
             <a:pPr algn="ctr"/>
+            <a:endParaRPr/>
           </a:p>
         </p:txBody>
       </p:sp>
@@ -6324,6 +8278,7 @@
           <a:lstStyle/>
           <a:p>
             <a:pPr algn="ctr"/>
+            <a:endParaRPr/>
           </a:p>
         </p:txBody>
       </p:sp>
@@ -6336,7 +8291,7 @@
         <p:spPr>
           <a:xfrm>
             <a:off x="1005840" y="1874519"/>
-            <a:ext cx="10241280" cy="4389120"/>
+            <a:ext cx="10241280" cy="5016758"/>
           </a:xfrm>
           <a:prstGeom prst="rect">
             <a:avLst/>
@@ -6355,7 +8310,7 @@
               </a:spcAft>
             </a:pPr>
             <a:r>
-              <a:rPr sz="1000" i="1">
+              <a:rPr sz="1600" i="1" dirty="0">
                 <a:solidFill>
                   <a:srgbClr val="808080"/>
                 </a:solidFill>
@@ -6371,23 +8326,220 @@
               </a:spcAft>
             </a:pPr>
             <a:r>
-              <a:rPr sz="1000">
-                <a:solidFill>
-                  <a:srgbClr val="2D2D2D"/>
-                </a:solidFill>
-                <a:latin typeface="Consolas"/>
-              </a:rPr>
-              <a:t>mkdir -p ../meta-trainerdemo/recipes-trainergw/hello/files</a:t>
-            </a:r>
-          </a:p>
-          <a:p>
-            <a:pPr>
-              <a:spcAft>
-                <a:spcPts val="0"/>
-              </a:spcAft>
-            </a:pPr>
-            <a:r>
-              <a:rPr sz="1000">
+              <a:rPr sz="1600" dirty="0" err="1">
+                <a:solidFill>
+                  <a:srgbClr val="2D2D2D"/>
+                </a:solidFill>
+                <a:latin typeface="Consolas"/>
+              </a:rPr>
+              <a:t>mkdir</a:t>
+            </a:r>
+            <a:r>
+              <a:rPr sz="1600" dirty="0">
+                <a:solidFill>
+                  <a:srgbClr val="2D2D2D"/>
+                </a:solidFill>
+                <a:latin typeface="Consolas"/>
+              </a:rPr>
+              <a:t> -p ../meta-</a:t>
+            </a:r>
+            <a:r>
+              <a:rPr sz="1600" dirty="0" err="1">
+                <a:solidFill>
+                  <a:srgbClr val="2D2D2D"/>
+                </a:solidFill>
+                <a:latin typeface="Consolas"/>
+              </a:rPr>
+              <a:t>trainerdemo</a:t>
+            </a:r>
+            <a:r>
+              <a:rPr sz="1600" dirty="0">
+                <a:solidFill>
+                  <a:srgbClr val="2D2D2D"/>
+                </a:solidFill>
+                <a:latin typeface="Consolas"/>
+              </a:rPr>
+              <a:t>/recipes-</a:t>
+            </a:r>
+            <a:r>
+              <a:rPr sz="1600" dirty="0" err="1">
+                <a:solidFill>
+                  <a:srgbClr val="2D2D2D"/>
+                </a:solidFill>
+                <a:latin typeface="Consolas"/>
+              </a:rPr>
+              <a:t>trainergw</a:t>
+            </a:r>
+            <a:r>
+              <a:rPr sz="1600" dirty="0">
+                <a:solidFill>
+                  <a:srgbClr val="2D2D2D"/>
+                </a:solidFill>
+                <a:latin typeface="Consolas"/>
+              </a:rPr>
+              <a:t>/hello/files</a:t>
+            </a:r>
+          </a:p>
+          <a:p>
+            <a:pPr>
+              <a:spcAft>
+                <a:spcPts val="0"/>
+              </a:spcAft>
+            </a:pPr>
+            <a:r>
+              <a:rPr sz="1600" i="1" dirty="0">
+                <a:solidFill>
+                  <a:srgbClr val="808080"/>
+                </a:solidFill>
+                <a:latin typeface="Consolas"/>
+              </a:rPr>
+              <a:t># Create the source script</a:t>
+            </a:r>
+          </a:p>
+          <a:p>
+            <a:pPr>
+              <a:spcAft>
+                <a:spcPts val="0"/>
+              </a:spcAft>
+            </a:pPr>
+            <a:r>
+              <a:rPr sz="1600" dirty="0">
+                <a:solidFill>
+                  <a:srgbClr val="2D2D2D"/>
+                </a:solidFill>
+                <a:latin typeface="Consolas"/>
+              </a:rPr>
+              <a:t>cat &gt; ../meta-</a:t>
+            </a:r>
+            <a:r>
+              <a:rPr sz="1600" dirty="0" err="1">
+                <a:solidFill>
+                  <a:srgbClr val="2D2D2D"/>
+                </a:solidFill>
+                <a:latin typeface="Consolas"/>
+              </a:rPr>
+              <a:t>trainerdemo</a:t>
+            </a:r>
+            <a:r>
+              <a:rPr sz="1600" dirty="0">
+                <a:solidFill>
+                  <a:srgbClr val="2D2D2D"/>
+                </a:solidFill>
+                <a:latin typeface="Consolas"/>
+              </a:rPr>
+              <a:t>/recipes-</a:t>
+            </a:r>
+            <a:r>
+              <a:rPr sz="1600" dirty="0" err="1">
+                <a:solidFill>
+                  <a:srgbClr val="2D2D2D"/>
+                </a:solidFill>
+                <a:latin typeface="Consolas"/>
+              </a:rPr>
+              <a:t>trainergw</a:t>
+            </a:r>
+            <a:r>
+              <a:rPr sz="1600" dirty="0">
+                <a:solidFill>
+                  <a:srgbClr val="2D2D2D"/>
+                </a:solidFill>
+                <a:latin typeface="Consolas"/>
+              </a:rPr>
+              <a:t>/hello/files/hello-</a:t>
+            </a:r>
+            <a:r>
+              <a:rPr sz="1600" dirty="0" err="1">
+                <a:solidFill>
+                  <a:srgbClr val="2D2D2D"/>
+                </a:solidFill>
+                <a:latin typeface="Consolas"/>
+              </a:rPr>
+              <a:t>trainergw</a:t>
+            </a:r>
+            <a:r>
+              <a:rPr sz="1600" dirty="0">
+                <a:solidFill>
+                  <a:srgbClr val="2D2D2D"/>
+                </a:solidFill>
+                <a:latin typeface="Consolas"/>
+              </a:rPr>
+              <a:t> &lt;&lt;'EOF'</a:t>
+            </a:r>
+          </a:p>
+          <a:p>
+            <a:pPr>
+              <a:spcAft>
+                <a:spcPts val="0"/>
+              </a:spcAft>
+            </a:pPr>
+            <a:r>
+              <a:rPr sz="1600" i="1" dirty="0">
+                <a:solidFill>
+                  <a:srgbClr val="808080"/>
+                </a:solidFill>
+                <a:latin typeface="Consolas"/>
+              </a:rPr>
+              <a:t>#!/bin/sh</a:t>
+            </a:r>
+          </a:p>
+          <a:p>
+            <a:pPr>
+              <a:spcAft>
+                <a:spcPts val="0"/>
+              </a:spcAft>
+            </a:pPr>
+            <a:r>
+              <a:rPr sz="1600" dirty="0">
+                <a:solidFill>
+                  <a:srgbClr val="2D2D2D"/>
+                </a:solidFill>
+                <a:latin typeface="Consolas"/>
+              </a:rPr>
+              <a:t>echo "Hello from </a:t>
+            </a:r>
+            <a:r>
+              <a:rPr sz="1600" dirty="0" err="1">
+                <a:solidFill>
+                  <a:srgbClr val="2D2D2D"/>
+                </a:solidFill>
+                <a:latin typeface="Consolas"/>
+              </a:rPr>
+              <a:t>TrainerGW</a:t>
+            </a:r>
+            <a:r>
+              <a:rPr sz="1600" dirty="0">
+                <a:solidFill>
+                  <a:srgbClr val="2D2D2D"/>
+                </a:solidFill>
+                <a:latin typeface="Consolas"/>
+              </a:rPr>
+              <a:t>!"</a:t>
+            </a:r>
+          </a:p>
+          <a:p>
+            <a:pPr>
+              <a:spcAft>
+                <a:spcPts val="0"/>
+              </a:spcAft>
+            </a:pPr>
+            <a:r>
+              <a:rPr sz="1600" dirty="0">
+                <a:solidFill>
+                  <a:srgbClr val="2D2D2D"/>
+                </a:solidFill>
+                <a:latin typeface="Consolas"/>
+              </a:rPr>
+              <a:t>EOF</a:t>
+            </a:r>
+          </a:p>
+          <a:p>
+            <a:pPr>
+              <a:spcAft>
+                <a:spcPts val="0"/>
+              </a:spcAft>
+            </a:pPr>
+            <a:r>
+              <a:rPr sz="1600" dirty="0">
                 <a:solidFill>
                   <a:srgbClr val="2D2D2D"/>
                 </a:solidFill>
@@ -6403,87 +8555,139 @@
               </a:spcAft>
             </a:pPr>
             <a:r>
-              <a:rPr sz="1000" i="1">
+              <a:rPr sz="1600" i="1" dirty="0">
                 <a:solidFill>
                   <a:srgbClr val="808080"/>
                 </a:solidFill>
                 <a:latin typeface="Consolas"/>
               </a:rPr>
-              <a:t># Create the source script</a:t>
-            </a:r>
-          </a:p>
-          <a:p>
-            <a:pPr>
-              <a:spcAft>
-                <a:spcPts val="0"/>
-              </a:spcAft>
-            </a:pPr>
-            <a:r>
-              <a:rPr sz="1000">
-                <a:solidFill>
-                  <a:srgbClr val="2D2D2D"/>
-                </a:solidFill>
-                <a:latin typeface="Consolas"/>
-              </a:rPr>
-              <a:t>cat &gt; ../meta-trainerdemo/recipes-trainergw/hello/files/hello-trainergw &lt;&lt;'EOF'</a:t>
-            </a:r>
-          </a:p>
-          <a:p>
-            <a:pPr>
-              <a:spcAft>
-                <a:spcPts val="0"/>
-              </a:spcAft>
-            </a:pPr>
-            <a:r>
-              <a:rPr sz="1000" i="1">
-                <a:solidFill>
-                  <a:srgbClr val="808080"/>
-                </a:solidFill>
-                <a:latin typeface="Consolas"/>
-              </a:rPr>
-              <a:t>#!/bin/sh</a:t>
-            </a:r>
-          </a:p>
-          <a:p>
-            <a:pPr>
-              <a:spcAft>
-                <a:spcPts val="0"/>
-              </a:spcAft>
-            </a:pPr>
-            <a:r>
-              <a:rPr sz="1000">
-                <a:solidFill>
-                  <a:srgbClr val="2D2D2D"/>
-                </a:solidFill>
-                <a:latin typeface="Consolas"/>
-              </a:rPr>
-              <a:t>echo "Hello from TrainerGW!"</a:t>
-            </a:r>
-          </a:p>
-          <a:p>
-            <a:pPr>
-              <a:spcAft>
-                <a:spcPts val="0"/>
-              </a:spcAft>
-            </a:pPr>
-            <a:r>
-              <a:rPr sz="1000">
-                <a:solidFill>
-                  <a:srgbClr val="2D2D2D"/>
-                </a:solidFill>
-                <a:latin typeface="Consolas"/>
-              </a:rPr>
-              <a:t>EOF</a:t>
-            </a:r>
-          </a:p>
-          <a:p>
-            <a:pPr>
-              <a:spcAft>
-                <a:spcPts val="0"/>
-              </a:spcAft>
-            </a:pPr>
-            <a:r>
-              <a:rPr sz="1000">
+              <a:t># Create the recipe file</a:t>
+            </a:r>
+          </a:p>
+          <a:p>
+            <a:pPr>
+              <a:spcAft>
+                <a:spcPts val="0"/>
+              </a:spcAft>
+            </a:pPr>
+            <a:r>
+              <a:rPr sz="1600" dirty="0">
+                <a:solidFill>
+                  <a:srgbClr val="2D2D2D"/>
+                </a:solidFill>
+                <a:latin typeface="Consolas"/>
+              </a:rPr>
+              <a:t>cat &gt; ../meta-trainerdemo/recipes-trainergw/hello/hello-trainergw_1.0.bb &lt;&lt;'EOF'</a:t>
+            </a:r>
+          </a:p>
+          <a:p>
+            <a:pPr>
+              <a:spcAft>
+                <a:spcPts val="0"/>
+              </a:spcAft>
+            </a:pPr>
+            <a:r>
+              <a:rPr sz="1600" dirty="0">
+                <a:solidFill>
+                  <a:srgbClr val="2D2D2D"/>
+                </a:solidFill>
+                <a:latin typeface="Consolas"/>
+              </a:rPr>
+              <a:t>SUMMARY = "Tiny hello-world for </a:t>
+            </a:r>
+            <a:r>
+              <a:rPr sz="1600" dirty="0" err="1">
+                <a:solidFill>
+                  <a:srgbClr val="2D2D2D"/>
+                </a:solidFill>
+                <a:latin typeface="Consolas"/>
+              </a:rPr>
+              <a:t>trainergw</a:t>
+            </a:r>
+            <a:r>
+              <a:rPr sz="1600" dirty="0">
+                <a:solidFill>
+                  <a:srgbClr val="2D2D2D"/>
+                </a:solidFill>
+                <a:latin typeface="Consolas"/>
+              </a:rPr>
+              <a:t>"</a:t>
+            </a:r>
+          </a:p>
+          <a:p>
+            <a:pPr>
+              <a:spcAft>
+                <a:spcPts val="0"/>
+              </a:spcAft>
+            </a:pPr>
+            <a:r>
+              <a:rPr sz="1600" dirty="0">
+                <a:solidFill>
+                  <a:srgbClr val="2D2D2D"/>
+                </a:solidFill>
+                <a:latin typeface="Consolas"/>
+              </a:rPr>
+              <a:t>LICENSE = "MIT"</a:t>
+            </a:r>
+          </a:p>
+          <a:p>
+            <a:pPr>
+              <a:spcAft>
+                <a:spcPts val="0"/>
+              </a:spcAft>
+            </a:pPr>
+            <a:r>
+              <a:rPr sz="1600" dirty="0">
+                <a:solidFill>
+                  <a:srgbClr val="2D2D2D"/>
+                </a:solidFill>
+                <a:latin typeface="Consolas"/>
+              </a:rPr>
+              <a:t>LIC_FILES_CHKSUM = "file://${COMMON_LICENSE_DIR}/MIT;md5=0835ade698e0bcf8506ecda2f7b4f302"</a:t>
+            </a:r>
+          </a:p>
+          <a:p>
+            <a:pPr>
+              <a:spcAft>
+                <a:spcPts val="0"/>
+              </a:spcAft>
+            </a:pPr>
+            <a:r>
+              <a:rPr sz="1600" dirty="0">
+                <a:solidFill>
+                  <a:srgbClr val="2D2D2D"/>
+                </a:solidFill>
+                <a:latin typeface="Consolas"/>
+              </a:rPr>
+              <a:t>SRC_URI = "file://hello-</a:t>
+            </a:r>
+            <a:r>
+              <a:rPr sz="1600" dirty="0" err="1">
+                <a:solidFill>
+                  <a:srgbClr val="2D2D2D"/>
+                </a:solidFill>
+                <a:latin typeface="Consolas"/>
+              </a:rPr>
+              <a:t>trainergw</a:t>
+            </a:r>
+            <a:r>
+              <a:rPr sz="1600" dirty="0">
+                <a:solidFill>
+                  <a:srgbClr val="2D2D2D"/>
+                </a:solidFill>
+                <a:latin typeface="Consolas"/>
+              </a:rPr>
+              <a:t>"</a:t>
+            </a:r>
+          </a:p>
+          <a:p>
+            <a:pPr>
+              <a:spcAft>
+                <a:spcPts val="0"/>
+              </a:spcAft>
+            </a:pPr>
+            <a:r>
+              <a:rPr sz="1600" dirty="0">
                 <a:solidFill>
                   <a:srgbClr val="2D2D2D"/>
                 </a:solidFill>
@@ -6499,167 +8703,50 @@
               </a:spcAft>
             </a:pPr>
             <a:r>
-              <a:rPr sz="1000" i="1">
-                <a:solidFill>
-                  <a:srgbClr val="808080"/>
-                </a:solidFill>
-                <a:latin typeface="Consolas"/>
-              </a:rPr>
-              <a:t># Create the recipe file</a:t>
-            </a:r>
-          </a:p>
-          <a:p>
-            <a:pPr>
-              <a:spcAft>
-                <a:spcPts val="0"/>
-              </a:spcAft>
-            </a:pPr>
-            <a:r>
-              <a:rPr sz="1000">
-                <a:solidFill>
-                  <a:srgbClr val="2D2D2D"/>
-                </a:solidFill>
-                <a:latin typeface="Consolas"/>
-              </a:rPr>
-              <a:t>cat &gt; ../meta-trainerdemo/recipes-trainergw/hello/hello-trainergw_1.0.bb &lt;&lt;'EOF'</a:t>
-            </a:r>
-          </a:p>
-          <a:p>
-            <a:pPr>
-              <a:spcAft>
-                <a:spcPts val="0"/>
-              </a:spcAft>
-            </a:pPr>
-            <a:r>
-              <a:rPr sz="1000">
-                <a:solidFill>
-                  <a:srgbClr val="2D2D2D"/>
-                </a:solidFill>
-                <a:latin typeface="Consolas"/>
-              </a:rPr>
-              <a:t>SUMMARY = "Tiny hello-world for trainergw"</a:t>
-            </a:r>
-          </a:p>
-          <a:p>
-            <a:pPr>
-              <a:spcAft>
-                <a:spcPts val="0"/>
-              </a:spcAft>
-            </a:pPr>
-            <a:r>
-              <a:rPr sz="1000">
-                <a:solidFill>
-                  <a:srgbClr val="2D2D2D"/>
-                </a:solidFill>
-                <a:latin typeface="Consolas"/>
-              </a:rPr>
-              <a:t>LICENSE = "MIT"</a:t>
-            </a:r>
-          </a:p>
-          <a:p>
-            <a:pPr>
-              <a:spcAft>
-                <a:spcPts val="0"/>
-              </a:spcAft>
-            </a:pPr>
-            <a:r>
-              <a:rPr sz="1000">
-                <a:solidFill>
-                  <a:srgbClr val="2D2D2D"/>
-                </a:solidFill>
-                <a:latin typeface="Consolas"/>
-              </a:rPr>
-              <a:t>LIC_FILES_CHKSUM = "file://${COMMON_LICENSE_DIR}/MIT;md5=0835ade698e0bcf8506ecda2f7b4f302"</a:t>
-            </a:r>
-          </a:p>
-          <a:p>
-            <a:pPr>
-              <a:spcAft>
-                <a:spcPts val="0"/>
-              </a:spcAft>
-            </a:pPr>
-            <a:r>
-              <a:rPr sz="1000">
-                <a:solidFill>
-                  <a:srgbClr val="2D2D2D"/>
-                </a:solidFill>
-                <a:latin typeface="Consolas"/>
-              </a:rPr>
-              <a:t>SRC_URI = "file://hello-trainergw"</a:t>
-            </a:r>
-          </a:p>
-          <a:p>
-            <a:pPr>
-              <a:spcAft>
-                <a:spcPts val="0"/>
-              </a:spcAft>
-            </a:pPr>
-            <a:r>
-              <a:rPr sz="1000">
-                <a:solidFill>
-                  <a:srgbClr val="2D2D2D"/>
-                </a:solidFill>
-                <a:latin typeface="Consolas"/>
-              </a:rPr>
-              <a:t> </a:t>
-            </a:r>
-          </a:p>
-          <a:p>
-            <a:pPr>
-              <a:spcAft>
-                <a:spcPts val="0"/>
-              </a:spcAft>
-            </a:pPr>
-            <a:r>
-              <a:rPr sz="1000">
-                <a:solidFill>
-                  <a:srgbClr val="2D2D2D"/>
-                </a:solidFill>
-                <a:latin typeface="Consolas"/>
-              </a:rPr>
-              <a:t>do_install() {</a:t>
-            </a:r>
-          </a:p>
-          <a:p>
-            <a:pPr>
-              <a:spcAft>
-                <a:spcPts val="0"/>
-              </a:spcAft>
-            </a:pPr>
-            <a:r>
-              <a:rPr sz="1000">
-                <a:solidFill>
-                  <a:srgbClr val="2D2D2D"/>
-                </a:solidFill>
-                <a:latin typeface="Consolas"/>
-              </a:rPr>
-              <a:t>    install -d ${D}${bindir}</a:t>
-            </a:r>
-          </a:p>
-          <a:p>
-            <a:pPr>
-              <a:spcAft>
-                <a:spcPts val="0"/>
-              </a:spcAft>
-            </a:pPr>
-            <a:r>
-              <a:rPr sz="1000">
-                <a:solidFill>
-                  <a:srgbClr val="2D2D2D"/>
-                </a:solidFill>
-                <a:latin typeface="Consolas"/>
-              </a:rPr>
-              <a:t>    install -m 0755 ${WORKDIR}/hello-trainergw ${D}${bindir}/hello-trainergw</a:t>
-            </a:r>
-          </a:p>
-          <a:p>
-            <a:pPr>
-              <a:spcAft>
-                <a:spcPts val="0"/>
-              </a:spcAft>
-            </a:pPr>
-            <a:r>
-              <a:rPr sz="1000">
+              <a:rPr sz="1600" dirty="0" err="1">
+                <a:solidFill>
+                  <a:srgbClr val="2D2D2D"/>
+                </a:solidFill>
+                <a:latin typeface="Consolas"/>
+              </a:rPr>
+              <a:t>do_install</a:t>
+            </a:r>
+            <a:r>
+              <a:rPr sz="1600" dirty="0">
+                <a:solidFill>
+                  <a:srgbClr val="2D2D2D"/>
+                </a:solidFill>
+                <a:latin typeface="Consolas"/>
+              </a:rPr>
+              <a:t>() {</a:t>
+            </a:r>
+          </a:p>
+          <a:p>
+            <a:pPr>
+              <a:spcAft>
+                <a:spcPts val="0"/>
+              </a:spcAft>
+            </a:pPr>
+            <a:r>
+              <a:rPr sz="1600" dirty="0">
+                <a:solidFill>
+                  <a:srgbClr val="2D2D2D"/>
+                </a:solidFill>
+                <a:latin typeface="Consolas"/>
+              </a:rPr>
+              <a:t>    install -d ${D}${</a:t>
+            </a:r>
+            <a:r>
+              <a:rPr sz="1600" dirty="0" err="1">
+                <a:solidFill>
+                  <a:srgbClr val="2D2D2D"/>
+                </a:solidFill>
+                <a:latin typeface="Consolas"/>
+              </a:rPr>
+              <a:t>bindir</a:t>
+            </a:r>
+            <a:r>
+              <a:rPr sz="1600" dirty="0">
                 <a:solidFill>
                   <a:srgbClr val="2D2D2D"/>
                 </a:solidFill>
@@ -6675,7 +8762,90 @@
               </a:spcAft>
             </a:pPr>
             <a:r>
-              <a:rPr sz="1000">
+              <a:rPr sz="1600" dirty="0">
+                <a:solidFill>
+                  <a:srgbClr val="2D2D2D"/>
+                </a:solidFill>
+                <a:latin typeface="Consolas"/>
+              </a:rPr>
+              <a:t>    install -m 0755 ${WORKDIR}/hello-</a:t>
+            </a:r>
+            <a:r>
+              <a:rPr sz="1600" dirty="0" err="1">
+                <a:solidFill>
+                  <a:srgbClr val="2D2D2D"/>
+                </a:solidFill>
+                <a:latin typeface="Consolas"/>
+              </a:rPr>
+              <a:t>trainergw</a:t>
+            </a:r>
+            <a:r>
+              <a:rPr sz="1600" dirty="0">
+                <a:solidFill>
+                  <a:srgbClr val="2D2D2D"/>
+                </a:solidFill>
+                <a:latin typeface="Consolas"/>
+              </a:rPr>
+              <a:t> ${D}${</a:t>
+            </a:r>
+            <a:r>
+              <a:rPr sz="1600" dirty="0" err="1">
+                <a:solidFill>
+                  <a:srgbClr val="2D2D2D"/>
+                </a:solidFill>
+                <a:latin typeface="Consolas"/>
+              </a:rPr>
+              <a:t>bindir</a:t>
+            </a:r>
+            <a:r>
+              <a:rPr sz="1600" dirty="0">
+                <a:solidFill>
+                  <a:srgbClr val="2D2D2D"/>
+                </a:solidFill>
+                <a:latin typeface="Consolas"/>
+              </a:rPr>
+              <a:t>}/hello-</a:t>
+            </a:r>
+            <a:r>
+              <a:rPr sz="1600" dirty="0" err="1">
+                <a:solidFill>
+                  <a:srgbClr val="2D2D2D"/>
+                </a:solidFill>
+                <a:latin typeface="Consolas"/>
+              </a:rPr>
+              <a:t>trainergw</a:t>
+            </a:r>
+            <a:endParaRPr sz="1600" dirty="0">
+              <a:solidFill>
+                <a:srgbClr val="2D2D2D"/>
+              </a:solidFill>
+              <a:latin typeface="Consolas"/>
+            </a:endParaRPr>
+          </a:p>
+          <a:p>
+            <a:pPr>
+              <a:spcAft>
+                <a:spcPts val="0"/>
+              </a:spcAft>
+            </a:pPr>
+            <a:r>
+              <a:rPr sz="1600" dirty="0">
+                <a:solidFill>
+                  <a:srgbClr val="2D2D2D"/>
+                </a:solidFill>
+                <a:latin typeface="Consolas"/>
+              </a:rPr>
+              <a:t>}</a:t>
+            </a:r>
+          </a:p>
+          <a:p>
+            <a:pPr>
+              <a:spcAft>
+                <a:spcPts val="0"/>
+              </a:spcAft>
+            </a:pPr>
+            <a:r>
+              <a:rPr sz="1600" dirty="0">
                 <a:solidFill>
                   <a:srgbClr val="2D2D2D"/>
                 </a:solidFill>
@@ -6694,8 +8864,8 @@
 </p:sld>
 </file>
 
-<file path=ppt/slides/slide13.xml><?xml version="1.0" encoding="utf-8"?>
-<p:sld xmlns:a="http://schemas.openxmlformats.org/drawingml/2006/main" xmlns:p="http://schemas.openxmlformats.org/presentationml/2006/main" xmlns:r="http://schemas.openxmlformats.org/officeDocument/2006/relationships">
+<file path=ppt/slides/slide7.xml><?xml version="1.0" encoding="utf-8"?>
+<p:sld xmlns:a="http://schemas.openxmlformats.org/drawingml/2006/main" xmlns:r="http://schemas.openxmlformats.org/officeDocument/2006/relationships" xmlns:p="http://schemas.openxmlformats.org/presentationml/2006/main">
   <p:cSld>
     <p:spTree>
       <p:nvGrpSpPr>
@@ -6703,7 +8873,14 @@
         <p:cNvGrpSpPr/>
         <p:nvPr/>
       </p:nvGrpSpPr>
-      <p:grpSpPr/>
+      <p:grpSpPr>
+        <a:xfrm>
+          <a:off x="0" y="0"/>
+          <a:ext cx="0" cy="0"/>
+          <a:chOff x="0" y="0"/>
+          <a:chExt cx="0" cy="0"/>
+        </a:xfrm>
+      </p:grpSpPr>
       <p:sp>
         <p:nvSpPr>
           <p:cNvPr id="2" name="Title 1"/>
@@ -6720,13 +8897,22 @@
           <a:lstStyle/>
           <a:p>
             <a:r>
-              <a:rPr sz="3200" b="1">
-                <a:solidFill>
-                  <a:srgbClr val="CC0066"/>
-                </a:solidFill>
+              <a:rPr sz="3200" b="1" dirty="0">
                 <a:latin typeface="Calibri"/>
               </a:rPr>
-              <a:t>Step 5 — Build and Include</a:t>
+              <a:t>Step 5</a:t>
+            </a:r>
+            <a:r>
+              <a:rPr lang="en-IN" sz="3200" b="1" dirty="0">
+                <a:latin typeface="Calibri"/>
+              </a:rPr>
+              <a:t>: </a:t>
+            </a:r>
+            <a:r>
+              <a:rPr sz="3200" b="1" dirty="0">
+                <a:latin typeface="Calibri"/>
+              </a:rPr>
+              <a:t>Build and Include</a:t>
             </a:r>
           </a:p>
         </p:txBody>
@@ -6740,7 +8926,7 @@
         <p:spPr>
           <a:xfrm>
             <a:off x="822960" y="1417320"/>
-            <a:ext cx="10515600" cy="365760"/>
+            <a:ext cx="10515600" cy="338554"/>
           </a:xfrm>
           <a:prstGeom prst="rect">
             <a:avLst/>
@@ -6748,14 +8934,14 @@
           <a:noFill/>
         </p:spPr>
         <p:txBody>
-          <a:bodyPr wrap="square" anchor="t" lIns="45720" rIns="45720">
+          <a:bodyPr wrap="square" lIns="45720" rIns="45720" anchor="t">
             <a:spAutoFit/>
           </a:bodyPr>
           <a:lstStyle/>
           <a:p>
             <a:pPr algn="l"/>
             <a:r>
-              <a:rPr sz="1500" b="0" i="1">
+              <a:rPr sz="1600" b="0" i="1" dirty="0">
                 <a:solidFill>
                   <a:srgbClr val="666666"/>
                 </a:solidFill>
@@ -6809,6 +8995,7 @@
           <a:lstStyle/>
           <a:p>
             <a:pPr algn="ctr"/>
+            <a:endParaRPr/>
           </a:p>
         </p:txBody>
       </p:sp>
@@ -6853,6 +9040,7 @@
           <a:lstStyle/>
           <a:p>
             <a:pPr algn="ctr"/>
+            <a:endParaRPr/>
           </a:p>
         </p:txBody>
       </p:sp>
@@ -6865,7 +9053,7 @@
         <p:spPr>
           <a:xfrm>
             <a:off x="1005840" y="1874519"/>
-            <a:ext cx="10241280" cy="3474720"/>
+            <a:ext cx="10241280" cy="3416320"/>
           </a:xfrm>
           <a:prstGeom prst="rect">
             <a:avLst/>
@@ -6884,7 +9072,7 @@
               </a:spcAft>
             </a:pPr>
             <a:r>
-              <a:rPr sz="1100" i="1">
+              <a:rPr i="1" dirty="0">
                 <a:solidFill>
                   <a:srgbClr val="808080"/>
                 </a:solidFill>
@@ -6900,23 +9088,74 @@
               </a:spcAft>
             </a:pPr>
             <a:r>
-              <a:rPr sz="1100">
-                <a:solidFill>
-                  <a:srgbClr val="2D2D2D"/>
-                </a:solidFill>
-                <a:latin typeface="Consolas"/>
-              </a:rPr>
-              <a:t>echo 'IMAGE_INSTALL:append = " hello-trainergw"' &gt;&gt; conf/local.conf</a:t>
-            </a:r>
-          </a:p>
-          <a:p>
-            <a:pPr>
-              <a:spcAft>
-                <a:spcPts val="0"/>
-              </a:spcAft>
-            </a:pPr>
-            <a:r>
-              <a:rPr sz="1100">
+              <a:rPr dirty="0">
+                <a:solidFill>
+                  <a:srgbClr val="2D2D2D"/>
+                </a:solidFill>
+                <a:latin typeface="Consolas"/>
+              </a:rPr>
+              <a:t>echo '</a:t>
+            </a:r>
+            <a:r>
+              <a:rPr dirty="0" err="1">
+                <a:solidFill>
+                  <a:srgbClr val="2D2D2D"/>
+                </a:solidFill>
+                <a:latin typeface="Consolas"/>
+              </a:rPr>
+              <a:t>IMAGE_INSTALL:append</a:t>
+            </a:r>
+            <a:r>
+              <a:rPr dirty="0">
+                <a:solidFill>
+                  <a:srgbClr val="2D2D2D"/>
+                </a:solidFill>
+                <a:latin typeface="Consolas"/>
+              </a:rPr>
+              <a:t> = " hello-</a:t>
+            </a:r>
+            <a:r>
+              <a:rPr dirty="0" err="1">
+                <a:solidFill>
+                  <a:srgbClr val="2D2D2D"/>
+                </a:solidFill>
+                <a:latin typeface="Consolas"/>
+              </a:rPr>
+              <a:t>trainergw</a:t>
+            </a:r>
+            <a:r>
+              <a:rPr dirty="0">
+                <a:solidFill>
+                  <a:srgbClr val="2D2D2D"/>
+                </a:solidFill>
+                <a:latin typeface="Consolas"/>
+              </a:rPr>
+              <a:t>"' &gt;&gt; conf/</a:t>
+            </a:r>
+            <a:r>
+              <a:rPr dirty="0" err="1">
+                <a:solidFill>
+                  <a:srgbClr val="2D2D2D"/>
+                </a:solidFill>
+                <a:latin typeface="Consolas"/>
+              </a:rPr>
+              <a:t>local.conf</a:t>
+            </a:r>
+            <a:endParaRPr dirty="0">
+              <a:solidFill>
+                <a:srgbClr val="2D2D2D"/>
+              </a:solidFill>
+              <a:latin typeface="Consolas"/>
+            </a:endParaRPr>
+          </a:p>
+          <a:p>
+            <a:pPr>
+              <a:spcAft>
+                <a:spcPts val="0"/>
+              </a:spcAft>
+            </a:pPr>
+            <a:r>
+              <a:rPr dirty="0">
                 <a:solidFill>
                   <a:srgbClr val="2D2D2D"/>
                 </a:solidFill>
@@ -6932,7 +9171,7 @@
               </a:spcAft>
             </a:pPr>
             <a:r>
-              <a:rPr sz="1100" i="1">
+              <a:rPr i="1" dirty="0">
                 <a:solidFill>
                   <a:srgbClr val="808080"/>
                 </a:solidFill>
@@ -6948,23 +9187,47 @@
               </a:spcAft>
             </a:pPr>
             <a:r>
-              <a:rPr sz="1100">
-                <a:solidFill>
-                  <a:srgbClr val="2D2D2D"/>
-                </a:solidFill>
-                <a:latin typeface="Consolas"/>
-              </a:rPr>
-              <a:t>bitbake hello-trainergw</a:t>
-            </a:r>
-          </a:p>
-          <a:p>
-            <a:pPr>
-              <a:spcAft>
-                <a:spcPts val="0"/>
-              </a:spcAft>
-            </a:pPr>
-            <a:r>
-              <a:rPr sz="1100">
+              <a:rPr dirty="0" err="1">
+                <a:solidFill>
+                  <a:srgbClr val="2D2D2D"/>
+                </a:solidFill>
+                <a:latin typeface="Consolas"/>
+              </a:rPr>
+              <a:t>bitbake</a:t>
+            </a:r>
+            <a:r>
+              <a:rPr dirty="0">
+                <a:solidFill>
+                  <a:srgbClr val="2D2D2D"/>
+                </a:solidFill>
+                <a:latin typeface="Consolas"/>
+              </a:rPr>
+              <a:t> hello-</a:t>
+            </a:r>
+            <a:r>
+              <a:rPr dirty="0" err="1">
+                <a:solidFill>
+                  <a:srgbClr val="2D2D2D"/>
+                </a:solidFill>
+                <a:latin typeface="Consolas"/>
+              </a:rPr>
+              <a:t>trainergw</a:t>
+            </a:r>
+            <a:endParaRPr dirty="0">
+              <a:solidFill>
+                <a:srgbClr val="2D2D2D"/>
+              </a:solidFill>
+              <a:latin typeface="Consolas"/>
+            </a:endParaRPr>
+          </a:p>
+          <a:p>
+            <a:pPr>
+              <a:spcAft>
+                <a:spcPts val="0"/>
+              </a:spcAft>
+            </a:pPr>
+            <a:r>
+              <a:rPr dirty="0">
                 <a:solidFill>
                   <a:srgbClr val="2D2D2D"/>
                 </a:solidFill>
@@ -6980,39 +9243,66 @@
               </a:spcAft>
             </a:pPr>
             <a:r>
-              <a:rPr sz="1100" i="1">
+              <a:rPr i="1" dirty="0">
                 <a:solidFill>
                   <a:srgbClr val="808080"/>
                 </a:solidFill>
                 <a:latin typeface="Consolas"/>
               </a:rPr>
-              <a:t># Rebuild the image (sstate will skip everything else)</a:t>
-            </a:r>
-          </a:p>
-          <a:p>
-            <a:pPr>
-              <a:spcAft>
-                <a:spcPts val="0"/>
-              </a:spcAft>
-            </a:pPr>
-            <a:r>
-              <a:rPr sz="1100">
-                <a:solidFill>
-                  <a:srgbClr val="2D2D2D"/>
-                </a:solidFill>
-                <a:latin typeface="Consolas"/>
-              </a:rPr>
-              <a:t>bitbake core-image-base</a:t>
-            </a:r>
-          </a:p>
-          <a:p>
-            <a:pPr>
-              <a:spcAft>
-                <a:spcPts val="0"/>
-              </a:spcAft>
-            </a:pPr>
-            <a:r>
-              <a:rPr sz="1100">
+              <a:t># Rebuild the image (</a:t>
+            </a:r>
+            <a:r>
+              <a:rPr i="1" dirty="0" err="1">
+                <a:solidFill>
+                  <a:srgbClr val="808080"/>
+                </a:solidFill>
+                <a:latin typeface="Consolas"/>
+              </a:rPr>
+              <a:t>sstate</a:t>
+            </a:r>
+            <a:r>
+              <a:rPr i="1" dirty="0">
+                <a:solidFill>
+                  <a:srgbClr val="808080"/>
+                </a:solidFill>
+                <a:latin typeface="Consolas"/>
+              </a:rPr>
+              <a:t> will skip everything else)</a:t>
+            </a:r>
+          </a:p>
+          <a:p>
+            <a:pPr>
+              <a:spcAft>
+                <a:spcPts val="0"/>
+              </a:spcAft>
+            </a:pPr>
+            <a:r>
+              <a:rPr dirty="0" err="1">
+                <a:solidFill>
+                  <a:srgbClr val="2D2D2D"/>
+                </a:solidFill>
+                <a:latin typeface="Consolas"/>
+              </a:rPr>
+              <a:t>bitbake</a:t>
+            </a:r>
+            <a:r>
+              <a:rPr dirty="0">
+                <a:solidFill>
+                  <a:srgbClr val="2D2D2D"/>
+                </a:solidFill>
+                <a:latin typeface="Consolas"/>
+              </a:rPr>
+              <a:t> core-image-base</a:t>
+            </a:r>
+          </a:p>
+          <a:p>
+            <a:pPr>
+              <a:spcAft>
+                <a:spcPts val="0"/>
+              </a:spcAft>
+            </a:pPr>
+            <a:r>
+              <a:rPr dirty="0">
                 <a:solidFill>
                   <a:srgbClr val="2D2D2D"/>
                 </a:solidFill>
@@ -7028,7 +9318,7 @@
               </a:spcAft>
             </a:pPr>
             <a:r>
-              <a:rPr sz="1100" i="1">
+              <a:rPr i="1" dirty="0">
                 <a:solidFill>
                   <a:srgbClr val="808080"/>
                 </a:solidFill>
@@ -7044,29 +9334,83 @@
               </a:spcAft>
             </a:pPr>
             <a:r>
-              <a:rPr sz="1100">
-                <a:solidFill>
-                  <a:srgbClr val="2D2D2D"/>
-                </a:solidFill>
-                <a:latin typeface="Consolas"/>
-              </a:rPr>
-              <a:t>ls tmp/deploy/images/qemux86-64/ | grep ext4</a:t>
-            </a:r>
-          </a:p>
-          <a:p>
-            <a:pPr>
-              <a:spcAft>
-                <a:spcPts val="0"/>
-              </a:spcAft>
-            </a:pPr>
-            <a:r>
-              <a:rPr sz="1100">
-                <a:solidFill>
-                  <a:srgbClr val="2D2D2D"/>
-                </a:solidFill>
-                <a:latin typeface="Consolas"/>
-              </a:rPr>
-              <a:t>ls tmp/deploy/ipk/all/ | grep hello</a:t>
+              <a:rPr dirty="0">
+                <a:solidFill>
+                  <a:srgbClr val="2D2D2D"/>
+                </a:solidFill>
+                <a:latin typeface="Consolas"/>
+              </a:rPr>
+              <a:t>ls </a:t>
+            </a:r>
+            <a:r>
+              <a:rPr dirty="0" err="1">
+                <a:solidFill>
+                  <a:srgbClr val="2D2D2D"/>
+                </a:solidFill>
+                <a:latin typeface="Consolas"/>
+              </a:rPr>
+              <a:t>tmp</a:t>
+            </a:r>
+            <a:r>
+              <a:rPr dirty="0">
+                <a:solidFill>
+                  <a:srgbClr val="2D2D2D"/>
+                </a:solidFill>
+                <a:latin typeface="Consolas"/>
+              </a:rPr>
+              <a:t>/deploy/images/qemux86-64/ | grep ext4</a:t>
+            </a:r>
+          </a:p>
+          <a:p>
+            <a:pPr>
+              <a:spcAft>
+                <a:spcPts val="0"/>
+              </a:spcAft>
+            </a:pPr>
+            <a:r>
+              <a:rPr dirty="0">
+                <a:solidFill>
+                  <a:srgbClr val="2D2D2D"/>
+                </a:solidFill>
+                <a:latin typeface="Consolas"/>
+              </a:rPr>
+              <a:t>ls </a:t>
+            </a:r>
+            <a:r>
+              <a:rPr dirty="0" err="1">
+                <a:solidFill>
+                  <a:srgbClr val="2D2D2D"/>
+                </a:solidFill>
+                <a:latin typeface="Consolas"/>
+              </a:rPr>
+              <a:t>tmp</a:t>
+            </a:r>
+            <a:r>
+              <a:rPr dirty="0">
+                <a:solidFill>
+                  <a:srgbClr val="2D2D2D"/>
+                </a:solidFill>
+                <a:latin typeface="Consolas"/>
+              </a:rPr>
+              <a:t>/deploy/</a:t>
+            </a:r>
+            <a:r>
+              <a:rPr dirty="0" err="1">
+                <a:solidFill>
+                  <a:srgbClr val="2D2D2D"/>
+                </a:solidFill>
+                <a:latin typeface="Consolas"/>
+              </a:rPr>
+              <a:t>ipk</a:t>
+            </a:r>
+            <a:r>
+              <a:rPr dirty="0">
+                <a:solidFill>
+                  <a:srgbClr val="2D2D2D"/>
+                </a:solidFill>
+                <a:latin typeface="Consolas"/>
+              </a:rPr>
+              <a:t>/all/ | grep hello</a:t>
             </a:r>
           </a:p>
         </p:txBody>
@@ -7108,18 +9452,36 @@
           </a:fontRef>
         </p:style>
         <p:txBody>
-          <a:bodyPr rtlCol="0" anchor="ctr" lIns="228600" rIns="228600" wrap="square"/>
+          <a:bodyPr wrap="square" lIns="228600" rIns="228600" rtlCol="0" anchor="ctr"/>
           <a:lstStyle/>
           <a:p>
             <a:pPr algn="l"/>
             <a:r>
-              <a:rPr sz="1300" b="1">
+              <a:rPr sz="1600" b="1" dirty="0">
                 <a:solidFill>
                   <a:srgbClr val="663399"/>
                 </a:solidFill>
                 <a:latin typeface="Calibri"/>
               </a:rPr>
-              <a:t>First-time addition of a recipe will be fast — most of core-image-base is cached in sstate.</a:t>
+              <a:t>First-time addition of a recipe will be fast — most of core-image-base is cached in </a:t>
+            </a:r>
+            <a:r>
+              <a:rPr sz="1600" b="1" dirty="0" err="1">
+                <a:solidFill>
+                  <a:srgbClr val="663399"/>
+                </a:solidFill>
+                <a:latin typeface="Calibri"/>
+              </a:rPr>
+              <a:t>sstate</a:t>
+            </a:r>
+            <a:r>
+              <a:rPr sz="1600" b="1" dirty="0">
+                <a:solidFill>
+                  <a:srgbClr val="663399"/>
+                </a:solidFill>
+                <a:latin typeface="Calibri"/>
+              </a:rPr>
+              <a:t>.</a:t>
             </a:r>
           </a:p>
         </p:txBody>
@@ -7132,8 +9494,8 @@
 </p:sld>
 </file>
 
-<file path=ppt/slides/slide14.xml><?xml version="1.0" encoding="utf-8"?>
-<p:sld xmlns:a="http://schemas.openxmlformats.org/drawingml/2006/main" xmlns:p="http://schemas.openxmlformats.org/presentationml/2006/main" xmlns:r="http://schemas.openxmlformats.org/officeDocument/2006/relationships">
+<file path=ppt/slides/slide8.xml><?xml version="1.0" encoding="utf-8"?>
+<p:sld xmlns:a="http://schemas.openxmlformats.org/drawingml/2006/main" xmlns:r="http://schemas.openxmlformats.org/officeDocument/2006/relationships" xmlns:p="http://schemas.openxmlformats.org/presentationml/2006/main">
   <p:cSld>
     <p:spTree>
       <p:nvGrpSpPr>
@@ -7141,7 +9503,14 @@
         <p:cNvGrpSpPr/>
         <p:nvPr/>
       </p:nvGrpSpPr>
-      <p:grpSpPr/>
+      <p:grpSpPr>
+        <a:xfrm>
+          <a:off x="0" y="0"/>
+          <a:ext cx="0" cy="0"/>
+          <a:chOff x="0" y="0"/>
+          <a:chExt cx="0" cy="0"/>
+        </a:xfrm>
+      </p:grpSpPr>
       <p:sp>
         <p:nvSpPr>
           <p:cNvPr id="2" name="Title 1"/>
@@ -7158,13 +9527,22 @@
           <a:lstStyle/>
           <a:p>
             <a:r>
-              <a:rPr sz="3200" b="1">
-                <a:solidFill>
-                  <a:srgbClr val="CC0066"/>
-                </a:solidFill>
+              <a:rPr sz="3200" b="1" dirty="0">
                 <a:latin typeface="Calibri"/>
               </a:rPr>
-              <a:t>Step 6 — Boot and Verify</a:t>
+              <a:t>Step 6</a:t>
+            </a:r>
+            <a:r>
+              <a:rPr lang="en-IN" sz="3200" b="1" dirty="0">
+                <a:latin typeface="Calibri"/>
+              </a:rPr>
+              <a:t>: </a:t>
+            </a:r>
+            <a:r>
+              <a:rPr sz="3200" b="1" dirty="0">
+                <a:latin typeface="Calibri"/>
+              </a:rPr>
+              <a:t>Boot and Verify</a:t>
             </a:r>
           </a:p>
         </p:txBody>
@@ -7178,7 +9556,7 @@
         <p:spPr>
           <a:xfrm>
             <a:off x="822960" y="1417320"/>
-            <a:ext cx="10515600" cy="365760"/>
+            <a:ext cx="10515600" cy="338554"/>
           </a:xfrm>
           <a:prstGeom prst="rect">
             <a:avLst/>
@@ -7186,20 +9564,38 @@
           <a:noFill/>
         </p:spPr>
         <p:txBody>
-          <a:bodyPr wrap="square" anchor="t" lIns="45720" rIns="45720">
+          <a:bodyPr wrap="square" lIns="45720" rIns="45720" anchor="t">
             <a:spAutoFit/>
           </a:bodyPr>
           <a:lstStyle/>
           <a:p>
             <a:pPr algn="l"/>
             <a:r>
-              <a:rPr sz="1500" b="0" i="1">
+              <a:rPr sz="1600" b="0" i="1" dirty="0">
                 <a:solidFill>
                   <a:srgbClr val="666666"/>
                 </a:solidFill>
                 <a:latin typeface="Calibri"/>
               </a:rPr>
-              <a:t>Boot the new image in QEMU, confirm hello-trainergw runs.</a:t>
+              <a:t>Boot the new image in QEMU, confirm hello-</a:t>
+            </a:r>
+            <a:r>
+              <a:rPr sz="1600" b="0" i="1" dirty="0" err="1">
+                <a:solidFill>
+                  <a:srgbClr val="666666"/>
+                </a:solidFill>
+                <a:latin typeface="Calibri"/>
+              </a:rPr>
+              <a:t>trainergw</a:t>
+            </a:r>
+            <a:r>
+              <a:rPr sz="1600" b="0" i="1" dirty="0">
+                <a:solidFill>
+                  <a:srgbClr val="666666"/>
+                </a:solidFill>
+                <a:latin typeface="Calibri"/>
+              </a:rPr>
+              <a:t> runs.</a:t>
             </a:r>
           </a:p>
         </p:txBody>
@@ -7247,6 +9643,7 @@
           <a:lstStyle/>
           <a:p>
             <a:pPr algn="ctr"/>
+            <a:endParaRPr/>
           </a:p>
         </p:txBody>
       </p:sp>
@@ -7291,6 +9688,7 @@
           <a:lstStyle/>
           <a:p>
             <a:pPr algn="ctr"/>
+            <a:endParaRPr/>
           </a:p>
         </p:txBody>
       </p:sp>
@@ -7303,7 +9701,7 @@
         <p:spPr>
           <a:xfrm>
             <a:off x="1005840" y="1874519"/>
-            <a:ext cx="10241280" cy="3749039"/>
+            <a:ext cx="10241280" cy="3662541"/>
           </a:xfrm>
           <a:prstGeom prst="rect">
             <a:avLst/>
@@ -7322,7 +9720,7 @@
               </a:spcAft>
             </a:pPr>
             <a:r>
-              <a:rPr sz="1200" i="1">
+              <a:rPr sz="1600" i="1" dirty="0">
                 <a:solidFill>
                   <a:srgbClr val="808080"/>
                 </a:solidFill>
@@ -7338,23 +9736,142 @@
               </a:spcAft>
             </a:pPr>
             <a:r>
-              <a:rPr sz="1200">
-                <a:solidFill>
-                  <a:srgbClr val="2D2D2D"/>
-                </a:solidFill>
-                <a:latin typeface="Consolas"/>
-              </a:rPr>
-              <a:t>runqemu qemux86-64 nographic</a:t>
-            </a:r>
-          </a:p>
-          <a:p>
-            <a:pPr>
-              <a:spcAft>
-                <a:spcPts val="0"/>
-              </a:spcAft>
-            </a:pPr>
-            <a:r>
-              <a:rPr sz="1200">
+              <a:rPr sz="1600" dirty="0" err="1">
+                <a:solidFill>
+                  <a:srgbClr val="2D2D2D"/>
+                </a:solidFill>
+                <a:latin typeface="Consolas"/>
+              </a:rPr>
+              <a:t>runqemu</a:t>
+            </a:r>
+            <a:r>
+              <a:rPr sz="1600" dirty="0">
+                <a:solidFill>
+                  <a:srgbClr val="2D2D2D"/>
+                </a:solidFill>
+                <a:latin typeface="Consolas"/>
+              </a:rPr>
+              <a:t> qemux86-64 </a:t>
+            </a:r>
+            <a:r>
+              <a:rPr sz="1600" dirty="0" err="1">
+                <a:solidFill>
+                  <a:srgbClr val="2D2D2D"/>
+                </a:solidFill>
+                <a:latin typeface="Consolas"/>
+              </a:rPr>
+              <a:t>nographic</a:t>
+            </a:r>
+            <a:endParaRPr lang="en-IN" sz="1600" dirty="0">
+              <a:solidFill>
+                <a:srgbClr val="2D2D2D"/>
+              </a:solidFill>
+              <a:latin typeface="Consolas"/>
+            </a:endParaRPr>
+          </a:p>
+          <a:p>
+            <a:pPr>
+              <a:spcAft>
+                <a:spcPts val="0"/>
+              </a:spcAft>
+            </a:pPr>
+            <a:endParaRPr sz="1600" dirty="0">
+              <a:solidFill>
+                <a:srgbClr val="2D2D2D"/>
+              </a:solidFill>
+              <a:latin typeface="Consolas"/>
+            </a:endParaRPr>
+          </a:p>
+          <a:p>
+            <a:pPr>
+              <a:spcAft>
+                <a:spcPts val="0"/>
+              </a:spcAft>
+            </a:pPr>
+            <a:r>
+              <a:rPr sz="1600" i="1" dirty="0">
+                <a:solidFill>
+                  <a:srgbClr val="808080"/>
+                </a:solidFill>
+                <a:latin typeface="Consolas"/>
+              </a:rPr>
+              <a:t># At the login prompt:</a:t>
+            </a:r>
+          </a:p>
+          <a:p>
+            <a:pPr>
+              <a:spcAft>
+                <a:spcPts val="0"/>
+              </a:spcAft>
+            </a:pPr>
+            <a:r>
+              <a:rPr sz="1600" i="1" dirty="0">
+                <a:solidFill>
+                  <a:srgbClr val="808080"/>
+                </a:solidFill>
+                <a:latin typeface="Consolas"/>
+              </a:rPr>
+              <a:t>#   Poky (</a:t>
+            </a:r>
+            <a:r>
+              <a:rPr sz="1600" i="1" dirty="0" err="1">
+                <a:solidFill>
+                  <a:srgbClr val="808080"/>
+                </a:solidFill>
+                <a:latin typeface="Consolas"/>
+              </a:rPr>
+              <a:t>Yocto</a:t>
+            </a:r>
+            <a:r>
+              <a:rPr sz="1600" i="1" dirty="0">
+                <a:solidFill>
+                  <a:srgbClr val="808080"/>
+                </a:solidFill>
+                <a:latin typeface="Consolas"/>
+              </a:rPr>
+              <a:t> Project Reference Distro) ...</a:t>
+            </a:r>
+          </a:p>
+          <a:p>
+            <a:pPr>
+              <a:spcAft>
+                <a:spcPts val="0"/>
+              </a:spcAft>
+            </a:pPr>
+            <a:r>
+              <a:rPr sz="1600" i="1" dirty="0">
+                <a:solidFill>
+                  <a:srgbClr val="808080"/>
+                </a:solidFill>
+                <a:latin typeface="Consolas"/>
+              </a:rPr>
+              <a:t>#   qemux86-64 login: root</a:t>
+            </a:r>
+          </a:p>
+          <a:p>
+            <a:pPr>
+              <a:spcAft>
+                <a:spcPts val="0"/>
+              </a:spcAft>
+            </a:pPr>
+            <a:r>
+              <a:rPr sz="1600" i="1" dirty="0">
+                <a:solidFill>
+                  <a:srgbClr val="808080"/>
+                </a:solidFill>
+                <a:latin typeface="Consolas"/>
+              </a:rPr>
+              <a:t>#   (no password)</a:t>
+            </a:r>
+          </a:p>
+          <a:p>
+            <a:pPr>
+              <a:spcAft>
+                <a:spcPts val="0"/>
+              </a:spcAft>
+            </a:pPr>
+            <a:r>
+              <a:rPr sz="1600" dirty="0">
                 <a:solidFill>
                   <a:srgbClr val="2D2D2D"/>
                 </a:solidFill>
@@ -7370,222 +9887,148 @@
               </a:spcAft>
             </a:pPr>
             <a:r>
-              <a:rPr sz="1200" i="1">
+              <a:rPr sz="1600" i="1" dirty="0">
                 <a:solidFill>
                   <a:srgbClr val="808080"/>
                 </a:solidFill>
                 <a:latin typeface="Consolas"/>
               </a:rPr>
-              <a:t># At the login prompt:</a:t>
-            </a:r>
-          </a:p>
-          <a:p>
-            <a:pPr>
-              <a:spcAft>
-                <a:spcPts val="0"/>
-              </a:spcAft>
-            </a:pPr>
-            <a:r>
-              <a:rPr sz="1200" i="1">
+              <a:t># Once logged in:</a:t>
+            </a:r>
+          </a:p>
+          <a:p>
+            <a:pPr>
+              <a:spcAft>
+                <a:spcPts val="0"/>
+              </a:spcAft>
+            </a:pPr>
+            <a:r>
+              <a:rPr sz="1600" dirty="0">
+                <a:solidFill>
+                  <a:srgbClr val="2D2D2D"/>
+                </a:solidFill>
+                <a:latin typeface="Consolas"/>
+              </a:rPr>
+              <a:t>which hello-</a:t>
+            </a:r>
+            <a:r>
+              <a:rPr sz="1600" dirty="0" err="1">
+                <a:solidFill>
+                  <a:srgbClr val="2D2D2D"/>
+                </a:solidFill>
+                <a:latin typeface="Consolas"/>
+              </a:rPr>
+              <a:t>trainergw</a:t>
+            </a:r>
+            <a:endParaRPr sz="1600" dirty="0">
+              <a:solidFill>
+                <a:srgbClr val="2D2D2D"/>
+              </a:solidFill>
+              <a:latin typeface="Consolas"/>
+            </a:endParaRPr>
+          </a:p>
+          <a:p>
+            <a:pPr>
+              <a:spcAft>
+                <a:spcPts val="0"/>
+              </a:spcAft>
+            </a:pPr>
+            <a:r>
+              <a:rPr sz="1600" dirty="0">
+                <a:solidFill>
+                  <a:srgbClr val="2D2D2D"/>
+                </a:solidFill>
+                <a:latin typeface="Consolas"/>
+              </a:rPr>
+              <a:t>hello-</a:t>
+            </a:r>
+            <a:r>
+              <a:rPr sz="1600" dirty="0" err="1">
+                <a:solidFill>
+                  <a:srgbClr val="2D2D2D"/>
+                </a:solidFill>
+                <a:latin typeface="Consolas"/>
+              </a:rPr>
+              <a:t>trainergw</a:t>
+            </a:r>
+            <a:endParaRPr sz="1600" dirty="0">
+              <a:solidFill>
+                <a:srgbClr val="2D2D2D"/>
+              </a:solidFill>
+              <a:latin typeface="Consolas"/>
+            </a:endParaRPr>
+          </a:p>
+          <a:p>
+            <a:pPr>
+              <a:spcAft>
+                <a:spcPts val="0"/>
+              </a:spcAft>
+            </a:pPr>
+            <a:r>
+              <a:rPr sz="1600" dirty="0">
+                <a:solidFill>
+                  <a:srgbClr val="2D2D2D"/>
+                </a:solidFill>
+                <a:latin typeface="Consolas"/>
+              </a:rPr>
+              <a:t> </a:t>
+            </a:r>
+          </a:p>
+          <a:p>
+            <a:pPr>
+              <a:spcAft>
+                <a:spcPts val="0"/>
+              </a:spcAft>
+            </a:pPr>
+            <a:r>
+              <a:rPr sz="1600" i="1" dirty="0">
                 <a:solidFill>
                   <a:srgbClr val="808080"/>
                 </a:solidFill>
                 <a:latin typeface="Consolas"/>
               </a:rPr>
-              <a:t>#   Poky (Yocto Project Reference Distro) ...</a:t>
-            </a:r>
-          </a:p>
-          <a:p>
-            <a:pPr>
-              <a:spcAft>
-                <a:spcPts val="0"/>
-              </a:spcAft>
-            </a:pPr>
-            <a:r>
-              <a:rPr sz="1200" i="1">
+              <a:t># You should see:</a:t>
+            </a:r>
+          </a:p>
+          <a:p>
+            <a:pPr>
+              <a:spcAft>
+                <a:spcPts val="0"/>
+              </a:spcAft>
+            </a:pPr>
+            <a:r>
+              <a:rPr sz="1600" i="1" dirty="0">
                 <a:solidFill>
                   <a:srgbClr val="808080"/>
                 </a:solidFill>
                 <a:latin typeface="Consolas"/>
               </a:rPr>
-              <a:t>#   qemux86-64 login: root</a:t>
-            </a:r>
-          </a:p>
-          <a:p>
-            <a:pPr>
-              <a:spcAft>
-                <a:spcPts val="0"/>
-              </a:spcAft>
-            </a:pPr>
-            <a:r>
-              <a:rPr sz="1200" i="1">
+              <a:t>#   Hello from </a:t>
+            </a:r>
+            <a:r>
+              <a:rPr sz="1600" i="1" dirty="0" err="1">
                 <a:solidFill>
                   <a:srgbClr val="808080"/>
                 </a:solidFill>
                 <a:latin typeface="Consolas"/>
               </a:rPr>
-              <a:t>#   (no password)</a:t>
-            </a:r>
-          </a:p>
-          <a:p>
-            <a:pPr>
-              <a:spcAft>
-                <a:spcPts val="0"/>
-              </a:spcAft>
-            </a:pPr>
-            <a:r>
-              <a:rPr sz="1200">
-                <a:solidFill>
-                  <a:srgbClr val="2D2D2D"/>
-                </a:solidFill>
-                <a:latin typeface="Consolas"/>
-              </a:rPr>
-              <a:t> </a:t>
-            </a:r>
-          </a:p>
-          <a:p>
-            <a:pPr>
-              <a:spcAft>
-                <a:spcPts val="0"/>
-              </a:spcAft>
-            </a:pPr>
-            <a:r>
-              <a:rPr sz="1200" i="1">
+              <a:t>TrainerGW</a:t>
+            </a:r>
+            <a:r>
+              <a:rPr sz="1600" i="1" dirty="0">
                 <a:solidFill>
                   <a:srgbClr val="808080"/>
                 </a:solidFill>
                 <a:latin typeface="Consolas"/>
               </a:rPr>
-              <a:t># Once logged in:</a:t>
-            </a:r>
-          </a:p>
-          <a:p>
-            <a:pPr>
-              <a:spcAft>
-                <a:spcPts val="0"/>
-              </a:spcAft>
-            </a:pPr>
-            <a:r>
-              <a:rPr sz="1200">
-                <a:solidFill>
-                  <a:srgbClr val="2D2D2D"/>
-                </a:solidFill>
-                <a:latin typeface="Consolas"/>
-              </a:rPr>
-              <a:t>which hello-trainergw</a:t>
-            </a:r>
-          </a:p>
-          <a:p>
-            <a:pPr>
-              <a:spcAft>
-                <a:spcPts val="0"/>
-              </a:spcAft>
-            </a:pPr>
-            <a:r>
-              <a:rPr sz="1200">
-                <a:solidFill>
-                  <a:srgbClr val="2D2D2D"/>
-                </a:solidFill>
-                <a:latin typeface="Consolas"/>
-              </a:rPr>
-              <a:t>hello-trainergw</a:t>
-            </a:r>
-          </a:p>
-          <a:p>
-            <a:pPr>
-              <a:spcAft>
-                <a:spcPts val="0"/>
-              </a:spcAft>
-            </a:pPr>
-            <a:r>
-              <a:rPr sz="1200">
-                <a:solidFill>
-                  <a:srgbClr val="2D2D2D"/>
-                </a:solidFill>
-                <a:latin typeface="Consolas"/>
-              </a:rPr>
-              <a:t> </a:t>
-            </a:r>
-          </a:p>
-          <a:p>
-            <a:pPr>
-              <a:spcAft>
-                <a:spcPts val="0"/>
-              </a:spcAft>
-            </a:pPr>
-            <a:r>
-              <a:rPr sz="1200" i="1">
-                <a:solidFill>
-                  <a:srgbClr val="808080"/>
-                </a:solidFill>
-                <a:latin typeface="Consolas"/>
-              </a:rPr>
-              <a:t># You should see:</a:t>
-            </a:r>
-          </a:p>
-          <a:p>
-            <a:pPr>
-              <a:spcAft>
-                <a:spcPts val="0"/>
-              </a:spcAft>
-            </a:pPr>
-            <a:r>
-              <a:rPr sz="1200" i="1">
-                <a:solidFill>
-                  <a:srgbClr val="808080"/>
-                </a:solidFill>
-                <a:latin typeface="Consolas"/>
-              </a:rPr>
-              <a:t>#   Hello from TrainerGW!</a:t>
-            </a:r>
-          </a:p>
-          <a:p>
-            <a:pPr>
-              <a:spcAft>
-                <a:spcPts val="0"/>
-              </a:spcAft>
-            </a:pPr>
-            <a:r>
-              <a:rPr sz="1200">
-                <a:solidFill>
-                  <a:srgbClr val="2D2D2D"/>
-                </a:solidFill>
-                <a:latin typeface="Consolas"/>
-              </a:rPr>
-              <a:t> </a:t>
-            </a:r>
-          </a:p>
-          <a:p>
-            <a:pPr>
-              <a:spcAft>
-                <a:spcPts val="0"/>
-              </a:spcAft>
-            </a:pPr>
-            <a:r>
-              <a:rPr sz="1200" i="1">
-                <a:solidFill>
-                  <a:srgbClr val="808080"/>
-                </a:solidFill>
-                <a:latin typeface="Consolas"/>
-              </a:rPr>
-              <a:t># Cleanly shut down</a:t>
-            </a:r>
-          </a:p>
-          <a:p>
-            <a:pPr>
-              <a:spcAft>
-                <a:spcPts val="0"/>
-              </a:spcAft>
-            </a:pPr>
-            <a:r>
-              <a:rPr sz="1200">
-                <a:solidFill>
-                  <a:srgbClr val="2D2D2D"/>
-                </a:solidFill>
-                <a:latin typeface="Consolas"/>
-              </a:rPr>
-              <a:t>poweroff</a:t>
-            </a:r>
+              <a:t>!</a:t>
+            </a:r>
+            <a:endParaRPr sz="1600" dirty="0">
+              <a:solidFill>
+                <a:srgbClr val="2D2D2D"/>
+              </a:solidFill>
+              <a:latin typeface="Consolas"/>
+            </a:endParaRPr>
           </a:p>
         </p:txBody>
       </p:sp>
@@ -7626,18 +10069,36 @@
           </a:fontRef>
         </p:style>
         <p:txBody>
-          <a:bodyPr rtlCol="0" anchor="ctr" lIns="228600" rIns="228600" wrap="square"/>
+          <a:bodyPr wrap="square" lIns="228600" rIns="228600" rtlCol="0" anchor="ctr"/>
           <a:lstStyle/>
           <a:p>
             <a:pPr algn="l"/>
             <a:r>
-              <a:rPr sz="1400" b="1">
+              <a:rPr sz="1600" b="1" dirty="0">
                 <a:solidFill>
                   <a:srgbClr val="663399"/>
                 </a:solidFill>
                 <a:latin typeface="Calibri"/>
               </a:rPr>
-              <a:t>Congratulations — you have built a Yocto image with your own custom package.</a:t>
+              <a:t>Congratulations — you have built a </a:t>
+            </a:r>
+            <a:r>
+              <a:rPr sz="1600" b="1" dirty="0" err="1">
+                <a:solidFill>
+                  <a:srgbClr val="663399"/>
+                </a:solidFill>
+                <a:latin typeface="Calibri"/>
+              </a:rPr>
+              <a:t>Yocto</a:t>
+            </a:r>
+            <a:r>
+              <a:rPr sz="1600" b="1" dirty="0">
+                <a:solidFill>
+                  <a:srgbClr val="663399"/>
+                </a:solidFill>
+                <a:latin typeface="Calibri"/>
+              </a:rPr>
+              <a:t> image with your own custom package.</a:t>
             </a:r>
           </a:p>
         </p:txBody>
@@ -7650,8 +10111,8 @@
 </p:sld>
 </file>
 
-<file path=ppt/slides/slide15.xml><?xml version="1.0" encoding="utf-8"?>
-<p:sld xmlns:a="http://schemas.openxmlformats.org/drawingml/2006/main" xmlns:p="http://schemas.openxmlformats.org/presentationml/2006/main" xmlns:r="http://schemas.openxmlformats.org/officeDocument/2006/relationships">
+<file path=ppt/slides/slide9.xml><?xml version="1.0" encoding="utf-8"?>
+<p:sld xmlns:a="http://schemas.openxmlformats.org/drawingml/2006/main" xmlns:r="http://schemas.openxmlformats.org/officeDocument/2006/relationships" xmlns:p="http://schemas.openxmlformats.org/presentationml/2006/main">
   <p:cSld>
     <p:spTree>
       <p:nvGrpSpPr>
@@ -7659,7 +10120,14 @@
         <p:cNvGrpSpPr/>
         <p:nvPr/>
       </p:nvGrpSpPr>
-      <p:grpSpPr/>
+      <p:grpSpPr>
+        <a:xfrm>
+          <a:off x="0" y="0"/>
+          <a:ext cx="0" cy="0"/>
+          <a:chOff x="0" y="0"/>
+          <a:chExt cx="0" cy="0"/>
+        </a:xfrm>
+      </p:grpSpPr>
       <p:sp>
         <p:nvSpPr>
           <p:cNvPr id="2" name="Title 1"/>
@@ -7676,10 +10144,7 @@
           <a:lstStyle/>
           <a:p>
             <a:r>
-              <a:rPr sz="3200" b="1">
-                <a:solidFill>
-                  <a:srgbClr val="CC0066"/>
-                </a:solidFill>
+              <a:rPr sz="3200" b="1" dirty="0">
                 <a:latin typeface="Calibri"/>
               </a:rPr>
               <a:t>Common Errors and Quick Fixes</a:t>
@@ -7704,7 +10169,7 @@
           <a:noFill/>
         </p:spPr>
         <p:txBody>
-          <a:bodyPr wrap="square" anchor="t" lIns="45720" rIns="45720">
+          <a:bodyPr wrap="square" lIns="45720" rIns="45720" anchor="t">
             <a:spAutoFit/>
           </a:bodyPr>
           <a:lstStyle/>
@@ -7759,12 +10224,12 @@
           </a:fontRef>
         </p:style>
         <p:txBody>
-          <a:bodyPr rtlCol="0" anchor="ctr" lIns="182880"/>
+          <a:bodyPr lIns="182880" rtlCol="0" anchor="ctr"/>
           <a:lstStyle/>
           <a:p>
             <a:pPr algn="ctr"/>
             <a:r>
-              <a:rPr sz="2000" b="1">
+              <a:rPr sz="2000" b="1" dirty="0">
                 <a:solidFill>
                   <a:srgbClr val="FFFFFF"/>
                 </a:solidFill>
@@ -7775,13 +10240,22 @@
           </a:p>
           <a:p>
             <a:r>
-              <a:rPr sz="1200" i="1">
+              <a:rPr sz="1600" i="1" dirty="0" err="1">
                 <a:solidFill>
                   <a:srgbClr val="FFFFFF"/>
                 </a:solidFill>
                 <a:latin typeface="Calibri"/>
               </a:rPr>
-              <a:t>BitBake won't even start</a:t>
+              <a:t>BitBake</a:t>
+            </a:r>
+            <a:r>
+              <a:rPr sz="1600" i="1" dirty="0">
+                <a:solidFill>
+                  <a:srgbClr val="FFFFFF"/>
+                </a:solidFill>
+                <a:latin typeface="Calibri"/>
+              </a:rPr>
+              <a:t> won't even start</a:t>
             </a:r>
           </a:p>
         </p:txBody>
@@ -7829,6 +10303,7 @@
           <a:lstStyle/>
           <a:p>
             <a:pPr algn="ctr"/>
+            <a:endParaRPr/>
           </a:p>
         </p:txBody>
       </p:sp>
@@ -7841,7 +10316,7 @@
         <p:spPr>
           <a:xfrm>
             <a:off x="731519" y="2514600"/>
-            <a:ext cx="3337560" cy="3657600"/>
+            <a:ext cx="3337560" cy="3077766"/>
           </a:xfrm>
           <a:prstGeom prst="rect">
             <a:avLst/>
@@ -7860,7 +10335,7 @@
               </a:spcAft>
             </a:pPr>
             <a:r>
-              <a:rPr sz="1200" b="1" i="0">
+              <a:rPr b="1" i="0" dirty="0">
                 <a:solidFill>
                   <a:srgbClr val="CC0066"/>
                 </a:solidFill>
@@ -7876,14 +10351,29 @@
               </a:spcAft>
             </a:pPr>
             <a:r>
-              <a:rPr sz="1100" b="0" i="0">
+              <a:rPr sz="1600" b="0" i="0" dirty="0">
                 <a:solidFill>
                   <a:srgbClr val="333333"/>
                 </a:solidFill>
                 <a:latin typeface="Calibri"/>
               </a:rPr>
-              <a:t>ERROR: ParseError</a:t>
-            </a:r>
+              <a:t>ERROR: </a:t>
+            </a:r>
+            <a:r>
+              <a:rPr sz="1600" b="0" i="0" dirty="0" err="1">
+                <a:solidFill>
+                  <a:srgbClr val="333333"/>
+                </a:solidFill>
+                <a:latin typeface="Calibri"/>
+              </a:rPr>
+              <a:t>ParseError</a:t>
+            </a:r>
+            <a:endParaRPr sz="1600" b="0" i="0" dirty="0">
+              <a:solidFill>
+                <a:srgbClr val="333333"/>
+              </a:solidFill>
+              <a:latin typeface="Calibri"/>
+            </a:endParaRPr>
           </a:p>
           <a:p>
             <a:pPr>
@@ -7892,7 +10382,7 @@
               </a:spcAft>
             </a:pPr>
             <a:r>
-              <a:rPr sz="1100" b="0" i="0">
+              <a:rPr sz="1600" b="0" i="0" dirty="0">
                 <a:solidFill>
                   <a:srgbClr val="333333"/>
                 </a:solidFill>
@@ -7907,14 +10397,27 @@
                 <a:spcPts val="400"/>
               </a:spcAft>
             </a:pPr>
-            <a:r>
-              <a:rPr sz="1100" b="0" i="0">
+            <a:endParaRPr sz="1600" b="0" i="0" dirty="0">
+              <a:solidFill>
+                <a:srgbClr val="333333"/>
+              </a:solidFill>
+              <a:latin typeface="Calibri"/>
+            </a:endParaRPr>
+          </a:p>
+          <a:p>
+            <a:pPr>
+              <a:spcAft>
+                <a:spcPts val="400"/>
+              </a:spcAft>
+            </a:pPr>
+            <a:r>
+              <a:rPr sz="1600" b="0" i="0" dirty="0">
                 <a:solidFill>
                   <a:srgbClr val="333333"/>
                 </a:solidFill>
                 <a:latin typeface="Calibri"/>
               </a:rPr>
-              <a:t/>
+              <a:t>Cause: typo, wrong path, missing colon</a:t>
             </a:r>
           </a:p>
           <a:p>
@@ -7923,14 +10426,52 @@
                 <a:spcPts val="400"/>
               </a:spcAft>
             </a:pPr>
-            <a:r>
-              <a:rPr sz="1100" b="0" i="0">
+            <a:endParaRPr sz="1600" b="0" i="0" dirty="0">
+              <a:solidFill>
+                <a:srgbClr val="333333"/>
+              </a:solidFill>
+              <a:latin typeface="Calibri"/>
+            </a:endParaRPr>
+          </a:p>
+          <a:p>
+            <a:pPr>
+              <a:spcAft>
+                <a:spcPts val="400"/>
+              </a:spcAft>
+            </a:pPr>
+            <a:r>
+              <a:rPr b="1" i="0" dirty="0">
+                <a:solidFill>
+                  <a:srgbClr val="CC0066"/>
+                </a:solidFill>
+                <a:latin typeface="Calibri"/>
+              </a:rPr>
+              <a:t>Fix:</a:t>
+            </a:r>
+          </a:p>
+          <a:p>
+            <a:pPr>
+              <a:spcAft>
+                <a:spcPts val="400"/>
+              </a:spcAft>
+            </a:pPr>
+            <a:r>
+              <a:rPr sz="1600" b="0" i="0" dirty="0" err="1">
                 <a:solidFill>
                   <a:srgbClr val="333333"/>
                 </a:solidFill>
                 <a:latin typeface="Calibri"/>
               </a:rPr>
-              <a:t>Cause: typo, wrong path, missing colon</a:t>
+              <a:t>bitbake</a:t>
+            </a:r>
+            <a:r>
+              <a:rPr sz="1600" b="0" i="0" dirty="0">
+                <a:solidFill>
+                  <a:srgbClr val="333333"/>
+                </a:solidFill>
+                <a:latin typeface="Calibri"/>
+              </a:rPr>
+              <a:t>-layers show-layers</a:t>
             </a:r>
           </a:p>
           <a:p>
@@ -7940,13 +10481,13 @@
               </a:spcAft>
             </a:pPr>
             <a:r>
-              <a:rPr sz="1100" b="0" i="0">
+              <a:rPr sz="1600" b="0" i="0" dirty="0">
                 <a:solidFill>
                   <a:srgbClr val="333333"/>
                 </a:solidFill>
                 <a:latin typeface="Calibri"/>
               </a:rPr>
-              <a:t/>
+              <a:t>Check filename matches PN_PV.bb</a:t>
             </a:r>
           </a:p>
           <a:p>
@@ -7956,61 +10497,31 @@
               </a:spcAft>
             </a:pPr>
             <a:r>
-              <a:rPr sz="1200" b="1" i="0">
-                <a:solidFill>
-                  <a:srgbClr val="CC0066"/>
+              <a:rPr sz="1600" b="0" i="0" dirty="0">
+                <a:solidFill>
+                  <a:srgbClr val="333333"/>
                 </a:solidFill>
                 <a:latin typeface="Calibri"/>
               </a:rPr>
-              <a:t>Fix:</a:t>
-            </a:r>
-          </a:p>
-          <a:p>
-            <a:pPr>
-              <a:spcAft>
-                <a:spcPts val="400"/>
-              </a:spcAft>
-            </a:pPr>
-            <a:r>
-              <a:rPr sz="1100" b="0" i="0">
+              <a:t>Run: </a:t>
+            </a:r>
+            <a:r>
+              <a:rPr sz="1600" b="0" i="0" dirty="0" err="1">
                 <a:solidFill>
                   <a:srgbClr val="333333"/>
                 </a:solidFill>
                 <a:latin typeface="Calibri"/>
               </a:rPr>
-              <a:t>bitbake-layers show-layers</a:t>
-            </a:r>
-          </a:p>
-          <a:p>
-            <a:pPr>
-              <a:spcAft>
-                <a:spcPts val="400"/>
-              </a:spcAft>
-            </a:pPr>
-            <a:r>
-              <a:rPr sz="1100" b="0" i="0">
+              <a:t>bitbake</a:t>
+            </a:r>
+            <a:r>
+              <a:rPr sz="1600" b="0" i="0" dirty="0">
                 <a:solidFill>
                   <a:srgbClr val="333333"/>
                 </a:solidFill>
                 <a:latin typeface="Calibri"/>
               </a:rPr>
-              <a:t>Check filename matches PN_PV.bb</a:t>
-            </a:r>
-          </a:p>
-          <a:p>
-            <a:pPr>
-              <a:spcAft>
-                <a:spcPts val="400"/>
-              </a:spcAft>
-            </a:pPr>
-            <a:r>
-              <a:rPr sz="1100" b="0" i="0">
-                <a:solidFill>
-                  <a:srgbClr val="333333"/>
-                </a:solidFill>
-                <a:latin typeface="Calibri"/>
-              </a:rPr>
-              <a:t>Run: bitbake -p (parse only)</a:t>
+              <a:t> -p (parse only)</a:t>
             </a:r>
           </a:p>
         </p:txBody>
@@ -8052,12 +10563,12 @@
           </a:fontRef>
         </p:style>
         <p:txBody>
-          <a:bodyPr rtlCol="0" anchor="ctr" lIns="182880"/>
+          <a:bodyPr lIns="182880" rtlCol="0" anchor="ctr"/>
           <a:lstStyle/>
           <a:p>
             <a:pPr algn="ctr"/>
             <a:r>
-              <a:rPr sz="2000" b="1">
+              <a:rPr sz="2000" b="1" dirty="0">
                 <a:solidFill>
                   <a:srgbClr val="FFFFFF"/>
                 </a:solidFill>
@@ -8068,7 +10579,7 @@
           </a:p>
           <a:p>
             <a:r>
-              <a:rPr sz="1200" i="1">
+              <a:rPr sz="1600" i="1" dirty="0">
                 <a:solidFill>
                   <a:srgbClr val="FFFFFF"/>
                 </a:solidFill>
@@ -8122,6 +10633,7 @@
           <a:lstStyle/>
           <a:p>
             <a:pPr algn="ctr"/>
+            <a:endParaRPr/>
           </a:p>
         </p:txBody>
       </p:sp>
@@ -8134,7 +10646,7 @@
         <p:spPr>
           <a:xfrm>
             <a:off x="4389120" y="2514600"/>
-            <a:ext cx="3337560" cy="3657600"/>
+            <a:ext cx="3337560" cy="3323987"/>
           </a:xfrm>
           <a:prstGeom prst="rect">
             <a:avLst/>
@@ -8153,7 +10665,7 @@
               </a:spcAft>
             </a:pPr>
             <a:r>
-              <a:rPr sz="1200" b="1" i="0">
+              <a:rPr b="1" i="0" dirty="0">
                 <a:solidFill>
                   <a:srgbClr val="663399"/>
                 </a:solidFill>
@@ -8169,7 +10681,7 @@
               </a:spcAft>
             </a:pPr>
             <a:r>
-              <a:rPr sz="1100" b="0" i="0">
+              <a:rPr sz="1600" b="0" i="0" dirty="0">
                 <a:solidFill>
                   <a:srgbClr val="333333"/>
                 </a:solidFill>
@@ -8184,14 +10696,27 @@
                 <a:spcPts val="400"/>
               </a:spcAft>
             </a:pPr>
-            <a:r>
-              <a:rPr sz="1100" b="0" i="0">
+            <a:endParaRPr sz="1600" b="0" i="0" dirty="0">
+              <a:solidFill>
+                <a:srgbClr val="333333"/>
+              </a:solidFill>
+              <a:latin typeface="Calibri"/>
+            </a:endParaRPr>
+          </a:p>
+          <a:p>
+            <a:pPr>
+              <a:spcAft>
+                <a:spcPts val="400"/>
+              </a:spcAft>
+            </a:pPr>
+            <a:r>
+              <a:rPr sz="1600" b="0" i="0" dirty="0">
                 <a:solidFill>
                   <a:srgbClr val="333333"/>
                 </a:solidFill>
                 <a:latin typeface="Calibri"/>
               </a:rPr>
-              <a:t/>
+              <a:t>Cause: network, wrong checksum, source moved</a:t>
             </a:r>
           </a:p>
           <a:p>
@@ -8200,14 +10725,43 @@
                 <a:spcPts val="400"/>
               </a:spcAft>
             </a:pPr>
-            <a:r>
-              <a:rPr sz="1100" b="0" i="0">
+            <a:endParaRPr sz="1600" b="0" i="0" dirty="0">
+              <a:solidFill>
+                <a:srgbClr val="333333"/>
+              </a:solidFill>
+              <a:latin typeface="Calibri"/>
+            </a:endParaRPr>
+          </a:p>
+          <a:p>
+            <a:pPr>
+              <a:spcAft>
+                <a:spcPts val="400"/>
+              </a:spcAft>
+            </a:pPr>
+            <a:r>
+              <a:rPr b="1" i="0" dirty="0">
+                <a:solidFill>
+                  <a:srgbClr val="663399"/>
+                </a:solidFill>
+                <a:latin typeface="Calibri"/>
+              </a:rPr>
+              <a:t>Fix:</a:t>
+            </a:r>
+          </a:p>
+          <a:p>
+            <a:pPr>
+              <a:spcAft>
+                <a:spcPts val="400"/>
+              </a:spcAft>
+            </a:pPr>
+            <a:r>
+              <a:rPr sz="1600" b="0" i="0" dirty="0">
                 <a:solidFill>
                   <a:srgbClr val="333333"/>
                 </a:solidFill>
                 <a:latin typeface="Calibri"/>
               </a:rPr>
-              <a:t>Cause: network, wrong checksum, source moved</a:t>
+              <a:t>Check internet</a:t>
             </a:r>
           </a:p>
           <a:p>
@@ -8217,13 +10771,31 @@
               </a:spcAft>
             </a:pPr>
             <a:r>
-              <a:rPr sz="1100" b="0" i="0">
+              <a:rPr sz="1600" b="0" i="0" dirty="0">
                 <a:solidFill>
                   <a:srgbClr val="333333"/>
                 </a:solidFill>
                 <a:latin typeface="Calibri"/>
               </a:rPr>
-              <a:t/>
+              <a:t>Re-run: </a:t>
+            </a:r>
+            <a:r>
+              <a:rPr sz="1600" b="0" i="0" dirty="0" err="1">
+                <a:solidFill>
+                  <a:srgbClr val="333333"/>
+                </a:solidFill>
+                <a:latin typeface="Calibri"/>
+              </a:rPr>
+              <a:t>bitbake</a:t>
+            </a:r>
+            <a:r>
+              <a:rPr sz="1600" b="0" i="0" dirty="0">
+                <a:solidFill>
+                  <a:srgbClr val="333333"/>
+                </a:solidFill>
+                <a:latin typeface="Calibri"/>
+              </a:rPr>
+              <a:t> foo -c fetch</a:t>
             </a:r>
           </a:p>
           <a:p>
@@ -8233,13 +10805,40 @@
               </a:spcAft>
             </a:pPr>
             <a:r>
-              <a:rPr sz="1200" b="1" i="0">
-                <a:solidFill>
-                  <a:srgbClr val="663399"/>
+              <a:rPr sz="1600" b="0" i="0" dirty="0" err="1">
+                <a:solidFill>
+                  <a:srgbClr val="333333"/>
                 </a:solidFill>
                 <a:latin typeface="Calibri"/>
               </a:rPr>
-              <a:t>Fix:</a:t>
+              <a:t>bitbake</a:t>
+            </a:r>
+            <a:r>
+              <a:rPr sz="1600" b="0" i="0" dirty="0">
+                <a:solidFill>
+                  <a:srgbClr val="333333"/>
+                </a:solidFill>
+                <a:latin typeface="Calibri"/>
+              </a:rPr>
+              <a:t> -c </a:t>
+            </a:r>
+            <a:r>
+              <a:rPr sz="1600" b="0" i="0" dirty="0" err="1">
+                <a:solidFill>
+                  <a:srgbClr val="333333"/>
+                </a:solidFill>
+                <a:latin typeface="Calibri"/>
+              </a:rPr>
+              <a:t>cleansstate</a:t>
+            </a:r>
+            <a:r>
+              <a:rPr sz="1600" b="0" i="0" dirty="0">
+                <a:solidFill>
+                  <a:srgbClr val="333333"/>
+                </a:solidFill>
+                <a:latin typeface="Calibri"/>
+              </a:rPr>
+              <a:t> foo</a:t>
             </a:r>
           </a:p>
           <a:p>
@@ -8249,55 +10848,7 @@
               </a:spcAft>
             </a:pPr>
             <a:r>
-              <a:rPr sz="1100" b="0" i="0">
-                <a:solidFill>
-                  <a:srgbClr val="333333"/>
-                </a:solidFill>
-                <a:latin typeface="Calibri"/>
-              </a:rPr>
-              <a:t>Check internet</a:t>
-            </a:r>
-          </a:p>
-          <a:p>
-            <a:pPr>
-              <a:spcAft>
-                <a:spcPts val="400"/>
-              </a:spcAft>
-            </a:pPr>
-            <a:r>
-              <a:rPr sz="1100" b="0" i="0">
-                <a:solidFill>
-                  <a:srgbClr val="333333"/>
-                </a:solidFill>
-                <a:latin typeface="Calibri"/>
-              </a:rPr>
-              <a:t>Re-run: bitbake foo -c fetch</a:t>
-            </a:r>
-          </a:p>
-          <a:p>
-            <a:pPr>
-              <a:spcAft>
-                <a:spcPts val="400"/>
-              </a:spcAft>
-            </a:pPr>
-            <a:r>
-              <a:rPr sz="1100" b="0" i="0">
-                <a:solidFill>
-                  <a:srgbClr val="333333"/>
-                </a:solidFill>
-                <a:latin typeface="Calibri"/>
-              </a:rPr>
-              <a:t>bitbake -c cleansstate foo</a:t>
-            </a:r>
-          </a:p>
-          <a:p>
-            <a:pPr>
-              <a:spcAft>
-                <a:spcPts val="400"/>
-              </a:spcAft>
-            </a:pPr>
-            <a:r>
-              <a:rPr sz="1100" b="0" i="0">
+              <a:rPr sz="1600" b="0" i="0" dirty="0">
                 <a:solidFill>
                   <a:srgbClr val="333333"/>
                 </a:solidFill>
@@ -8345,12 +10896,12 @@
           </a:fontRef>
         </p:style>
         <p:txBody>
-          <a:bodyPr rtlCol="0" anchor="ctr" lIns="182880"/>
+          <a:bodyPr lIns="182880" rtlCol="0" anchor="ctr"/>
           <a:lstStyle/>
           <a:p>
             <a:pPr algn="ctr"/>
             <a:r>
-              <a:rPr sz="2000" b="1">
+              <a:rPr sz="2000" b="1" dirty="0">
                 <a:solidFill>
                   <a:srgbClr val="FFFFFF"/>
                 </a:solidFill>
@@ -8361,13 +10912,22 @@
           </a:p>
           <a:p>
             <a:r>
-              <a:rPr sz="1200" i="1">
+              <a:rPr sz="1600" i="1" dirty="0" err="1">
                 <a:solidFill>
                   <a:srgbClr val="FFFFFF"/>
                 </a:solidFill>
                 <a:latin typeface="Calibri"/>
               </a:rPr>
-              <a:t>do_package warning</a:t>
+              <a:t>do_package</a:t>
+            </a:r>
+            <a:r>
+              <a:rPr sz="1600" i="1" dirty="0">
+                <a:solidFill>
+                  <a:srgbClr val="FFFFFF"/>
+                </a:solidFill>
+                <a:latin typeface="Calibri"/>
+              </a:rPr>
+              <a:t> warning</a:t>
             </a:r>
           </a:p>
         </p:txBody>
@@ -8415,6 +10975,7 @@
           <a:lstStyle/>
           <a:p>
             <a:pPr algn="ctr"/>
+            <a:endParaRPr/>
           </a:p>
         </p:txBody>
       </p:sp>
@@ -8427,7 +10988,7 @@
         <p:spPr>
           <a:xfrm>
             <a:off x="8046719" y="2514600"/>
-            <a:ext cx="3337560" cy="3657600"/>
+            <a:ext cx="3337560" cy="2975173"/>
           </a:xfrm>
           <a:prstGeom prst="rect">
             <a:avLst/>
@@ -8446,7 +11007,7 @@
               </a:spcAft>
             </a:pPr>
             <a:r>
-              <a:rPr sz="1200" b="1" i="0">
+              <a:rPr b="1" i="0">
                 <a:solidFill>
                   <a:srgbClr val="CC0066"/>
                 </a:solidFill>
@@ -8462,7 +11023,7 @@
               </a:spcAft>
             </a:pPr>
             <a:r>
-              <a:rPr sz="1100" b="0" i="0">
+              <a:rPr sz="1600" b="0" i="0">
                 <a:solidFill>
                   <a:srgbClr val="333333"/>
                 </a:solidFill>
@@ -8477,14 +11038,27 @@
                 <a:spcPts val="400"/>
               </a:spcAft>
             </a:pPr>
-            <a:r>
-              <a:rPr sz="1100" b="0" i="0">
+            <a:endParaRPr sz="1600" b="0" i="0">
+              <a:solidFill>
+                <a:srgbClr val="333333"/>
+              </a:solidFill>
+              <a:latin typeface="Calibri"/>
+            </a:endParaRPr>
+          </a:p>
+          <a:p>
+            <a:pPr>
+              <a:spcAft>
+                <a:spcPts val="400"/>
+              </a:spcAft>
+            </a:pPr>
+            <a:r>
+              <a:rPr sz="1600" b="0" i="0">
                 <a:solidFill>
                   <a:srgbClr val="333333"/>
                 </a:solidFill>
                 <a:latin typeface="Calibri"/>
               </a:rPr>
-              <a:t/>
+              <a:t>Cause: do_install put files outside FILES default</a:t>
             </a:r>
           </a:p>
           <a:p>
@@ -8493,14 +11067,43 @@
                 <a:spcPts val="400"/>
               </a:spcAft>
             </a:pPr>
-            <a:r>
-              <a:rPr sz="1100" b="0" i="0">
+            <a:endParaRPr sz="1600" b="0" i="0">
+              <a:solidFill>
+                <a:srgbClr val="333333"/>
+              </a:solidFill>
+              <a:latin typeface="Calibri"/>
+            </a:endParaRPr>
+          </a:p>
+          <a:p>
+            <a:pPr>
+              <a:spcAft>
+                <a:spcPts val="400"/>
+              </a:spcAft>
+            </a:pPr>
+            <a:r>
+              <a:rPr b="1" i="0">
+                <a:solidFill>
+                  <a:srgbClr val="CC0066"/>
+                </a:solidFill>
+                <a:latin typeface="Calibri"/>
+              </a:rPr>
+              <a:t>Fix:</a:t>
+            </a:r>
+          </a:p>
+          <a:p>
+            <a:pPr>
+              <a:spcAft>
+                <a:spcPts val="400"/>
+              </a:spcAft>
+            </a:pPr>
+            <a:r>
+              <a:rPr sz="1600" b="0" i="0">
                 <a:solidFill>
                   <a:srgbClr val="333333"/>
                 </a:solidFill>
                 <a:latin typeface="Calibri"/>
               </a:rPr>
-              <a:t>Cause: do_install put files outside FILES default</a:t>
+              <a:t>FILES:${PN} += "/etc/myapp/*"</a:t>
             </a:r>
           </a:p>
           <a:p>
@@ -8510,1530 +11113,13 @@
               </a:spcAft>
             </a:pPr>
             <a:r>
-              <a:rPr sz="1100" b="0" i="0">
+              <a:rPr sz="1600" b="0" i="0">
                 <a:solidFill>
                   <a:srgbClr val="333333"/>
                 </a:solidFill>
                 <a:latin typeface="Calibri"/>
               </a:rPr>
-              <a:t/>
-            </a:r>
-          </a:p>
-          <a:p>
-            <a:pPr>
-              <a:spcAft>
-                <a:spcPts val="400"/>
-              </a:spcAft>
-            </a:pPr>
-            <a:r>
-              <a:rPr sz="1200" b="1" i="0">
-                <a:solidFill>
-                  <a:srgbClr val="CC0066"/>
-                </a:solidFill>
-                <a:latin typeface="Calibri"/>
-              </a:rPr>
-              <a:t>Fix:</a:t>
-            </a:r>
-          </a:p>
-          <a:p>
-            <a:pPr>
-              <a:spcAft>
-                <a:spcPts val="400"/>
-              </a:spcAft>
-            </a:pPr>
-            <a:r>
-              <a:rPr sz="1100" b="0" i="0">
-                <a:solidFill>
-                  <a:srgbClr val="333333"/>
-                </a:solidFill>
-                <a:latin typeface="Calibri"/>
-              </a:rPr>
-              <a:t>FILES:${PN} += "/etc/myapp/*"</a:t>
-            </a:r>
-          </a:p>
-          <a:p>
-            <a:pPr>
-              <a:spcAft>
-                <a:spcPts val="400"/>
-              </a:spcAft>
-            </a:pPr>
-            <a:r>
-              <a:rPr sz="1100" b="0" i="0">
-                <a:solidFill>
-                  <a:srgbClr val="333333"/>
-                </a:solidFill>
-                <a:latin typeface="Calibri"/>
-              </a:rPr>
               <a:t>Re-run: bitbake foo</a:t>
-            </a:r>
-          </a:p>
-        </p:txBody>
-      </p:sp>
-    </p:spTree>
-  </p:cSld>
-  <p:clrMapOvr>
-    <a:masterClrMapping/>
-  </p:clrMapOvr>
-</p:sld>
-</file>
-
-<file path=ppt/slides/slide16.xml><?xml version="1.0" encoding="utf-8"?>
-<p:sld xmlns:a="http://schemas.openxmlformats.org/drawingml/2006/main" xmlns:p="http://schemas.openxmlformats.org/presentationml/2006/main" xmlns:r="http://schemas.openxmlformats.org/officeDocument/2006/relationships">
-  <p:cSld>
-    <p:spTree>
-      <p:nvGrpSpPr>
-        <p:cNvPr id="1" name=""/>
-        <p:cNvGrpSpPr/>
-        <p:nvPr/>
-      </p:nvGrpSpPr>
-      <p:grpSpPr/>
-      <p:sp>
-        <p:nvSpPr>
-          <p:cNvPr id="2" name="Title 1"/>
-          <p:cNvSpPr>
-            <a:spLocks noGrp="1"/>
-          </p:cNvSpPr>
-          <p:nvPr>
-            <p:ph type="title"/>
-          </p:nvPr>
-        </p:nvSpPr>
-        <p:spPr/>
-        <p:txBody>
-          <a:bodyPr/>
-          <a:lstStyle/>
-          <a:p>
-            <a:r>
-              <a:rPr sz="3200" b="1">
-                <a:solidFill>
-                  <a:srgbClr val="663399"/>
-                </a:solidFill>
-                <a:latin typeface="Calibri"/>
-              </a:rPr>
-              <a:t>Session Summary</a:t>
-            </a:r>
-          </a:p>
-        </p:txBody>
-      </p:sp>
-      <p:sp>
-        <p:nvSpPr>
-          <p:cNvPr id="3" name="TextBox 2"/>
-          <p:cNvSpPr txBox="1"/>
-          <p:nvPr/>
-        </p:nvSpPr>
-        <p:spPr>
-          <a:xfrm>
-            <a:off x="822960" y="1417320"/>
-            <a:ext cx="10515600" cy="365760"/>
-          </a:xfrm>
-          <a:prstGeom prst="rect">
-            <a:avLst/>
-          </a:prstGeom>
-          <a:noFill/>
-        </p:spPr>
-        <p:txBody>
-          <a:bodyPr wrap="square" anchor="t" lIns="45720" rIns="45720">
-            <a:spAutoFit/>
-          </a:bodyPr>
-          <a:lstStyle/>
-          <a:p>
-            <a:pPr algn="l"/>
-            <a:r>
-              <a:rPr sz="1500" b="0" i="1">
-                <a:solidFill>
-                  <a:srgbClr val="666666"/>
-                </a:solidFill>
-                <a:latin typeface="Calibri"/>
-              </a:rPr>
-              <a:t>5 things to remember from this session.</a:t>
-            </a:r>
-          </a:p>
-        </p:txBody>
-      </p:sp>
-      <p:sp>
-        <p:nvSpPr>
-          <p:cNvPr id="4" name="Rounded Rectangle 3"/>
-          <p:cNvSpPr/>
-          <p:nvPr/>
-        </p:nvSpPr>
-        <p:spPr>
-          <a:xfrm>
-            <a:off x="822960" y="1874519"/>
-            <a:ext cx="457200" cy="548640"/>
-          </a:xfrm>
-          <a:prstGeom prst="roundRect">
-            <a:avLst/>
-          </a:prstGeom>
-          <a:solidFill>
-            <a:srgbClr val="CC0066"/>
-          </a:solidFill>
-          <a:ln>
-            <a:noFill/>
-          </a:ln>
-          <a:effectLst/>
-        </p:spPr>
-        <p:style>
-          <a:lnRef idx="1">
-            <a:schemeClr val="accent1"/>
-          </a:lnRef>
-          <a:fillRef idx="3">
-            <a:schemeClr val="accent1"/>
-          </a:fillRef>
-          <a:effectRef idx="2">
-            <a:schemeClr val="accent1"/>
-          </a:effectRef>
-          <a:fontRef idx="minor">
-            <a:schemeClr val="lt1"/>
-          </a:fontRef>
-        </p:style>
-        <p:txBody>
-          <a:bodyPr rtlCol="0" anchor="ctr" lIns="0" rIns="0"/>
-          <a:lstStyle/>
-          <a:p>
-            <a:pPr algn="ctr"/>
-            <a:r>
-              <a:rPr sz="2200" b="1">
-                <a:solidFill>
-                  <a:srgbClr val="FFFFFF"/>
-                </a:solidFill>
-                <a:latin typeface="Calibri"/>
-              </a:rPr>
-              <a:t>1</a:t>
-            </a:r>
-          </a:p>
-        </p:txBody>
-      </p:sp>
-      <p:sp>
-        <p:nvSpPr>
-          <p:cNvPr id="5" name="TextBox 4"/>
-          <p:cNvSpPr txBox="1"/>
-          <p:nvPr/>
-        </p:nvSpPr>
-        <p:spPr>
-          <a:xfrm>
-            <a:off x="1417320" y="1874519"/>
-            <a:ext cx="10058400" cy="320040"/>
-          </a:xfrm>
-          <a:prstGeom prst="rect">
-            <a:avLst/>
-          </a:prstGeom>
-          <a:noFill/>
-        </p:spPr>
-        <p:txBody>
-          <a:bodyPr wrap="square" anchor="t" lIns="45720" rIns="45720">
-            <a:spAutoFit/>
-          </a:bodyPr>
-          <a:lstStyle/>
-          <a:p>
-            <a:pPr algn="l"/>
-            <a:r>
-              <a:rPr sz="1600" b="1" i="0">
-                <a:solidFill>
-                  <a:srgbClr val="663399"/>
-                </a:solidFill>
-                <a:latin typeface="Calibri"/>
-              </a:rPr>
-              <a:t>You built and booted a Yocto image with your own package</a:t>
-            </a:r>
-          </a:p>
-        </p:txBody>
-      </p:sp>
-      <p:sp>
-        <p:nvSpPr>
-          <p:cNvPr id="6" name="TextBox 5"/>
-          <p:cNvSpPr txBox="1"/>
-          <p:nvPr/>
-        </p:nvSpPr>
-        <p:spPr>
-          <a:xfrm>
-            <a:off x="1417320" y="2185415"/>
-            <a:ext cx="10058400" cy="320040"/>
-          </a:xfrm>
-          <a:prstGeom prst="rect">
-            <a:avLst/>
-          </a:prstGeom>
-          <a:noFill/>
-        </p:spPr>
-        <p:txBody>
-          <a:bodyPr wrap="square" anchor="t" lIns="45720" rIns="45720">
-            <a:spAutoFit/>
-          </a:bodyPr>
-          <a:lstStyle/>
-          <a:p>
-            <a:pPr algn="l"/>
-            <a:r>
-              <a:rPr sz="1300" b="0" i="0">
-                <a:solidFill>
-                  <a:srgbClr val="333333"/>
-                </a:solidFill>
-                <a:latin typeface="Calibri"/>
-              </a:rPr>
-              <a:t>All the rest of the course just extends this skill</a:t>
-            </a:r>
-          </a:p>
-        </p:txBody>
-      </p:sp>
-      <p:sp>
-        <p:nvSpPr>
-          <p:cNvPr id="7" name="Rounded Rectangle 6"/>
-          <p:cNvSpPr/>
-          <p:nvPr/>
-        </p:nvSpPr>
-        <p:spPr>
-          <a:xfrm>
-            <a:off x="822960" y="2587752"/>
-            <a:ext cx="457200" cy="548640"/>
-          </a:xfrm>
-          <a:prstGeom prst="roundRect">
-            <a:avLst/>
-          </a:prstGeom>
-          <a:solidFill>
-            <a:srgbClr val="CC0066"/>
-          </a:solidFill>
-          <a:ln>
-            <a:noFill/>
-          </a:ln>
-          <a:effectLst/>
-        </p:spPr>
-        <p:style>
-          <a:lnRef idx="1">
-            <a:schemeClr val="accent1"/>
-          </a:lnRef>
-          <a:fillRef idx="3">
-            <a:schemeClr val="accent1"/>
-          </a:fillRef>
-          <a:effectRef idx="2">
-            <a:schemeClr val="accent1"/>
-          </a:effectRef>
-          <a:fontRef idx="minor">
-            <a:schemeClr val="lt1"/>
-          </a:fontRef>
-        </p:style>
-        <p:txBody>
-          <a:bodyPr rtlCol="0" anchor="ctr" lIns="0" rIns="0"/>
-          <a:lstStyle/>
-          <a:p>
-            <a:pPr algn="ctr"/>
-            <a:r>
-              <a:rPr sz="2200" b="1">
-                <a:solidFill>
-                  <a:srgbClr val="FFFFFF"/>
-                </a:solidFill>
-                <a:latin typeface="Calibri"/>
-              </a:rPr>
-              <a:t>2</a:t>
-            </a:r>
-          </a:p>
-        </p:txBody>
-      </p:sp>
-      <p:sp>
-        <p:nvSpPr>
-          <p:cNvPr id="8" name="TextBox 7"/>
-          <p:cNvSpPr txBox="1"/>
-          <p:nvPr/>
-        </p:nvSpPr>
-        <p:spPr>
-          <a:xfrm>
-            <a:off x="1417320" y="2587752"/>
-            <a:ext cx="10058400" cy="320040"/>
-          </a:xfrm>
-          <a:prstGeom prst="rect">
-            <a:avLst/>
-          </a:prstGeom>
-          <a:noFill/>
-        </p:spPr>
-        <p:txBody>
-          <a:bodyPr wrap="square" anchor="t" lIns="45720" rIns="45720">
-            <a:spAutoFit/>
-          </a:bodyPr>
-          <a:lstStyle/>
-          <a:p>
-            <a:pPr algn="l"/>
-            <a:r>
-              <a:rPr sz="1600" b="1" i="0">
-                <a:solidFill>
-                  <a:srgbClr val="663399"/>
-                </a:solidFill>
-                <a:latin typeface="Calibri"/>
-              </a:rPr>
-              <a:t>meta-trainerdemo is your sandbox</a:t>
-            </a:r>
-          </a:p>
-        </p:txBody>
-      </p:sp>
-      <p:sp>
-        <p:nvSpPr>
-          <p:cNvPr id="9" name="TextBox 8"/>
-          <p:cNvSpPr txBox="1"/>
-          <p:nvPr/>
-        </p:nvSpPr>
-        <p:spPr>
-          <a:xfrm>
-            <a:off x="1417320" y="2898648"/>
-            <a:ext cx="10058400" cy="320040"/>
-          </a:xfrm>
-          <a:prstGeom prst="rect">
-            <a:avLst/>
-          </a:prstGeom>
-          <a:noFill/>
-        </p:spPr>
-        <p:txBody>
-          <a:bodyPr wrap="square" anchor="t" lIns="45720" rIns="45720">
-            <a:spAutoFit/>
-          </a:bodyPr>
-          <a:lstStyle/>
-          <a:p>
-            <a:pPr algn="l"/>
-            <a:r>
-              <a:rPr sz="1300" b="0" i="0">
-                <a:solidFill>
-                  <a:srgbClr val="333333"/>
-                </a:solidFill>
-                <a:latin typeface="Calibri"/>
-              </a:rPr>
-              <a:t>Every customization you'll do this week lives in this one layer</a:t>
-            </a:r>
-          </a:p>
-        </p:txBody>
-      </p:sp>
-      <p:sp>
-        <p:nvSpPr>
-          <p:cNvPr id="10" name="Rounded Rectangle 9"/>
-          <p:cNvSpPr/>
-          <p:nvPr/>
-        </p:nvSpPr>
-        <p:spPr>
-          <a:xfrm>
-            <a:off x="822960" y="3300984"/>
-            <a:ext cx="457200" cy="548640"/>
-          </a:xfrm>
-          <a:prstGeom prst="roundRect">
-            <a:avLst/>
-          </a:prstGeom>
-          <a:solidFill>
-            <a:srgbClr val="CC0066"/>
-          </a:solidFill>
-          <a:ln>
-            <a:noFill/>
-          </a:ln>
-          <a:effectLst/>
-        </p:spPr>
-        <p:style>
-          <a:lnRef idx="1">
-            <a:schemeClr val="accent1"/>
-          </a:lnRef>
-          <a:fillRef idx="3">
-            <a:schemeClr val="accent1"/>
-          </a:fillRef>
-          <a:effectRef idx="2">
-            <a:schemeClr val="accent1"/>
-          </a:effectRef>
-          <a:fontRef idx="minor">
-            <a:schemeClr val="lt1"/>
-          </a:fontRef>
-        </p:style>
-        <p:txBody>
-          <a:bodyPr rtlCol="0" anchor="ctr" lIns="0" rIns="0"/>
-          <a:lstStyle/>
-          <a:p>
-            <a:pPr algn="ctr"/>
-            <a:r>
-              <a:rPr sz="2200" b="1">
-                <a:solidFill>
-                  <a:srgbClr val="FFFFFF"/>
-                </a:solidFill>
-                <a:latin typeface="Calibri"/>
-              </a:rPr>
-              <a:t>3</a:t>
-            </a:r>
-          </a:p>
-        </p:txBody>
-      </p:sp>
-      <p:sp>
-        <p:nvSpPr>
-          <p:cNvPr id="11" name="TextBox 10"/>
-          <p:cNvSpPr txBox="1"/>
-          <p:nvPr/>
-        </p:nvSpPr>
-        <p:spPr>
-          <a:xfrm>
-            <a:off x="1417320" y="3300984"/>
-            <a:ext cx="10058400" cy="320040"/>
-          </a:xfrm>
-          <a:prstGeom prst="rect">
-            <a:avLst/>
-          </a:prstGeom>
-          <a:noFill/>
-        </p:spPr>
-        <p:txBody>
-          <a:bodyPr wrap="square" anchor="t" lIns="45720" rIns="45720">
-            <a:spAutoFit/>
-          </a:bodyPr>
-          <a:lstStyle/>
-          <a:p>
-            <a:pPr algn="l"/>
-            <a:r>
-              <a:rPr sz="1600" b="1" i="0">
-                <a:solidFill>
-                  <a:srgbClr val="663399"/>
-                </a:solidFill>
-                <a:latin typeface="Calibri"/>
-              </a:rPr>
-              <a:t>The pattern: layer → recipe → IMAGE_INSTALL → bitbake</a:t>
-            </a:r>
-          </a:p>
-        </p:txBody>
-      </p:sp>
-      <p:sp>
-        <p:nvSpPr>
-          <p:cNvPr id="12" name="TextBox 11"/>
-          <p:cNvSpPr txBox="1"/>
-          <p:nvPr/>
-        </p:nvSpPr>
-        <p:spPr>
-          <a:xfrm>
-            <a:off x="1417320" y="3611879"/>
-            <a:ext cx="10058400" cy="320040"/>
-          </a:xfrm>
-          <a:prstGeom prst="rect">
-            <a:avLst/>
-          </a:prstGeom>
-          <a:noFill/>
-        </p:spPr>
-        <p:txBody>
-          <a:bodyPr wrap="square" anchor="t" lIns="45720" rIns="45720">
-            <a:spAutoFit/>
-          </a:bodyPr>
-          <a:lstStyle/>
-          <a:p>
-            <a:pPr algn="l"/>
-            <a:r>
-              <a:rPr sz="1300" b="0" i="0">
-                <a:solidFill>
-                  <a:srgbClr val="333333"/>
-                </a:solidFill>
-                <a:latin typeface="Calibri"/>
-              </a:rPr>
-              <a:t>Memorize that flow — it's 80% of practical Yocto work</a:t>
-            </a:r>
-          </a:p>
-        </p:txBody>
-      </p:sp>
-      <p:sp>
-        <p:nvSpPr>
-          <p:cNvPr id="13" name="Rounded Rectangle 12"/>
-          <p:cNvSpPr/>
-          <p:nvPr/>
-        </p:nvSpPr>
-        <p:spPr>
-          <a:xfrm>
-            <a:off x="822960" y="4014215"/>
-            <a:ext cx="457200" cy="548640"/>
-          </a:xfrm>
-          <a:prstGeom prst="roundRect">
-            <a:avLst/>
-          </a:prstGeom>
-          <a:solidFill>
-            <a:srgbClr val="CC0066"/>
-          </a:solidFill>
-          <a:ln>
-            <a:noFill/>
-          </a:ln>
-          <a:effectLst/>
-        </p:spPr>
-        <p:style>
-          <a:lnRef idx="1">
-            <a:schemeClr val="accent1"/>
-          </a:lnRef>
-          <a:fillRef idx="3">
-            <a:schemeClr val="accent1"/>
-          </a:fillRef>
-          <a:effectRef idx="2">
-            <a:schemeClr val="accent1"/>
-          </a:effectRef>
-          <a:fontRef idx="minor">
-            <a:schemeClr val="lt1"/>
-          </a:fontRef>
-        </p:style>
-        <p:txBody>
-          <a:bodyPr rtlCol="0" anchor="ctr" lIns="0" rIns="0"/>
-          <a:lstStyle/>
-          <a:p>
-            <a:pPr algn="ctr"/>
-            <a:r>
-              <a:rPr sz="2200" b="1">
-                <a:solidFill>
-                  <a:srgbClr val="FFFFFF"/>
-                </a:solidFill>
-                <a:latin typeface="Calibri"/>
-              </a:rPr>
-              <a:t>4</a:t>
-            </a:r>
-          </a:p>
-        </p:txBody>
-      </p:sp>
-      <p:sp>
-        <p:nvSpPr>
-          <p:cNvPr id="14" name="TextBox 13"/>
-          <p:cNvSpPr txBox="1"/>
-          <p:nvPr/>
-        </p:nvSpPr>
-        <p:spPr>
-          <a:xfrm>
-            <a:off x="1417320" y="4014215"/>
-            <a:ext cx="10058400" cy="320040"/>
-          </a:xfrm>
-          <a:prstGeom prst="rect">
-            <a:avLst/>
-          </a:prstGeom>
-          <a:noFill/>
-        </p:spPr>
-        <p:txBody>
-          <a:bodyPr wrap="square" anchor="t" lIns="45720" rIns="45720">
-            <a:spAutoFit/>
-          </a:bodyPr>
-          <a:lstStyle/>
-          <a:p>
-            <a:pPr algn="l"/>
-            <a:r>
-              <a:rPr sz="1600" b="1" i="0">
-                <a:solidFill>
-                  <a:srgbClr val="663399"/>
-                </a:solidFill>
-                <a:latin typeface="Calibri"/>
-              </a:rPr>
-              <a:t>sstate makes incremental rebuilds fast</a:t>
-            </a:r>
-          </a:p>
-        </p:txBody>
-      </p:sp>
-      <p:sp>
-        <p:nvSpPr>
-          <p:cNvPr id="15" name="TextBox 14"/>
-          <p:cNvSpPr txBox="1"/>
-          <p:nvPr/>
-        </p:nvSpPr>
-        <p:spPr>
-          <a:xfrm>
-            <a:off x="1417320" y="4325112"/>
-            <a:ext cx="10058400" cy="320040"/>
-          </a:xfrm>
-          <a:prstGeom prst="rect">
-            <a:avLst/>
-          </a:prstGeom>
-          <a:noFill/>
-        </p:spPr>
-        <p:txBody>
-          <a:bodyPr wrap="square" anchor="t" lIns="45720" rIns="45720">
-            <a:spAutoFit/>
-          </a:bodyPr>
-          <a:lstStyle/>
-          <a:p>
-            <a:pPr algn="l"/>
-            <a:r>
-              <a:rPr sz="1300" b="0" i="0">
-                <a:solidFill>
-                  <a:srgbClr val="333333"/>
-                </a:solidFill>
-                <a:latin typeface="Calibri"/>
-              </a:rPr>
-              <a:t>Adding a package to an image takes minutes, not hours</a:t>
-            </a:r>
-          </a:p>
-        </p:txBody>
-      </p:sp>
-      <p:sp>
-        <p:nvSpPr>
-          <p:cNvPr id="16" name="Rounded Rectangle 15"/>
-          <p:cNvSpPr/>
-          <p:nvPr/>
-        </p:nvSpPr>
-        <p:spPr>
-          <a:xfrm>
-            <a:off x="822960" y="4727448"/>
-            <a:ext cx="457200" cy="548640"/>
-          </a:xfrm>
-          <a:prstGeom prst="roundRect">
-            <a:avLst/>
-          </a:prstGeom>
-          <a:solidFill>
-            <a:srgbClr val="CC0066"/>
-          </a:solidFill>
-          <a:ln>
-            <a:noFill/>
-          </a:ln>
-          <a:effectLst/>
-        </p:spPr>
-        <p:style>
-          <a:lnRef idx="1">
-            <a:schemeClr val="accent1"/>
-          </a:lnRef>
-          <a:fillRef idx="3">
-            <a:schemeClr val="accent1"/>
-          </a:fillRef>
-          <a:effectRef idx="2">
-            <a:schemeClr val="accent1"/>
-          </a:effectRef>
-          <a:fontRef idx="minor">
-            <a:schemeClr val="lt1"/>
-          </a:fontRef>
-        </p:style>
-        <p:txBody>
-          <a:bodyPr rtlCol="0" anchor="ctr" lIns="0" rIns="0"/>
-          <a:lstStyle/>
-          <a:p>
-            <a:pPr algn="ctr"/>
-            <a:r>
-              <a:rPr sz="2200" b="1">
-                <a:solidFill>
-                  <a:srgbClr val="FFFFFF"/>
-                </a:solidFill>
-                <a:latin typeface="Calibri"/>
-              </a:rPr>
-              <a:t>5</a:t>
-            </a:r>
-          </a:p>
-        </p:txBody>
-      </p:sp>
-      <p:sp>
-        <p:nvSpPr>
-          <p:cNvPr id="17" name="TextBox 16"/>
-          <p:cNvSpPr txBox="1"/>
-          <p:nvPr/>
-        </p:nvSpPr>
-        <p:spPr>
-          <a:xfrm>
-            <a:off x="1417320" y="4727448"/>
-            <a:ext cx="10058400" cy="320040"/>
-          </a:xfrm>
-          <a:prstGeom prst="rect">
-            <a:avLst/>
-          </a:prstGeom>
-          <a:noFill/>
-        </p:spPr>
-        <p:txBody>
-          <a:bodyPr wrap="square" anchor="t" lIns="45720" rIns="45720">
-            <a:spAutoFit/>
-          </a:bodyPr>
-          <a:lstStyle/>
-          <a:p>
-            <a:pPr algn="l"/>
-            <a:r>
-              <a:rPr sz="1600" b="1" i="0">
-                <a:solidFill>
-                  <a:srgbClr val="663399"/>
-                </a:solidFill>
-                <a:latin typeface="Calibri"/>
-              </a:rPr>
-              <a:t>Errors have patterns</a:t>
-            </a:r>
-          </a:p>
-        </p:txBody>
-      </p:sp>
-      <p:sp>
-        <p:nvSpPr>
-          <p:cNvPr id="18" name="TextBox 17"/>
-          <p:cNvSpPr txBox="1"/>
-          <p:nvPr/>
-        </p:nvSpPr>
-        <p:spPr>
-          <a:xfrm>
-            <a:off x="1417320" y="5038344"/>
-            <a:ext cx="10058400" cy="320040"/>
-          </a:xfrm>
-          <a:prstGeom prst="rect">
-            <a:avLst/>
-          </a:prstGeom>
-          <a:noFill/>
-        </p:spPr>
-        <p:txBody>
-          <a:bodyPr wrap="square" anchor="t" lIns="45720" rIns="45720">
-            <a:spAutoFit/>
-          </a:bodyPr>
-          <a:lstStyle/>
-          <a:p>
-            <a:pPr algn="l"/>
-            <a:r>
-              <a:rPr sz="1300" b="0" i="0">
-                <a:solidFill>
-                  <a:srgbClr val="333333"/>
-                </a:solidFill>
-                <a:latin typeface="Calibri"/>
-              </a:rPr>
-              <a:t>Parse, fetch, FILES, sstate — most failures match one of these</a:t>
-            </a:r>
-          </a:p>
-        </p:txBody>
-      </p:sp>
-      <p:sp>
-        <p:nvSpPr>
-          <p:cNvPr id="19" name="Rounded Rectangle 18"/>
-          <p:cNvSpPr/>
-          <p:nvPr/>
-        </p:nvSpPr>
-        <p:spPr>
-          <a:xfrm>
-            <a:off x="822960" y="5669280"/>
-            <a:ext cx="10561320" cy="640080"/>
-          </a:xfrm>
-          <a:prstGeom prst="roundRect">
-            <a:avLst/>
-          </a:prstGeom>
-          <a:solidFill>
-            <a:srgbClr val="FBE6F0"/>
-          </a:solidFill>
-          <a:ln>
-            <a:noFill/>
-          </a:ln>
-          <a:effectLst/>
-        </p:spPr>
-        <p:style>
-          <a:lnRef idx="1">
-            <a:schemeClr val="accent1"/>
-          </a:lnRef>
-          <a:fillRef idx="3">
-            <a:schemeClr val="accent1"/>
-          </a:fillRef>
-          <a:effectRef idx="2">
-            <a:schemeClr val="accent1"/>
-          </a:effectRef>
-          <a:fontRef idx="minor">
-            <a:schemeClr val="lt1"/>
-          </a:fontRef>
-        </p:style>
-        <p:txBody>
-          <a:bodyPr rtlCol="0" anchor="ctr" lIns="228600"/>
-          <a:lstStyle/>
-          <a:p>
-            <a:pPr algn="ctr"/>
-            <a:r>
-              <a:rPr sz="1400" b="1">
-                <a:solidFill>
-                  <a:srgbClr val="663399"/>
-                </a:solidFill>
-                <a:latin typeface="Calibri"/>
-              </a:rPr>
-              <a:t>Next session  →  </a:t>
-            </a:r>
-            <a:r>
-              <a:rPr sz="1400">
-                <a:solidFill>
-                  <a:srgbClr val="333333"/>
-                </a:solidFill>
-                <a:latin typeface="Calibri"/>
-              </a:rPr>
-              <a:t>Day 1 recap and Day 2 preview</a:t>
-            </a:r>
-          </a:p>
-        </p:txBody>
-      </p:sp>
-    </p:spTree>
-  </p:cSld>
-  <p:clrMapOvr>
-    <a:masterClrMapping/>
-  </p:clrMapOvr>
-</p:sld>
-</file>
-
-<file path=ppt/slides/slide7.xml><?xml version="1.0" encoding="utf-8"?>
-<p:sld xmlns:a="http://schemas.openxmlformats.org/drawingml/2006/main" xmlns:p="http://schemas.openxmlformats.org/presentationml/2006/main" xmlns:r="http://schemas.openxmlformats.org/officeDocument/2006/relationships">
-  <p:cSld>
-    <p:spTree>
-      <p:nvGrpSpPr>
-        <p:cNvPr id="1" name=""/>
-        <p:cNvGrpSpPr/>
-        <p:nvPr/>
-      </p:nvGrpSpPr>
-      <p:grpSpPr/>
-      <p:sp>
-        <p:nvSpPr>
-          <p:cNvPr id="2" name="Title 1"/>
-          <p:cNvSpPr>
-            <a:spLocks noGrp="1"/>
-          </p:cNvSpPr>
-          <p:nvPr>
-            <p:ph type="ctrTitle"/>
-          </p:nvPr>
-        </p:nvSpPr>
-        <p:spPr/>
-        <p:txBody>
-          <a:bodyPr/>
-          <a:lstStyle/>
-          <a:p>
-            <a:r>
-              <a:rPr sz="4400" b="1">
-                <a:solidFill>
-                  <a:srgbClr val="FFFFFF"/>
-                </a:solidFill>
-                <a:latin typeface="Calibri"/>
-              </a:rPr>
-              <a:t>Hands-On — First Yocto Build</a:t>
-            </a:r>
-          </a:p>
-        </p:txBody>
-      </p:sp>
-      <p:sp>
-        <p:nvSpPr>
-          <p:cNvPr id="3" name="Subtitle 2"/>
-          <p:cNvSpPr>
-            <a:spLocks noGrp="1"/>
-          </p:cNvSpPr>
-          <p:nvPr>
-            <p:ph type="subTitle" idx="1"/>
-          </p:nvPr>
-        </p:nvSpPr>
-        <p:spPr/>
-        <p:txBody>
-          <a:bodyPr/>
-          <a:lstStyle/>
-          <a:p>
-            <a:r>
-              <a:rPr sz="2200" i="1">
-                <a:solidFill>
-                  <a:srgbClr val="FFFFFF"/>
-                </a:solidFill>
-                <a:latin typeface="Calibri"/>
-              </a:rPr>
-              <a:t>Day 1 • Session 7 • 120 minutes</a:t>
-            </a:r>
-          </a:p>
-          <a:p>
-            <a:r>
-              <a:rPr sz="1800">
-                <a:solidFill>
-                  <a:srgbClr val="FFFFFF"/>
-                </a:solidFill>
-                <a:latin typeface="Calibri"/>
-              </a:rPr>
-              <a:t>Build environment + first custom image</a:t>
-            </a:r>
-          </a:p>
-        </p:txBody>
-      </p:sp>
-    </p:spTree>
-  </p:cSld>
-  <p:clrMapOvr>
-    <a:masterClrMapping/>
-  </p:clrMapOvr>
-</p:sld>
-</file>
-
-<file path=ppt/slides/slide8.xml><?xml version="1.0" encoding="utf-8"?>
-<p:sld xmlns:a="http://schemas.openxmlformats.org/drawingml/2006/main" xmlns:p="http://schemas.openxmlformats.org/presentationml/2006/main" xmlns:r="http://schemas.openxmlformats.org/officeDocument/2006/relationships">
-  <p:cSld>
-    <p:spTree>
-      <p:nvGrpSpPr>
-        <p:cNvPr id="1" name=""/>
-        <p:cNvGrpSpPr/>
-        <p:nvPr/>
-      </p:nvGrpSpPr>
-      <p:grpSpPr/>
-      <p:sp>
-        <p:nvSpPr>
-          <p:cNvPr id="2" name="Title 1"/>
-          <p:cNvSpPr>
-            <a:spLocks noGrp="1"/>
-          </p:cNvSpPr>
-          <p:nvPr>
-            <p:ph type="title"/>
-          </p:nvPr>
-        </p:nvSpPr>
-        <p:spPr/>
-        <p:txBody>
-          <a:bodyPr/>
-          <a:lstStyle/>
-          <a:p>
-            <a:r>
-              <a:rPr sz="3200" b="1">
-                <a:solidFill>
-                  <a:srgbClr val="CC0066"/>
-                </a:solidFill>
-                <a:latin typeface="Calibri"/>
-              </a:rPr>
-              <a:t>Session Agenda</a:t>
-            </a:r>
-          </a:p>
-        </p:txBody>
-      </p:sp>
-      <p:sp>
-        <p:nvSpPr>
-          <p:cNvPr id="3" name="TextBox 2"/>
-          <p:cNvSpPr txBox="1"/>
-          <p:nvPr/>
-        </p:nvSpPr>
-        <p:spPr>
-          <a:xfrm>
-            <a:off x="822960" y="1463040"/>
-            <a:ext cx="10515600" cy="5029200"/>
-          </a:xfrm>
-          <a:prstGeom prst="rect">
-            <a:avLst/>
-          </a:prstGeom>
-          <a:noFill/>
-        </p:spPr>
-        <p:txBody>
-          <a:bodyPr wrap="square" lIns="45720" rIns="45720">
-            <a:spAutoFit/>
-          </a:bodyPr>
-          <a:lstStyle/>
-          <a:p>
-            <a:pPr>
-              <a:spcAft>
-                <a:spcPts val="600"/>
-              </a:spcAft>
-            </a:pPr>
-            <a:r>
-              <a:rPr sz="2000" b="0" i="0">
-                <a:solidFill>
-                  <a:srgbClr val="333333"/>
-                </a:solidFill>
-                <a:latin typeface="Calibri"/>
-              </a:rPr>
-              <a:t>1.  Verify your pre-class setup</a:t>
-            </a:r>
-          </a:p>
-          <a:p>
-            <a:pPr>
-              <a:spcAft>
-                <a:spcPts val="600"/>
-              </a:spcAft>
-            </a:pPr>
-            <a:r>
-              <a:rPr sz="2000" b="0" i="0">
-                <a:solidFill>
-                  <a:srgbClr val="333333"/>
-                </a:solidFill>
-                <a:latin typeface="Calibri"/>
-              </a:rPr>
-              <a:t>2.  Walk through the build directory</a:t>
-            </a:r>
-          </a:p>
-          <a:p>
-            <a:pPr>
-              <a:spcAft>
-                <a:spcPts val="600"/>
-              </a:spcAft>
-            </a:pPr>
-            <a:r>
-              <a:rPr sz="2000" b="0" i="0">
-                <a:solidFill>
-                  <a:srgbClr val="333333"/>
-                </a:solidFill>
-                <a:latin typeface="Calibri"/>
-              </a:rPr>
-              <a:t>3.  Create your meta-trainerdemo layer</a:t>
-            </a:r>
-          </a:p>
-          <a:p>
-            <a:pPr>
-              <a:spcAft>
-                <a:spcPts val="600"/>
-              </a:spcAft>
-            </a:pPr>
-            <a:r>
-              <a:rPr sz="2000" b="0" i="0">
-                <a:solidFill>
-                  <a:srgbClr val="333333"/>
-                </a:solidFill>
-                <a:latin typeface="Calibri"/>
-              </a:rPr>
-              <a:t>4.  Add a simple hello-world recipe</a:t>
-            </a:r>
-          </a:p>
-          <a:p>
-            <a:pPr>
-              <a:spcAft>
-                <a:spcPts val="600"/>
-              </a:spcAft>
-            </a:pPr>
-            <a:r>
-              <a:rPr sz="2000" b="0" i="0">
-                <a:solidFill>
-                  <a:srgbClr val="333333"/>
-                </a:solidFill>
-                <a:latin typeface="Calibri"/>
-              </a:rPr>
-              <a:t>5.  Build core-image-base + hello-world</a:t>
-            </a:r>
-          </a:p>
-          <a:p>
-            <a:pPr>
-              <a:spcAft>
-                <a:spcPts val="600"/>
-              </a:spcAft>
-            </a:pPr>
-            <a:r>
-              <a:rPr sz="2000" b="0" i="0">
-                <a:solidFill>
-                  <a:srgbClr val="333333"/>
-                </a:solidFill>
-                <a:latin typeface="Calibri"/>
-              </a:rPr>
-              <a:t>6.  Boot in QEMU, verify your addition</a:t>
-            </a:r>
-          </a:p>
-          <a:p>
-            <a:pPr>
-              <a:spcAft>
-                <a:spcPts val="600"/>
-              </a:spcAft>
-            </a:pPr>
-            <a:r>
-              <a:rPr sz="2000" b="0" i="0">
-                <a:solidFill>
-                  <a:srgbClr val="333333"/>
-                </a:solidFill>
-                <a:latin typeface="Calibri"/>
-              </a:rPr>
-              <a:t>7.  Common errors and quick fixes</a:t>
-            </a:r>
-          </a:p>
-        </p:txBody>
-      </p:sp>
-    </p:spTree>
-  </p:cSld>
-  <p:clrMapOvr>
-    <a:masterClrMapping/>
-  </p:clrMapOvr>
-</p:sld>
-</file>
-
-<file path=ppt/slides/slide9.xml><?xml version="1.0" encoding="utf-8"?>
-<p:sld xmlns:a="http://schemas.openxmlformats.org/drawingml/2006/main" xmlns:p="http://schemas.openxmlformats.org/presentationml/2006/main" xmlns:r="http://schemas.openxmlformats.org/officeDocument/2006/relationships">
-  <p:cSld>
-    <p:spTree>
-      <p:nvGrpSpPr>
-        <p:cNvPr id="1" name=""/>
-        <p:cNvGrpSpPr/>
-        <p:nvPr/>
-      </p:nvGrpSpPr>
-      <p:grpSpPr/>
-      <p:sp>
-        <p:nvSpPr>
-          <p:cNvPr id="2" name="Title 1"/>
-          <p:cNvSpPr>
-            <a:spLocks noGrp="1"/>
-          </p:cNvSpPr>
-          <p:nvPr>
-            <p:ph type="title"/>
-          </p:nvPr>
-        </p:nvSpPr>
-        <p:spPr/>
-        <p:txBody>
-          <a:bodyPr/>
-          <a:lstStyle/>
-          <a:p>
-            <a:r>
-              <a:rPr sz="3200" b="1">
-                <a:solidFill>
-                  <a:srgbClr val="CC0066"/>
-                </a:solidFill>
-                <a:latin typeface="Calibri"/>
-              </a:rPr>
-              <a:t>Step 1 — Verify Setup</a:t>
-            </a:r>
-          </a:p>
-        </p:txBody>
-      </p:sp>
-      <p:sp>
-        <p:nvSpPr>
-          <p:cNvPr id="3" name="TextBox 2"/>
-          <p:cNvSpPr txBox="1"/>
-          <p:nvPr/>
-        </p:nvSpPr>
-        <p:spPr>
-          <a:xfrm>
-            <a:off x="822960" y="1417320"/>
-            <a:ext cx="10515600" cy="365760"/>
-          </a:xfrm>
-          <a:prstGeom prst="rect">
-            <a:avLst/>
-          </a:prstGeom>
-          <a:noFill/>
-        </p:spPr>
-        <p:txBody>
-          <a:bodyPr wrap="square" anchor="t" lIns="45720" rIns="45720">
-            <a:spAutoFit/>
-          </a:bodyPr>
-          <a:lstStyle/>
-          <a:p>
-            <a:pPr algn="l"/>
-            <a:r>
-              <a:rPr sz="1500" b="0" i="1">
-                <a:solidFill>
-                  <a:srgbClr val="666666"/>
-                </a:solidFill>
-                <a:latin typeface="Calibri"/>
-              </a:rPr>
-              <a:t>Confirm everyone's environment is functional before we change anything.</a:t>
-            </a:r>
-          </a:p>
-        </p:txBody>
-      </p:sp>
-      <p:sp>
-        <p:nvSpPr>
-          <p:cNvPr id="4" name="Rounded Rectangle 3"/>
-          <p:cNvSpPr/>
-          <p:nvPr/>
-        </p:nvSpPr>
-        <p:spPr>
-          <a:xfrm>
-            <a:off x="822960" y="1783080"/>
-            <a:ext cx="10515600" cy="4572000"/>
-          </a:xfrm>
-          <a:prstGeom prst="roundRect">
-            <a:avLst/>
-          </a:prstGeom>
-          <a:solidFill>
-            <a:srgbClr val="F5F5F5"/>
-          </a:solidFill>
-          <a:ln w="6350">
-            <a:solidFill>
-              <a:srgbClr val="D0D0D0"/>
-            </a:solidFill>
-          </a:ln>
-          <a:effectLst/>
-        </p:spPr>
-        <p:style>
-          <a:lnRef idx="1">
-            <a:schemeClr val="accent1"/>
-          </a:lnRef>
-          <a:fillRef idx="3">
-            <a:schemeClr val="accent1"/>
-          </a:fillRef>
-          <a:effectRef idx="2">
-            <a:schemeClr val="accent1"/>
-          </a:effectRef>
-          <a:fontRef idx="minor">
-            <a:schemeClr val="lt1"/>
-          </a:fontRef>
-        </p:style>
-        <p:txBody>
-          <a:bodyPr rtlCol="0" anchor="ctr"/>
-          <a:lstStyle/>
-          <a:p>
-            <a:pPr algn="ctr"/>
-          </a:p>
-        </p:txBody>
-      </p:sp>
-      <p:sp>
-        <p:nvSpPr>
-          <p:cNvPr id="5" name="Rectangle 4"/>
-          <p:cNvSpPr/>
-          <p:nvPr/>
-        </p:nvSpPr>
-        <p:spPr>
-          <a:xfrm>
-            <a:off x="822960" y="1783080"/>
-            <a:ext cx="73152" cy="4572000"/>
-          </a:xfrm>
-          <a:prstGeom prst="rect">
-            <a:avLst/>
-          </a:prstGeom>
-          <a:solidFill>
-            <a:srgbClr val="CC0066"/>
-          </a:solidFill>
-          <a:ln>
-            <a:noFill/>
-          </a:ln>
-          <a:effectLst/>
-        </p:spPr>
-        <p:style>
-          <a:lnRef idx="1">
-            <a:schemeClr val="accent1"/>
-          </a:lnRef>
-          <a:fillRef idx="3">
-            <a:schemeClr val="accent1"/>
-          </a:fillRef>
-          <a:effectRef idx="2">
-            <a:schemeClr val="accent1"/>
-          </a:effectRef>
-          <a:fontRef idx="minor">
-            <a:schemeClr val="lt1"/>
-          </a:fontRef>
-        </p:style>
-        <p:txBody>
-          <a:bodyPr rtlCol="0" anchor="ctr"/>
-          <a:lstStyle/>
-          <a:p>
-            <a:pPr algn="ctr"/>
-          </a:p>
-        </p:txBody>
-      </p:sp>
-      <p:sp>
-        <p:nvSpPr>
-          <p:cNvPr id="6" name="TextBox 5"/>
-          <p:cNvSpPr txBox="1"/>
-          <p:nvPr/>
-        </p:nvSpPr>
-        <p:spPr>
-          <a:xfrm>
-            <a:off x="1005840" y="1874519"/>
-            <a:ext cx="10241280" cy="4389120"/>
-          </a:xfrm>
-          <a:prstGeom prst="rect">
-            <a:avLst/>
-          </a:prstGeom>
-          <a:noFill/>
-        </p:spPr>
-        <p:txBody>
-          <a:bodyPr wrap="square" lIns="45720" rIns="45720">
-            <a:spAutoFit/>
-          </a:bodyPr>
-          <a:lstStyle/>
-          <a:p>
-            <a:pPr>
-              <a:spcAft>
-                <a:spcPts val="0"/>
-              </a:spcAft>
-            </a:pPr>
-            <a:r>
-              <a:rPr sz="1200" i="1">
-                <a:solidFill>
-                  <a:srgbClr val="808080"/>
-                </a:solidFill>
-                <a:latin typeface="Consolas"/>
-              </a:rPr>
-              <a:t># Open a terminal in your Ubuntu VM</a:t>
-            </a:r>
-          </a:p>
-          <a:p>
-            <a:pPr>
-              <a:spcAft>
-                <a:spcPts val="0"/>
-              </a:spcAft>
-            </a:pPr>
-            <a:r>
-              <a:rPr sz="1200">
-                <a:solidFill>
-                  <a:srgbClr val="2D2D2D"/>
-                </a:solidFill>
-                <a:latin typeface="Consolas"/>
-              </a:rPr>
-              <a:t> </a:t>
-            </a:r>
-          </a:p>
-          <a:p>
-            <a:pPr>
-              <a:spcAft>
-                <a:spcPts val="0"/>
-              </a:spcAft>
-            </a:pPr>
-            <a:r>
-              <a:rPr sz="1200" i="1">
-                <a:solidFill>
-                  <a:srgbClr val="808080"/>
-                </a:solidFill>
-                <a:latin typeface="Consolas"/>
-              </a:rPr>
-              <a:t># Source the build environment</a:t>
-            </a:r>
-          </a:p>
-          <a:p>
-            <a:pPr>
-              <a:spcAft>
-                <a:spcPts val="0"/>
-              </a:spcAft>
-            </a:pPr>
-            <a:r>
-              <a:rPr sz="1200">
-                <a:solidFill>
-                  <a:srgbClr val="2D2D2D"/>
-                </a:solidFill>
-                <a:latin typeface="Consolas"/>
-              </a:rPr>
-              <a:t>cd ~/yocto</a:t>
-            </a:r>
-          </a:p>
-          <a:p>
-            <a:pPr>
-              <a:spcAft>
-                <a:spcPts val="0"/>
-              </a:spcAft>
-            </a:pPr>
-            <a:r>
-              <a:rPr sz="1200">
-                <a:solidFill>
-                  <a:srgbClr val="2D2D2D"/>
-                </a:solidFill>
-                <a:latin typeface="Consolas"/>
-              </a:rPr>
-              <a:t>source poky/oe-init-build-env build</a:t>
-            </a:r>
-          </a:p>
-          <a:p>
-            <a:pPr>
-              <a:spcAft>
-                <a:spcPts val="0"/>
-              </a:spcAft>
-            </a:pPr>
-            <a:r>
-              <a:rPr sz="1200">
-                <a:solidFill>
-                  <a:srgbClr val="2D2D2D"/>
-                </a:solidFill>
-                <a:latin typeface="Consolas"/>
-              </a:rPr>
-              <a:t> </a:t>
-            </a:r>
-          </a:p>
-          <a:p>
-            <a:pPr>
-              <a:spcAft>
-                <a:spcPts val="0"/>
-              </a:spcAft>
-            </a:pPr>
-            <a:r>
-              <a:rPr sz="1200" i="1">
-                <a:solidFill>
-                  <a:srgbClr val="808080"/>
-                </a:solidFill>
-                <a:latin typeface="Consolas"/>
-              </a:rPr>
-              <a:t># Confirm you can see layers</a:t>
-            </a:r>
-          </a:p>
-          <a:p>
-            <a:pPr>
-              <a:spcAft>
-                <a:spcPts val="0"/>
-              </a:spcAft>
-            </a:pPr>
-            <a:r>
-              <a:rPr sz="1200">
-                <a:solidFill>
-                  <a:srgbClr val="2D2D2D"/>
-                </a:solidFill>
-                <a:latin typeface="Consolas"/>
-              </a:rPr>
-              <a:t>bitbake-layers show-layers</a:t>
-            </a:r>
-          </a:p>
-          <a:p>
-            <a:pPr>
-              <a:spcAft>
-                <a:spcPts val="0"/>
-              </a:spcAft>
-            </a:pPr>
-            <a:r>
-              <a:rPr sz="1200">
-                <a:solidFill>
-                  <a:srgbClr val="2D2D2D"/>
-                </a:solidFill>
-                <a:latin typeface="Consolas"/>
-              </a:rPr>
-              <a:t> </a:t>
-            </a:r>
-          </a:p>
-          <a:p>
-            <a:pPr>
-              <a:spcAft>
-                <a:spcPts val="0"/>
-              </a:spcAft>
-            </a:pPr>
-            <a:r>
-              <a:rPr sz="1200" i="1">
-                <a:solidFill>
-                  <a:srgbClr val="808080"/>
-                </a:solidFill>
-                <a:latin typeface="Consolas"/>
-              </a:rPr>
-              <a:t># Confirm the pre-built image is present</a:t>
-            </a:r>
-          </a:p>
-          <a:p>
-            <a:pPr>
-              <a:spcAft>
-                <a:spcPts val="0"/>
-              </a:spcAft>
-            </a:pPr>
-            <a:r>
-              <a:rPr sz="1200">
-                <a:solidFill>
-                  <a:srgbClr val="2D2D2D"/>
-                </a:solidFill>
-                <a:latin typeface="Consolas"/>
-              </a:rPr>
-              <a:t>ls tmp/deploy/images/qemux86-64/ | head</a:t>
-            </a:r>
-          </a:p>
-          <a:p>
-            <a:pPr>
-              <a:spcAft>
-                <a:spcPts val="0"/>
-              </a:spcAft>
-            </a:pPr>
-            <a:r>
-              <a:rPr sz="1200">
-                <a:solidFill>
-                  <a:srgbClr val="2D2D2D"/>
-                </a:solidFill>
-                <a:latin typeface="Consolas"/>
-              </a:rPr>
-              <a:t> </a:t>
-            </a:r>
-          </a:p>
-          <a:p>
-            <a:pPr>
-              <a:spcAft>
-                <a:spcPts val="0"/>
-              </a:spcAft>
-            </a:pPr>
-            <a:r>
-              <a:rPr sz="1200" i="1">
-                <a:solidFill>
-                  <a:srgbClr val="808080"/>
-                </a:solidFill>
-                <a:latin typeface="Consolas"/>
-              </a:rPr>
-              <a:t># Boot it in QEMU to confirm everything works</a:t>
-            </a:r>
-          </a:p>
-          <a:p>
-            <a:pPr>
-              <a:spcAft>
-                <a:spcPts val="0"/>
-              </a:spcAft>
-            </a:pPr>
-            <a:r>
-              <a:rPr sz="1200">
-                <a:solidFill>
-                  <a:srgbClr val="2D2D2D"/>
-                </a:solidFill>
-                <a:latin typeface="Consolas"/>
-              </a:rPr>
-              <a:t>runqemu qemux86-64 nographic</a:t>
-            </a:r>
-          </a:p>
-          <a:p>
-            <a:pPr>
-              <a:spcAft>
-                <a:spcPts val="0"/>
-              </a:spcAft>
-            </a:pPr>
-            <a:r>
-              <a:rPr sz="1200">
-                <a:solidFill>
-                  <a:srgbClr val="2D2D2D"/>
-                </a:solidFill>
-                <a:latin typeface="Consolas"/>
-              </a:rPr>
-              <a:t> </a:t>
-            </a:r>
-          </a:p>
-          <a:p>
-            <a:pPr>
-              <a:spcAft>
-                <a:spcPts val="0"/>
-              </a:spcAft>
-            </a:pPr>
-            <a:r>
-              <a:rPr sz="1200" i="1">
-                <a:solidFill>
-                  <a:srgbClr val="808080"/>
-                </a:solidFill>
-                <a:latin typeface="Consolas"/>
-              </a:rPr>
-              <a:t># (Press Ctrl+A then X to exit QEMU)</a:t>
             </a:r>
           </a:p>
         </p:txBody>
